--- a/Backup_restore.pptx
+++ b/Backup_restore.pptx
@@ -5,48 +5,47 @@
     <p:sldMasterId id="2147483674" r:id="rId1"/>
   </p:sldMasterIdLst>
   <p:notesMasterIdLst>
-    <p:notesMasterId r:id="rId16"/>
+    <p:notesMasterId r:id="rId15"/>
   </p:notesMasterIdLst>
   <p:sldIdLst>
     <p:sldId id="256" r:id="rId2"/>
     <p:sldId id="261" r:id="rId3"/>
-    <p:sldId id="296" r:id="rId4"/>
-    <p:sldId id="297" r:id="rId5"/>
-    <p:sldId id="298" r:id="rId6"/>
-    <p:sldId id="299" r:id="rId7"/>
-    <p:sldId id="300" r:id="rId8"/>
-    <p:sldId id="301" r:id="rId9"/>
+    <p:sldId id="307" r:id="rId4"/>
+    <p:sldId id="296" r:id="rId5"/>
+    <p:sldId id="297" r:id="rId6"/>
+    <p:sldId id="298" r:id="rId7"/>
+    <p:sldId id="299" r:id="rId8"/>
+    <p:sldId id="300" r:id="rId9"/>
     <p:sldId id="302" r:id="rId10"/>
     <p:sldId id="303" r:id="rId11"/>
     <p:sldId id="304" r:id="rId12"/>
-    <p:sldId id="305" r:id="rId13"/>
-    <p:sldId id="306" r:id="rId14"/>
-    <p:sldId id="260" r:id="rId15"/>
+    <p:sldId id="306" r:id="rId13"/>
+    <p:sldId id="260" r:id="rId14"/>
   </p:sldIdLst>
   <p:sldSz cx="9144000" cy="5143500" type="screen16x9"/>
   <p:notesSz cx="6858000" cy="9144000"/>
   <p:embeddedFontLst>
     <p:embeddedFont>
       <p:font typeface="Cairo" panose="020B0604020202020204" charset="-78"/>
-      <p:regular r:id="rId17"/>
-      <p:bold r:id="rId18"/>
+      <p:regular r:id="rId16"/>
+      <p:bold r:id="rId17"/>
     </p:embeddedFont>
     <p:embeddedFont>
       <p:font typeface="Raleway" pitchFamily="2" charset="0"/>
-      <p:regular r:id="rId19"/>
-      <p:bold r:id="rId20"/>
-      <p:italic r:id="rId21"/>
-      <p:boldItalic r:id="rId22"/>
+      <p:regular r:id="rId18"/>
+      <p:bold r:id="rId19"/>
+      <p:italic r:id="rId20"/>
+      <p:boldItalic r:id="rId21"/>
     </p:embeddedFont>
     <p:embeddedFont>
       <p:font typeface="Space Grotesk" panose="020B0604020202020204" charset="0"/>
-      <p:regular r:id="rId23"/>
-      <p:bold r:id="rId24"/>
+      <p:regular r:id="rId22"/>
+      <p:bold r:id="rId23"/>
     </p:embeddedFont>
     <p:embeddedFont>
       <p:font typeface="Space Grotesk Medium" panose="020B0604020202020204" charset="0"/>
-      <p:regular r:id="rId25"/>
-      <p:bold r:id="rId26"/>
+      <p:regular r:id="rId24"/>
+      <p:bold r:id="rId25"/>
     </p:embeddedFont>
   </p:embeddedFontLst>
   <p:defaultTextStyle>
@@ -1093,133 +1092,6 @@
         <p:cNvPr id="1" name="Shape 298">
           <a:extLst>
             <a:ext uri="{FF2B5EF4-FFF2-40B4-BE49-F238E27FC236}">
-              <a16:creationId xmlns:a16="http://schemas.microsoft.com/office/drawing/2014/main" id="{BFDBE634-3584-18B7-572F-3D34236EC1A5}"/>
-            </a:ext>
-          </a:extLst>
-        </p:cNvPr>
-        <p:cNvGrpSpPr/>
-        <p:nvPr/>
-      </p:nvGrpSpPr>
-      <p:grpSpPr>
-        <a:xfrm>
-          <a:off x="0" y="0"/>
-          <a:ext cx="0" cy="0"/>
-          <a:chOff x="0" y="0"/>
-          <a:chExt cx="0" cy="0"/>
-        </a:xfrm>
-      </p:grpSpPr>
-      <p:sp>
-        <p:nvSpPr>
-          <p:cNvPr id="299" name="Google Shape;299;g54dda1946d_6_332:notes">
-            <a:extLst>
-              <a:ext uri="{FF2B5EF4-FFF2-40B4-BE49-F238E27FC236}">
-                <a16:creationId xmlns:a16="http://schemas.microsoft.com/office/drawing/2014/main" id="{17242644-5673-3318-E2F6-AC9F20C9B49D}"/>
-              </a:ext>
-            </a:extLst>
-          </p:cNvPr>
-          <p:cNvSpPr>
-            <a:spLocks noGrp="1" noRot="1" noChangeAspect="1"/>
-          </p:cNvSpPr>
-          <p:nvPr>
-            <p:ph type="sldImg" idx="2"/>
-          </p:nvPr>
-        </p:nvSpPr>
-        <p:spPr>
-          <a:xfrm>
-            <a:off x="381000" y="685800"/>
-            <a:ext cx="6096000" cy="3429000"/>
-          </a:xfrm>
-          <a:custGeom>
-            <a:avLst/>
-            <a:gdLst/>
-            <a:ahLst/>
-            <a:cxnLst/>
-            <a:rect l="l" t="t" r="r" b="b"/>
-            <a:pathLst>
-              <a:path w="120000" h="120000" extrusionOk="0">
-                <a:moveTo>
-                  <a:pt x="0" y="0"/>
-                </a:moveTo>
-                <a:lnTo>
-                  <a:pt x="120000" y="0"/>
-                </a:lnTo>
-                <a:lnTo>
-                  <a:pt x="120000" y="120000"/>
-                </a:lnTo>
-                <a:lnTo>
-                  <a:pt x="0" y="120000"/>
-                </a:lnTo>
-                <a:close/>
-              </a:path>
-            </a:pathLst>
-          </a:custGeom>
-        </p:spPr>
-      </p:sp>
-      <p:sp>
-        <p:nvSpPr>
-          <p:cNvPr id="300" name="Google Shape;300;g54dda1946d_6_332:notes">
-            <a:extLst>
-              <a:ext uri="{FF2B5EF4-FFF2-40B4-BE49-F238E27FC236}">
-                <a16:creationId xmlns:a16="http://schemas.microsoft.com/office/drawing/2014/main" id="{E96BE3A8-5CCE-A20E-9D93-3C1E293CFCDB}"/>
-              </a:ext>
-            </a:extLst>
-          </p:cNvPr>
-          <p:cNvSpPr txBox="1">
-            <a:spLocks noGrp="1"/>
-          </p:cNvSpPr>
-          <p:nvPr>
-            <p:ph type="body" idx="1"/>
-          </p:nvPr>
-        </p:nvSpPr>
-        <p:spPr>
-          <a:xfrm>
-            <a:off x="685800" y="4343400"/>
-            <a:ext cx="5486400" cy="4114800"/>
-          </a:xfrm>
-          <a:prstGeom prst="rect">
-            <a:avLst/>
-          </a:prstGeom>
-        </p:spPr>
-        <p:txBody>
-          <a:bodyPr spcFirstLastPara="1" wrap="square" lIns="91425" tIns="91425" rIns="91425" bIns="91425" anchor="t" anchorCtr="0">
-            <a:noAutofit/>
-          </a:bodyPr>
-          <a:lstStyle/>
-          <a:p>
-            <a:pPr marL="0" lvl="0" indent="0" algn="l" rtl="0">
-              <a:spcBef>
-                <a:spcPts val="0"/>
-              </a:spcBef>
-              <a:spcAft>
-                <a:spcPts val="0"/>
-              </a:spcAft>
-              <a:buNone/>
-            </a:pPr>
-            <a:endParaRPr/>
-          </a:p>
-        </p:txBody>
-      </p:sp>
-    </p:spTree>
-    <p:extLst>
-      <p:ext uri="{BB962C8B-B14F-4D97-AF65-F5344CB8AC3E}">
-        <p14:creationId xmlns:p14="http://schemas.microsoft.com/office/powerpoint/2010/main" val="2442002192"/>
-      </p:ext>
-    </p:extLst>
-  </p:cSld>
-  <p:clrMapOvr>
-    <a:masterClrMapping/>
-  </p:clrMapOvr>
-</p:notes>
-</file>
-
-<file path=ppt/notesSlides/notesSlide13.xml><?xml version="1.0" encoding="utf-8"?>
-<p:notes xmlns:a="http://schemas.openxmlformats.org/drawingml/2006/main" xmlns:r="http://schemas.openxmlformats.org/officeDocument/2006/relationships" xmlns:p="http://schemas.openxmlformats.org/presentationml/2006/main" showMasterSp="0" showMasterPhAnim="0">
-  <p:cSld>
-    <p:spTree>
-      <p:nvGrpSpPr>
-        <p:cNvPr id="1" name="Shape 298">
-          <a:extLst>
-            <a:ext uri="{FF2B5EF4-FFF2-40B4-BE49-F238E27FC236}">
               <a16:creationId xmlns:a16="http://schemas.microsoft.com/office/drawing/2014/main" id="{C85D5459-FA24-F86E-3BBC-D1FDC5CA274B}"/>
             </a:ext>
           </a:extLst>
@@ -1339,7 +1211,7 @@
 </p:notes>
 </file>
 
-<file path=ppt/notesSlides/notesSlide14.xml><?xml version="1.0" encoding="utf-8"?>
+<file path=ppt/notesSlides/notesSlide13.xml><?xml version="1.0" encoding="utf-8"?>
 <p:notes xmlns:a="http://schemas.openxmlformats.org/drawingml/2006/main" xmlns:r="http://schemas.openxmlformats.org/officeDocument/2006/relationships" xmlns:p="http://schemas.openxmlformats.org/presentationml/2006/main" showMasterSp="0" showMasterPhAnim="0">
   <p:cSld>
     <p:spTree>
@@ -1548,6 +1420,133 @@
 </file>
 
 <file path=ppt/notesSlides/notesSlide3.xml><?xml version="1.0" encoding="utf-8"?>
+<p:notes xmlns:a="http://schemas.openxmlformats.org/drawingml/2006/main" xmlns:r="http://schemas.openxmlformats.org/officeDocument/2006/relationships" xmlns:p="http://schemas.openxmlformats.org/presentationml/2006/main" showMasterSp="0" showMasterPhAnim="0">
+  <p:cSld>
+    <p:spTree>
+      <p:nvGrpSpPr>
+        <p:cNvPr id="1" name="Shape 298">
+          <a:extLst>
+            <a:ext uri="{FF2B5EF4-FFF2-40B4-BE49-F238E27FC236}">
+              <a16:creationId xmlns:a16="http://schemas.microsoft.com/office/drawing/2014/main" id="{3A5FDDCB-9E75-01A0-715A-7192C5DA5644}"/>
+            </a:ext>
+          </a:extLst>
+        </p:cNvPr>
+        <p:cNvGrpSpPr/>
+        <p:nvPr/>
+      </p:nvGrpSpPr>
+      <p:grpSpPr>
+        <a:xfrm>
+          <a:off x="0" y="0"/>
+          <a:ext cx="0" cy="0"/>
+          <a:chOff x="0" y="0"/>
+          <a:chExt cx="0" cy="0"/>
+        </a:xfrm>
+      </p:grpSpPr>
+      <p:sp>
+        <p:nvSpPr>
+          <p:cNvPr id="299" name="Google Shape;299;g54dda1946d_6_332:notes">
+            <a:extLst>
+              <a:ext uri="{FF2B5EF4-FFF2-40B4-BE49-F238E27FC236}">
+                <a16:creationId xmlns:a16="http://schemas.microsoft.com/office/drawing/2014/main" id="{FB10C8D7-F0BD-3B06-85F8-2C614868D5C6}"/>
+              </a:ext>
+            </a:extLst>
+          </p:cNvPr>
+          <p:cNvSpPr>
+            <a:spLocks noGrp="1" noRot="1" noChangeAspect="1"/>
+          </p:cNvSpPr>
+          <p:nvPr>
+            <p:ph type="sldImg" idx="2"/>
+          </p:nvPr>
+        </p:nvSpPr>
+        <p:spPr>
+          <a:xfrm>
+            <a:off x="381000" y="685800"/>
+            <a:ext cx="6096000" cy="3429000"/>
+          </a:xfrm>
+          <a:custGeom>
+            <a:avLst/>
+            <a:gdLst/>
+            <a:ahLst/>
+            <a:cxnLst/>
+            <a:rect l="l" t="t" r="r" b="b"/>
+            <a:pathLst>
+              <a:path w="120000" h="120000" extrusionOk="0">
+                <a:moveTo>
+                  <a:pt x="0" y="0"/>
+                </a:moveTo>
+                <a:lnTo>
+                  <a:pt x="120000" y="0"/>
+                </a:lnTo>
+                <a:lnTo>
+                  <a:pt x="120000" y="120000"/>
+                </a:lnTo>
+                <a:lnTo>
+                  <a:pt x="0" y="120000"/>
+                </a:lnTo>
+                <a:close/>
+              </a:path>
+            </a:pathLst>
+          </a:custGeom>
+        </p:spPr>
+      </p:sp>
+      <p:sp>
+        <p:nvSpPr>
+          <p:cNvPr id="300" name="Google Shape;300;g54dda1946d_6_332:notes">
+            <a:extLst>
+              <a:ext uri="{FF2B5EF4-FFF2-40B4-BE49-F238E27FC236}">
+                <a16:creationId xmlns:a16="http://schemas.microsoft.com/office/drawing/2014/main" id="{D3453DD8-84DC-AE65-96D5-377990EBB846}"/>
+              </a:ext>
+            </a:extLst>
+          </p:cNvPr>
+          <p:cNvSpPr txBox="1">
+            <a:spLocks noGrp="1"/>
+          </p:cNvSpPr>
+          <p:nvPr>
+            <p:ph type="body" idx="1"/>
+          </p:nvPr>
+        </p:nvSpPr>
+        <p:spPr>
+          <a:xfrm>
+            <a:off x="685800" y="4343400"/>
+            <a:ext cx="5486400" cy="4114800"/>
+          </a:xfrm>
+          <a:prstGeom prst="rect">
+            <a:avLst/>
+          </a:prstGeom>
+        </p:spPr>
+        <p:txBody>
+          <a:bodyPr spcFirstLastPara="1" wrap="square" lIns="91425" tIns="91425" rIns="91425" bIns="91425" anchor="t" anchorCtr="0">
+            <a:noAutofit/>
+          </a:bodyPr>
+          <a:lstStyle/>
+          <a:p>
+            <a:pPr marL="0" lvl="0" indent="0" algn="l" rtl="0">
+              <a:spcBef>
+                <a:spcPts val="0"/>
+              </a:spcBef>
+              <a:spcAft>
+                <a:spcPts val="0"/>
+              </a:spcAft>
+              <a:buNone/>
+            </a:pPr>
+            <a:endParaRPr/>
+          </a:p>
+        </p:txBody>
+      </p:sp>
+    </p:spTree>
+    <p:extLst>
+      <p:ext uri="{BB962C8B-B14F-4D97-AF65-F5344CB8AC3E}">
+        <p14:creationId xmlns:p14="http://schemas.microsoft.com/office/powerpoint/2010/main" val="1917595029"/>
+      </p:ext>
+    </p:extLst>
+  </p:cSld>
+  <p:clrMapOvr>
+    <a:masterClrMapping/>
+  </p:clrMapOvr>
+</p:notes>
+</file>
+
+<file path=ppt/notesSlides/notesSlide4.xml><?xml version="1.0" encoding="utf-8"?>
 <p:notes xmlns:a="http://schemas.openxmlformats.org/drawingml/2006/main" xmlns:r="http://schemas.openxmlformats.org/officeDocument/2006/relationships" xmlns:p="http://schemas.openxmlformats.org/presentationml/2006/main" showMasterSp="0" showMasterPhAnim="0">
   <p:cSld>
     <p:spTree>
@@ -1674,7 +1673,7 @@
 </p:notes>
 </file>
 
-<file path=ppt/notesSlides/notesSlide4.xml><?xml version="1.0" encoding="utf-8"?>
+<file path=ppt/notesSlides/notesSlide5.xml><?xml version="1.0" encoding="utf-8"?>
 <p:notes xmlns:a="http://schemas.openxmlformats.org/drawingml/2006/main" xmlns:r="http://schemas.openxmlformats.org/officeDocument/2006/relationships" xmlns:p="http://schemas.openxmlformats.org/presentationml/2006/main" showMasterSp="0" showMasterPhAnim="0">
   <p:cSld>
     <p:spTree>
@@ -1801,7 +1800,7 @@
 </p:notes>
 </file>
 
-<file path=ppt/notesSlides/notesSlide5.xml><?xml version="1.0" encoding="utf-8"?>
+<file path=ppt/notesSlides/notesSlide6.xml><?xml version="1.0" encoding="utf-8"?>
 <p:notes xmlns:a="http://schemas.openxmlformats.org/drawingml/2006/main" xmlns:r="http://schemas.openxmlformats.org/officeDocument/2006/relationships" xmlns:p="http://schemas.openxmlformats.org/presentationml/2006/main" showMasterSp="0" showMasterPhAnim="0">
   <p:cSld>
     <p:spTree>
@@ -1928,7 +1927,7 @@
 </p:notes>
 </file>
 
-<file path=ppt/notesSlides/notesSlide6.xml><?xml version="1.0" encoding="utf-8"?>
+<file path=ppt/notesSlides/notesSlide7.xml><?xml version="1.0" encoding="utf-8"?>
 <p:notes xmlns:a="http://schemas.openxmlformats.org/drawingml/2006/main" xmlns:r="http://schemas.openxmlformats.org/officeDocument/2006/relationships" xmlns:p="http://schemas.openxmlformats.org/presentationml/2006/main" showMasterSp="0" showMasterPhAnim="0">
   <p:cSld>
     <p:spTree>
@@ -2055,7 +2054,7 @@
 </p:notes>
 </file>
 
-<file path=ppt/notesSlides/notesSlide7.xml><?xml version="1.0" encoding="utf-8"?>
+<file path=ppt/notesSlides/notesSlide8.xml><?xml version="1.0" encoding="utf-8"?>
 <p:notes xmlns:a="http://schemas.openxmlformats.org/drawingml/2006/main" xmlns:r="http://schemas.openxmlformats.org/officeDocument/2006/relationships" xmlns:p="http://schemas.openxmlformats.org/presentationml/2006/main" showMasterSp="0" showMasterPhAnim="0">
   <p:cSld>
     <p:spTree>
@@ -2173,133 +2172,6 @@
     <p:extLst>
       <p:ext uri="{BB962C8B-B14F-4D97-AF65-F5344CB8AC3E}">
         <p14:creationId xmlns:p14="http://schemas.microsoft.com/office/powerpoint/2010/main" val="1374878764"/>
-      </p:ext>
-    </p:extLst>
-  </p:cSld>
-  <p:clrMapOvr>
-    <a:masterClrMapping/>
-  </p:clrMapOvr>
-</p:notes>
-</file>
-
-<file path=ppt/notesSlides/notesSlide8.xml><?xml version="1.0" encoding="utf-8"?>
-<p:notes xmlns:a="http://schemas.openxmlformats.org/drawingml/2006/main" xmlns:r="http://schemas.openxmlformats.org/officeDocument/2006/relationships" xmlns:p="http://schemas.openxmlformats.org/presentationml/2006/main" showMasterSp="0" showMasterPhAnim="0">
-  <p:cSld>
-    <p:spTree>
-      <p:nvGrpSpPr>
-        <p:cNvPr id="1" name="Shape 298">
-          <a:extLst>
-            <a:ext uri="{FF2B5EF4-FFF2-40B4-BE49-F238E27FC236}">
-              <a16:creationId xmlns:a16="http://schemas.microsoft.com/office/drawing/2014/main" id="{8E86F042-D3FD-3A76-207B-B1CBF151280A}"/>
-            </a:ext>
-          </a:extLst>
-        </p:cNvPr>
-        <p:cNvGrpSpPr/>
-        <p:nvPr/>
-      </p:nvGrpSpPr>
-      <p:grpSpPr>
-        <a:xfrm>
-          <a:off x="0" y="0"/>
-          <a:ext cx="0" cy="0"/>
-          <a:chOff x="0" y="0"/>
-          <a:chExt cx="0" cy="0"/>
-        </a:xfrm>
-      </p:grpSpPr>
-      <p:sp>
-        <p:nvSpPr>
-          <p:cNvPr id="299" name="Google Shape;299;g54dda1946d_6_332:notes">
-            <a:extLst>
-              <a:ext uri="{FF2B5EF4-FFF2-40B4-BE49-F238E27FC236}">
-                <a16:creationId xmlns:a16="http://schemas.microsoft.com/office/drawing/2014/main" id="{63CBB6FB-7597-5999-1380-472E8FD622C3}"/>
-              </a:ext>
-            </a:extLst>
-          </p:cNvPr>
-          <p:cNvSpPr>
-            <a:spLocks noGrp="1" noRot="1" noChangeAspect="1"/>
-          </p:cNvSpPr>
-          <p:nvPr>
-            <p:ph type="sldImg" idx="2"/>
-          </p:nvPr>
-        </p:nvSpPr>
-        <p:spPr>
-          <a:xfrm>
-            <a:off x="381000" y="685800"/>
-            <a:ext cx="6096000" cy="3429000"/>
-          </a:xfrm>
-          <a:custGeom>
-            <a:avLst/>
-            <a:gdLst/>
-            <a:ahLst/>
-            <a:cxnLst/>
-            <a:rect l="l" t="t" r="r" b="b"/>
-            <a:pathLst>
-              <a:path w="120000" h="120000" extrusionOk="0">
-                <a:moveTo>
-                  <a:pt x="0" y="0"/>
-                </a:moveTo>
-                <a:lnTo>
-                  <a:pt x="120000" y="0"/>
-                </a:lnTo>
-                <a:lnTo>
-                  <a:pt x="120000" y="120000"/>
-                </a:lnTo>
-                <a:lnTo>
-                  <a:pt x="0" y="120000"/>
-                </a:lnTo>
-                <a:close/>
-              </a:path>
-            </a:pathLst>
-          </a:custGeom>
-        </p:spPr>
-      </p:sp>
-      <p:sp>
-        <p:nvSpPr>
-          <p:cNvPr id="300" name="Google Shape;300;g54dda1946d_6_332:notes">
-            <a:extLst>
-              <a:ext uri="{FF2B5EF4-FFF2-40B4-BE49-F238E27FC236}">
-                <a16:creationId xmlns:a16="http://schemas.microsoft.com/office/drawing/2014/main" id="{F166517F-1222-7279-BC30-B65E0F7A63C9}"/>
-              </a:ext>
-            </a:extLst>
-          </p:cNvPr>
-          <p:cNvSpPr txBox="1">
-            <a:spLocks noGrp="1"/>
-          </p:cNvSpPr>
-          <p:nvPr>
-            <p:ph type="body" idx="1"/>
-          </p:nvPr>
-        </p:nvSpPr>
-        <p:spPr>
-          <a:xfrm>
-            <a:off x="685800" y="4343400"/>
-            <a:ext cx="5486400" cy="4114800"/>
-          </a:xfrm>
-          <a:prstGeom prst="rect">
-            <a:avLst/>
-          </a:prstGeom>
-        </p:spPr>
-        <p:txBody>
-          <a:bodyPr spcFirstLastPara="1" wrap="square" lIns="91425" tIns="91425" rIns="91425" bIns="91425" anchor="t" anchorCtr="0">
-            <a:noAutofit/>
-          </a:bodyPr>
-          <a:lstStyle/>
-          <a:p>
-            <a:pPr marL="0" lvl="0" indent="0" algn="l" rtl="0">
-              <a:spcBef>
-                <a:spcPts val="0"/>
-              </a:spcBef>
-              <a:spcAft>
-                <a:spcPts val="0"/>
-              </a:spcAft>
-              <a:buNone/>
-            </a:pPr>
-            <a:endParaRPr/>
-          </a:p>
-        </p:txBody>
-      </p:sp>
-    </p:spTree>
-    <p:extLst>
-      <p:ext uri="{BB962C8B-B14F-4D97-AF65-F5344CB8AC3E}">
-        <p14:creationId xmlns:p14="http://schemas.microsoft.com/office/powerpoint/2010/main" val="1680421918"/>
       </p:ext>
     </p:extLst>
   </p:cSld>
@@ -26046,1220 +25918,6 @@
         <p:cNvPr id="1" name="Shape 301">
           <a:extLst>
             <a:ext uri="{FF2B5EF4-FFF2-40B4-BE49-F238E27FC236}">
-              <a16:creationId xmlns:a16="http://schemas.microsoft.com/office/drawing/2014/main" id="{86303E84-2C5F-F82B-3F59-B35EEDB8A885}"/>
-            </a:ext>
-          </a:extLst>
-        </p:cNvPr>
-        <p:cNvGrpSpPr/>
-        <p:nvPr/>
-      </p:nvGrpSpPr>
-      <p:grpSpPr>
-        <a:xfrm>
-          <a:off x="0" y="0"/>
-          <a:ext cx="0" cy="0"/>
-          <a:chOff x="0" y="0"/>
-          <a:chExt cx="0" cy="0"/>
-        </a:xfrm>
-      </p:grpSpPr>
-      <p:sp>
-        <p:nvSpPr>
-          <p:cNvPr id="303" name="Google Shape;303;p34">
-            <a:extLst>
-              <a:ext uri="{FF2B5EF4-FFF2-40B4-BE49-F238E27FC236}">
-                <a16:creationId xmlns:a16="http://schemas.microsoft.com/office/drawing/2014/main" id="{1BD8E730-90A1-3D21-FE2B-B82AA430408E}"/>
-              </a:ext>
-            </a:extLst>
-          </p:cNvPr>
-          <p:cNvSpPr txBox="1">
-            <a:spLocks noGrp="1"/>
-          </p:cNvSpPr>
-          <p:nvPr>
-            <p:ph type="title"/>
-          </p:nvPr>
-        </p:nvSpPr>
-        <p:spPr>
-          <a:xfrm>
-            <a:off x="720000" y="445025"/>
-            <a:ext cx="7704000" cy="572700"/>
-          </a:xfrm>
-          <a:prstGeom prst="rect">
-            <a:avLst/>
-          </a:prstGeom>
-        </p:spPr>
-        <p:txBody>
-          <a:bodyPr spcFirstLastPara="1" wrap="square" lIns="91425" tIns="91425" rIns="91425" bIns="91425" anchor="t" anchorCtr="0">
-            <a:noAutofit/>
-          </a:bodyPr>
-          <a:lstStyle/>
-          <a:p>
-            <a:pPr lvl="1"/>
-            <a:r>
-              <a:rPr lang="sr-Latn-RS" sz="3200" dirty="0"/>
-              <a:t>Napomene za Docker okruženje</a:t>
-            </a:r>
-            <a:endParaRPr lang="en-US" sz="3200" dirty="0"/>
-          </a:p>
-        </p:txBody>
-      </p:sp>
-      <p:sp>
-        <p:nvSpPr>
-          <p:cNvPr id="2" name="Subtitle 1">
-            <a:extLst>
-              <a:ext uri="{FF2B5EF4-FFF2-40B4-BE49-F238E27FC236}">
-                <a16:creationId xmlns:a16="http://schemas.microsoft.com/office/drawing/2014/main" id="{59A20F57-7B30-2722-1D9F-341D00D84F15}"/>
-              </a:ext>
-            </a:extLst>
-          </p:cNvPr>
-          <p:cNvSpPr>
-            <a:spLocks noGrp="1" noChangeArrowheads="1"/>
-          </p:cNvSpPr>
-          <p:nvPr>
-            <p:ph type="subTitle" idx="3"/>
-          </p:nvPr>
-        </p:nvSpPr>
-        <p:spPr bwMode="auto">
-          <a:xfrm>
-            <a:off x="692498" y="1405830"/>
-            <a:ext cx="8045865" cy="2585323"/>
-          </a:xfrm>
-          <a:prstGeom prst="rect">
-            <a:avLst/>
-          </a:prstGeom>
-          <a:noFill/>
-          <a:ln>
-            <a:noFill/>
-          </a:ln>
-          <a:effectLst/>
-          <a:extLst>
-            <a:ext uri="{909E8E84-426E-40DD-AFC4-6F175D3DCCD1}">
-              <a14:hiddenFill xmlns:a14="http://schemas.microsoft.com/office/drawing/2010/main">
-                <a:solidFill>
-                  <a:schemeClr val="accent1"/>
-                </a:solidFill>
-              </a14:hiddenFill>
-            </a:ext>
-            <a:ext uri="{91240B29-F687-4F45-9708-019B960494DF}">
-              <a14:hiddenLine xmlns:a14="http://schemas.microsoft.com/office/drawing/2010/main" w="9525">
-                <a:solidFill>
-                  <a:schemeClr val="tx1"/>
-                </a:solidFill>
-                <a:miter lim="800000"/>
-                <a:headEnd/>
-                <a:tailEnd/>
-              </a14:hiddenLine>
-            </a:ext>
-            <a:ext uri="{AF507438-7753-43E0-B8FC-AC1667EBCBE1}">
-              <a14:hiddenEffects xmlns:a14="http://schemas.microsoft.com/office/drawing/2010/main">
-                <a:effectLst>
-                  <a:outerShdw dist="35921" dir="2700000" algn="ctr" rotWithShape="0">
-                    <a:schemeClr val="bg2"/>
-                  </a:outerShdw>
-                </a:effectLst>
-              </a14:hiddenEffects>
-            </a:ext>
-          </a:extLst>
-        </p:spPr>
-        <p:txBody>
-          <a:bodyPr vert="horz" wrap="square" lIns="91440" tIns="45720" rIns="91440" bIns="45720" numCol="1" anchor="t" anchorCtr="0" compatLnSpc="1">
-            <a:prstTxWarp prst="textNoShape">
-              <a:avLst/>
-            </a:prstTxWarp>
-            <a:spAutoFit/>
-          </a:bodyPr>
-          <a:lstStyle/>
-          <a:p>
-            <a:pPr marL="0" marR="0" lvl="0" indent="0" algn="l" defTabSz="914400" rtl="0" eaLnBrk="0" fontAlgn="base" latinLnBrk="0" hangingPunct="0">
-              <a:lnSpc>
-                <a:spcPct val="100000"/>
-              </a:lnSpc>
-              <a:spcBef>
-                <a:spcPct val="0"/>
-              </a:spcBef>
-              <a:spcAft>
-                <a:spcPct val="0"/>
-              </a:spcAft>
-              <a:buClrTx/>
-              <a:buSzTx/>
-              <a:buFontTx/>
-              <a:buChar char="•"/>
-              <a:tabLst/>
-            </a:pPr>
-            <a:r>
-              <a:rPr kumimoji="0" lang="en-US" altLang="en-US" sz="1800" b="1" i="0" u="none" strike="noStrike" cap="none" normalizeH="0" baseline="0" dirty="0" err="1">
-                <a:ln>
-                  <a:noFill/>
-                </a:ln>
-                <a:solidFill>
-                  <a:schemeClr val="tx1"/>
-                </a:solidFill>
-                <a:effectLst/>
-                <a:latin typeface="Space Grotesk Medium" panose="020B0604020202020204" charset="0"/>
-                <a:cs typeface="Space Grotesk Medium" panose="020B0604020202020204" charset="0"/>
-              </a:rPr>
-              <a:t>Konzistentnost</a:t>
-            </a:r>
-            <a:r>
-              <a:rPr kumimoji="0" lang="en-US" altLang="en-US" sz="1800" b="1" i="0" u="none" strike="noStrike" cap="none" normalizeH="0" baseline="0" dirty="0">
-                <a:ln>
-                  <a:noFill/>
-                </a:ln>
-                <a:solidFill>
-                  <a:schemeClr val="tx1"/>
-                </a:solidFill>
-                <a:effectLst/>
-                <a:latin typeface="Space Grotesk Medium" panose="020B0604020202020204" charset="0"/>
-                <a:cs typeface="Space Grotesk Medium" panose="020B0604020202020204" charset="0"/>
-              </a:rPr>
-              <a:t> </a:t>
-            </a:r>
-            <a:r>
-              <a:rPr kumimoji="0" lang="en-US" altLang="en-US" sz="1800" b="1" i="0" u="none" strike="noStrike" cap="none" normalizeH="0" baseline="0" dirty="0" err="1">
-                <a:ln>
-                  <a:noFill/>
-                </a:ln>
-                <a:solidFill>
-                  <a:schemeClr val="tx1"/>
-                </a:solidFill>
-                <a:effectLst/>
-                <a:latin typeface="Space Grotesk Medium" panose="020B0604020202020204" charset="0"/>
-                <a:cs typeface="Space Grotesk Medium" panose="020B0604020202020204" charset="0"/>
-              </a:rPr>
-              <a:t>volumena</a:t>
-            </a:r>
-            <a:r>
-              <a:rPr kumimoji="0" lang="en-US" altLang="en-US" sz="1800" b="0" i="0" u="none" strike="noStrike" cap="none" normalizeH="0" baseline="0" dirty="0">
-                <a:ln>
-                  <a:noFill/>
-                </a:ln>
-                <a:solidFill>
-                  <a:schemeClr val="tx1"/>
-                </a:solidFill>
-                <a:effectLst/>
-                <a:latin typeface="Space Grotesk Medium" panose="020B0604020202020204" charset="0"/>
-                <a:cs typeface="Space Grotesk Medium" panose="020B0604020202020204" charset="0"/>
-              </a:rPr>
-              <a:t> — </a:t>
-            </a:r>
-            <a:r>
-              <a:rPr kumimoji="0" lang="en-US" altLang="en-US" sz="1800" b="0" i="0" u="none" strike="noStrike" cap="none" normalizeH="0" baseline="0" dirty="0" err="1">
-                <a:ln>
-                  <a:noFill/>
-                </a:ln>
-                <a:solidFill>
-                  <a:schemeClr val="tx1"/>
-                </a:solidFill>
-                <a:effectLst/>
-                <a:latin typeface="Space Grotesk Medium" panose="020B0604020202020204" charset="0"/>
-                <a:cs typeface="Space Grotesk Medium" panose="020B0604020202020204" charset="0"/>
-              </a:rPr>
-              <a:t>koristiti</a:t>
-            </a:r>
-            <a:r>
-              <a:rPr kumimoji="0" lang="en-US" altLang="en-US" sz="1800" b="0" i="0" u="none" strike="noStrike" cap="none" normalizeH="0" baseline="0" dirty="0">
-                <a:ln>
-                  <a:noFill/>
-                </a:ln>
-                <a:solidFill>
-                  <a:schemeClr val="tx1"/>
-                </a:solidFill>
-                <a:effectLst/>
-                <a:latin typeface="Space Grotesk Medium" panose="020B0604020202020204" charset="0"/>
-                <a:cs typeface="Space Grotesk Medium" panose="020B0604020202020204" charset="0"/>
-              </a:rPr>
-              <a:t> </a:t>
-            </a:r>
-            <a:r>
-              <a:rPr kumimoji="0" lang="en-US" altLang="en-US" sz="1800" b="0" i="0" u="none" strike="noStrike" cap="none" normalizeH="0" baseline="0" dirty="0" err="1">
-                <a:ln>
-                  <a:noFill/>
-                </a:ln>
-                <a:solidFill>
-                  <a:schemeClr val="tx1"/>
-                </a:solidFill>
-                <a:effectLst/>
-                <a:latin typeface="Space Grotesk Medium" panose="020B0604020202020204" charset="0"/>
-                <a:cs typeface="Space Grotesk Medium" panose="020B0604020202020204" charset="0"/>
-              </a:rPr>
-              <a:t>iste</a:t>
-            </a:r>
-            <a:r>
-              <a:rPr kumimoji="0" lang="en-US" altLang="en-US" sz="1800" b="0" i="0" u="none" strike="noStrike" cap="none" normalizeH="0" baseline="0" dirty="0">
-                <a:ln>
-                  <a:noFill/>
-                </a:ln>
-                <a:solidFill>
-                  <a:schemeClr val="tx1"/>
-                </a:solidFill>
-                <a:effectLst/>
-                <a:latin typeface="Space Grotesk Medium" panose="020B0604020202020204" charset="0"/>
-                <a:cs typeface="Space Grotesk Medium" panose="020B0604020202020204" charset="0"/>
-              </a:rPr>
-              <a:t> volume mount-</a:t>
-            </a:r>
-            <a:r>
-              <a:rPr kumimoji="0" lang="en-US" altLang="en-US" sz="1800" b="0" i="0" u="none" strike="noStrike" cap="none" normalizeH="0" baseline="0" dirty="0" err="1">
-                <a:ln>
-                  <a:noFill/>
-                </a:ln>
-                <a:solidFill>
-                  <a:schemeClr val="tx1"/>
-                </a:solidFill>
-                <a:effectLst/>
-                <a:latin typeface="Space Grotesk Medium" panose="020B0604020202020204" charset="0"/>
-                <a:cs typeface="Space Grotesk Medium" panose="020B0604020202020204" charset="0"/>
-              </a:rPr>
-              <a:t>ove</a:t>
-            </a:r>
-            <a:r>
-              <a:rPr kumimoji="0" lang="en-US" altLang="en-US" sz="1800" b="0" i="0" u="none" strike="noStrike" cap="none" normalizeH="0" baseline="0" dirty="0">
-                <a:ln>
-                  <a:noFill/>
-                </a:ln>
-                <a:solidFill>
-                  <a:schemeClr val="tx1"/>
-                </a:solidFill>
-                <a:effectLst/>
-                <a:latin typeface="Space Grotesk Medium" panose="020B0604020202020204" charset="0"/>
-                <a:cs typeface="Space Grotesk Medium" panose="020B0604020202020204" charset="0"/>
-              </a:rPr>
-              <a:t> </a:t>
-            </a:r>
-            <a:r>
-              <a:rPr kumimoji="0" lang="en-US" altLang="en-US" sz="1800" b="0" i="0" u="none" strike="noStrike" cap="none" normalizeH="0" baseline="0" dirty="0" err="1">
-                <a:ln>
-                  <a:noFill/>
-                </a:ln>
-                <a:solidFill>
-                  <a:schemeClr val="tx1"/>
-                </a:solidFill>
-                <a:effectLst/>
-                <a:latin typeface="Space Grotesk Medium" panose="020B0604020202020204" charset="0"/>
-                <a:cs typeface="Space Grotesk Medium" panose="020B0604020202020204" charset="0"/>
-              </a:rPr>
-              <a:t>pri</a:t>
-            </a:r>
-            <a:r>
-              <a:rPr kumimoji="0" lang="en-US" altLang="en-US" sz="1800" b="0" i="0" u="none" strike="noStrike" cap="none" normalizeH="0" baseline="0" dirty="0">
-                <a:ln>
-                  <a:noFill/>
-                </a:ln>
-                <a:solidFill>
-                  <a:schemeClr val="tx1"/>
-                </a:solidFill>
-                <a:effectLst/>
-                <a:latin typeface="Space Grotesk Medium" panose="020B0604020202020204" charset="0"/>
-                <a:cs typeface="Space Grotesk Medium" panose="020B0604020202020204" charset="0"/>
-              </a:rPr>
-              <a:t> backup </a:t>
-            </a:r>
-            <a:r>
-              <a:rPr kumimoji="0" lang="en-US" altLang="en-US" sz="1800" b="0" i="0" u="none" strike="noStrike" cap="none" normalizeH="0" baseline="0" dirty="0" err="1">
-                <a:ln>
-                  <a:noFill/>
-                </a:ln>
-                <a:solidFill>
-                  <a:schemeClr val="tx1"/>
-                </a:solidFill>
-                <a:effectLst/>
-                <a:latin typeface="Space Grotesk Medium" panose="020B0604020202020204" charset="0"/>
-                <a:cs typeface="Space Grotesk Medium" panose="020B0604020202020204" charset="0"/>
-              </a:rPr>
-              <a:t>i</a:t>
-            </a:r>
-            <a:r>
-              <a:rPr kumimoji="0" lang="en-US" altLang="en-US" sz="1800" b="0" i="0" u="none" strike="noStrike" cap="none" normalizeH="0" baseline="0" dirty="0">
-                <a:ln>
-                  <a:noFill/>
-                </a:ln>
-                <a:solidFill>
-                  <a:schemeClr val="tx1"/>
-                </a:solidFill>
-                <a:effectLst/>
-                <a:latin typeface="Space Grotesk Medium" panose="020B0604020202020204" charset="0"/>
-                <a:cs typeface="Space Grotesk Medium" panose="020B0604020202020204" charset="0"/>
-              </a:rPr>
-              <a:t> restore </a:t>
-            </a:r>
-            <a:r>
-              <a:rPr kumimoji="0" lang="en-US" altLang="en-US" sz="1800" b="0" i="0" u="none" strike="noStrike" cap="none" normalizeH="0" baseline="0" dirty="0" err="1">
-                <a:ln>
-                  <a:noFill/>
-                </a:ln>
-                <a:solidFill>
-                  <a:schemeClr val="tx1"/>
-                </a:solidFill>
-                <a:effectLst/>
-                <a:latin typeface="Space Grotesk Medium" panose="020B0604020202020204" charset="0"/>
-                <a:cs typeface="Space Grotesk Medium" panose="020B0604020202020204" charset="0"/>
-              </a:rPr>
-              <a:t>operacijama</a:t>
-            </a:r>
-            <a:r>
-              <a:rPr kumimoji="0" lang="en-US" altLang="en-US" sz="1800" b="0" i="0" u="none" strike="noStrike" cap="none" normalizeH="0" baseline="0" dirty="0">
-                <a:ln>
-                  <a:noFill/>
-                </a:ln>
-                <a:solidFill>
-                  <a:schemeClr val="tx1"/>
-                </a:solidFill>
-                <a:effectLst/>
-                <a:latin typeface="Space Grotesk Medium" panose="020B0604020202020204" charset="0"/>
-                <a:cs typeface="Space Grotesk Medium" panose="020B0604020202020204" charset="0"/>
-              </a:rPr>
-              <a:t> </a:t>
-            </a:r>
-          </a:p>
-          <a:p>
-            <a:pPr marL="0" marR="0" lvl="0" indent="0" algn="l" defTabSz="914400" rtl="0" eaLnBrk="0" fontAlgn="base" latinLnBrk="0" hangingPunct="0">
-              <a:lnSpc>
-                <a:spcPct val="100000"/>
-              </a:lnSpc>
-              <a:spcBef>
-                <a:spcPct val="0"/>
-              </a:spcBef>
-              <a:spcAft>
-                <a:spcPct val="0"/>
-              </a:spcAft>
-              <a:buClrTx/>
-              <a:buSzTx/>
-              <a:buFontTx/>
-              <a:buChar char="•"/>
-              <a:tabLst/>
-            </a:pPr>
-            <a:r>
-              <a:rPr kumimoji="0" lang="en-US" altLang="en-US" sz="1800" b="1" i="0" u="none" strike="noStrike" cap="none" normalizeH="0" baseline="0" dirty="0" err="1">
-                <a:ln>
-                  <a:noFill/>
-                </a:ln>
-                <a:solidFill>
-                  <a:schemeClr val="tx1"/>
-                </a:solidFill>
-                <a:effectLst/>
-                <a:latin typeface="Space Grotesk Medium" panose="020B0604020202020204" charset="0"/>
-                <a:cs typeface="Space Grotesk Medium" panose="020B0604020202020204" charset="0"/>
-              </a:rPr>
-              <a:t>Dozvole</a:t>
-            </a:r>
-            <a:r>
-              <a:rPr kumimoji="0" lang="en-US" altLang="en-US" sz="1800" b="1" i="0" u="none" strike="noStrike" cap="none" normalizeH="0" baseline="0" dirty="0">
-                <a:ln>
-                  <a:noFill/>
-                </a:ln>
-                <a:solidFill>
-                  <a:schemeClr val="tx1"/>
-                </a:solidFill>
-                <a:effectLst/>
-                <a:latin typeface="Space Grotesk Medium" panose="020B0604020202020204" charset="0"/>
-                <a:cs typeface="Space Grotesk Medium" panose="020B0604020202020204" charset="0"/>
-              </a:rPr>
-              <a:t> </a:t>
-            </a:r>
-            <a:r>
-              <a:rPr kumimoji="0" lang="en-US" altLang="en-US" sz="1800" b="1" i="0" u="none" strike="noStrike" cap="none" normalizeH="0" baseline="0" dirty="0" err="1">
-                <a:ln>
-                  <a:noFill/>
-                </a:ln>
-                <a:solidFill>
-                  <a:schemeClr val="tx1"/>
-                </a:solidFill>
-                <a:effectLst/>
-                <a:latin typeface="Space Grotesk Medium" panose="020B0604020202020204" charset="0"/>
-                <a:cs typeface="Space Grotesk Medium" panose="020B0604020202020204" charset="0"/>
-              </a:rPr>
-              <a:t>fajlova</a:t>
-            </a:r>
-            <a:r>
-              <a:rPr kumimoji="0" lang="en-US" altLang="en-US" sz="1800" b="0" i="0" u="none" strike="noStrike" cap="none" normalizeH="0" baseline="0" dirty="0">
-                <a:ln>
-                  <a:noFill/>
-                </a:ln>
-                <a:solidFill>
-                  <a:schemeClr val="tx1"/>
-                </a:solidFill>
-                <a:effectLst/>
-                <a:latin typeface="Space Grotesk Medium" panose="020B0604020202020204" charset="0"/>
-                <a:cs typeface="Space Grotesk Medium" panose="020B0604020202020204" charset="0"/>
-              </a:rPr>
-              <a:t> — </a:t>
-            </a:r>
-            <a:r>
-              <a:rPr kumimoji="0" lang="en-US" altLang="en-US" sz="1800" b="0" i="0" u="none" strike="noStrike" cap="none" normalizeH="0" baseline="0" dirty="0" err="1">
-                <a:ln>
-                  <a:noFill/>
-                </a:ln>
-                <a:solidFill>
-                  <a:schemeClr val="tx1"/>
-                </a:solidFill>
-                <a:effectLst/>
-                <a:latin typeface="Space Grotesk Medium" panose="020B0604020202020204" charset="0"/>
-                <a:cs typeface="Space Grotesk Medium" panose="020B0604020202020204" charset="0"/>
-              </a:rPr>
-              <a:t>osigurati</a:t>
-            </a:r>
-            <a:r>
-              <a:rPr kumimoji="0" lang="en-US" altLang="en-US" sz="1800" b="0" i="0" u="none" strike="noStrike" cap="none" normalizeH="0" baseline="0" dirty="0">
-                <a:ln>
-                  <a:noFill/>
-                </a:ln>
-                <a:solidFill>
-                  <a:schemeClr val="tx1"/>
-                </a:solidFill>
-                <a:effectLst/>
-                <a:latin typeface="Space Grotesk Medium" panose="020B0604020202020204" charset="0"/>
-                <a:cs typeface="Space Grotesk Medium" panose="020B0604020202020204" charset="0"/>
-              </a:rPr>
-              <a:t> da </a:t>
-            </a:r>
-            <a:r>
-              <a:rPr kumimoji="0" lang="en-US" altLang="en-US" sz="1800" b="0" i="0" u="none" strike="noStrike" cap="none" normalizeH="0" baseline="0" dirty="0" err="1">
-                <a:ln>
-                  <a:noFill/>
-                </a:ln>
-                <a:solidFill>
-                  <a:schemeClr val="tx1"/>
-                </a:solidFill>
-                <a:effectLst/>
-                <a:latin typeface="Space Grotesk Medium" panose="020B0604020202020204" charset="0"/>
-                <a:cs typeface="Space Grotesk Medium" panose="020B0604020202020204" charset="0"/>
-              </a:rPr>
-              <a:t>korisnik</a:t>
-            </a:r>
-            <a:r>
-              <a:rPr kumimoji="0" lang="en-US" altLang="en-US" sz="1800" b="0" i="0" u="none" strike="noStrike" cap="none" normalizeH="0" baseline="0" dirty="0">
-                <a:ln>
-                  <a:noFill/>
-                </a:ln>
-                <a:solidFill>
-                  <a:schemeClr val="tx1"/>
-                </a:solidFill>
-                <a:effectLst/>
-                <a:latin typeface="Space Grotesk Medium" panose="020B0604020202020204" charset="0"/>
-                <a:cs typeface="Space Grotesk Medium" panose="020B0604020202020204" charset="0"/>
-              </a:rPr>
-              <a:t> </a:t>
-            </a:r>
-            <a:r>
-              <a:rPr kumimoji="0" lang="en-US" altLang="en-US" sz="1800" b="0" i="0" u="none" strike="noStrike" cap="none" normalizeH="0" baseline="0" dirty="0" err="1">
-                <a:ln>
-                  <a:noFill/>
-                </a:ln>
-                <a:solidFill>
-                  <a:schemeClr val="tx1"/>
-                </a:solidFill>
-                <a:effectLst/>
-                <a:latin typeface="Space Grotesk Medium" panose="020B0604020202020204" charset="0"/>
-                <a:cs typeface="Space Grotesk Medium" panose="020B0604020202020204" charset="0"/>
-              </a:rPr>
-              <a:t>unutar</a:t>
-            </a:r>
-            <a:r>
-              <a:rPr kumimoji="0" lang="en-US" altLang="en-US" sz="1800" b="0" i="0" u="none" strike="noStrike" cap="none" normalizeH="0" baseline="0" dirty="0">
-                <a:ln>
-                  <a:noFill/>
-                </a:ln>
-                <a:solidFill>
-                  <a:schemeClr val="tx1"/>
-                </a:solidFill>
-                <a:effectLst/>
-                <a:latin typeface="Space Grotesk Medium" panose="020B0604020202020204" charset="0"/>
-                <a:cs typeface="Space Grotesk Medium" panose="020B0604020202020204" charset="0"/>
-              </a:rPr>
-              <a:t> </a:t>
-            </a:r>
-            <a:r>
-              <a:rPr kumimoji="0" lang="en-US" altLang="en-US" sz="1800" b="0" i="0" u="none" strike="noStrike" cap="none" normalizeH="0" baseline="0" dirty="0" err="1">
-                <a:ln>
-                  <a:noFill/>
-                </a:ln>
-                <a:solidFill>
-                  <a:schemeClr val="tx1"/>
-                </a:solidFill>
-                <a:effectLst/>
-                <a:latin typeface="Space Grotesk Medium" panose="020B0604020202020204" charset="0"/>
-                <a:cs typeface="Space Grotesk Medium" panose="020B0604020202020204" charset="0"/>
-              </a:rPr>
-              <a:t>kontejnera</a:t>
-            </a:r>
-            <a:r>
-              <a:rPr kumimoji="0" lang="en-US" altLang="en-US" sz="1800" b="0" i="0" u="none" strike="noStrike" cap="none" normalizeH="0" baseline="0" dirty="0">
-                <a:ln>
-                  <a:noFill/>
-                </a:ln>
-                <a:solidFill>
-                  <a:schemeClr val="tx1"/>
-                </a:solidFill>
-                <a:effectLst/>
-                <a:latin typeface="Space Grotesk Medium" panose="020B0604020202020204" charset="0"/>
-                <a:cs typeface="Space Grotesk Medium" panose="020B0604020202020204" charset="0"/>
-              </a:rPr>
-              <a:t> </a:t>
-            </a:r>
-            <a:r>
-              <a:rPr kumimoji="0" lang="en-US" altLang="en-US" sz="1800" b="0" i="0" u="none" strike="noStrike" cap="none" normalizeH="0" baseline="0" dirty="0" err="1">
-                <a:ln>
-                  <a:noFill/>
-                </a:ln>
-                <a:solidFill>
-                  <a:schemeClr val="tx1"/>
-                </a:solidFill>
-                <a:effectLst/>
-                <a:latin typeface="Space Grotesk Medium" panose="020B0604020202020204" charset="0"/>
-                <a:cs typeface="Space Grotesk Medium" panose="020B0604020202020204" charset="0"/>
-              </a:rPr>
-              <a:t>ima</a:t>
-            </a:r>
-            <a:r>
-              <a:rPr kumimoji="0" lang="en-US" altLang="en-US" sz="1800" b="0" i="0" u="none" strike="noStrike" cap="none" normalizeH="0" baseline="0" dirty="0">
-                <a:ln>
-                  <a:noFill/>
-                </a:ln>
-                <a:solidFill>
-                  <a:schemeClr val="tx1"/>
-                </a:solidFill>
-                <a:effectLst/>
-                <a:latin typeface="Space Grotesk Medium" panose="020B0604020202020204" charset="0"/>
-                <a:cs typeface="Space Grotesk Medium" panose="020B0604020202020204" charset="0"/>
-              </a:rPr>
-              <a:t> </a:t>
-            </a:r>
-            <a:r>
-              <a:rPr kumimoji="0" lang="en-US" altLang="en-US" sz="1800" b="0" i="0" u="none" strike="noStrike" cap="none" normalizeH="0" baseline="0" dirty="0" err="1">
-                <a:ln>
-                  <a:noFill/>
-                </a:ln>
-                <a:solidFill>
-                  <a:schemeClr val="tx1"/>
-                </a:solidFill>
-                <a:effectLst/>
-                <a:latin typeface="Space Grotesk Medium" panose="020B0604020202020204" charset="0"/>
-                <a:cs typeface="Space Grotesk Medium" panose="020B0604020202020204" charset="0"/>
-              </a:rPr>
-              <a:t>pravo</a:t>
-            </a:r>
-            <a:r>
-              <a:rPr kumimoji="0" lang="en-US" altLang="en-US" sz="1800" b="0" i="0" u="none" strike="noStrike" cap="none" normalizeH="0" baseline="0" dirty="0">
-                <a:ln>
-                  <a:noFill/>
-                </a:ln>
-                <a:solidFill>
-                  <a:schemeClr val="tx1"/>
-                </a:solidFill>
-                <a:effectLst/>
-                <a:latin typeface="Space Grotesk Medium" panose="020B0604020202020204" charset="0"/>
-                <a:cs typeface="Space Grotesk Medium" panose="020B0604020202020204" charset="0"/>
-              </a:rPr>
-              <a:t> </a:t>
-            </a:r>
-            <a:r>
-              <a:rPr kumimoji="0" lang="en-US" altLang="en-US" sz="1800" b="0" i="0" u="none" strike="noStrike" cap="none" normalizeH="0" baseline="0" dirty="0" err="1">
-                <a:ln>
-                  <a:noFill/>
-                </a:ln>
-                <a:solidFill>
-                  <a:schemeClr val="tx1"/>
-                </a:solidFill>
-                <a:effectLst/>
-                <a:latin typeface="Space Grotesk Medium" panose="020B0604020202020204" charset="0"/>
-                <a:cs typeface="Space Grotesk Medium" panose="020B0604020202020204" charset="0"/>
-              </a:rPr>
-              <a:t>čitanja</a:t>
-            </a:r>
-            <a:r>
-              <a:rPr kumimoji="0" lang="en-US" altLang="en-US" sz="1800" b="0" i="0" u="none" strike="noStrike" cap="none" normalizeH="0" baseline="0" dirty="0">
-                <a:ln>
-                  <a:noFill/>
-                </a:ln>
-                <a:solidFill>
-                  <a:schemeClr val="tx1"/>
-                </a:solidFill>
-                <a:effectLst/>
-                <a:latin typeface="Space Grotesk Medium" panose="020B0604020202020204" charset="0"/>
-                <a:cs typeface="Space Grotesk Medium" panose="020B0604020202020204" charset="0"/>
-              </a:rPr>
-              <a:t> </a:t>
-            </a:r>
-            <a:r>
-              <a:rPr kumimoji="0" lang="en-US" altLang="en-US" sz="1800" b="0" i="0" u="none" strike="noStrike" cap="none" normalizeH="0" baseline="0" dirty="0" err="1">
-                <a:ln>
-                  <a:noFill/>
-                </a:ln>
-                <a:solidFill>
-                  <a:schemeClr val="tx1"/>
-                </a:solidFill>
-                <a:effectLst/>
-                <a:latin typeface="Space Grotesk Medium" panose="020B0604020202020204" charset="0"/>
-                <a:cs typeface="Space Grotesk Medium" panose="020B0604020202020204" charset="0"/>
-              </a:rPr>
-              <a:t>nad</a:t>
-            </a:r>
-            <a:r>
-              <a:rPr kumimoji="0" lang="en-US" altLang="en-US" sz="1800" b="0" i="0" u="none" strike="noStrike" cap="none" normalizeH="0" baseline="0" dirty="0">
-                <a:ln>
-                  <a:noFill/>
-                </a:ln>
-                <a:solidFill>
-                  <a:schemeClr val="tx1"/>
-                </a:solidFill>
-                <a:effectLst/>
-                <a:latin typeface="Space Grotesk Medium" panose="020B0604020202020204" charset="0"/>
-                <a:cs typeface="Space Grotesk Medium" panose="020B0604020202020204" charset="0"/>
-              </a:rPr>
-              <a:t> </a:t>
-            </a:r>
-            <a:r>
-              <a:rPr kumimoji="0" lang="en-US" altLang="en-US" sz="1800" b="0" i="0" u="none" strike="noStrike" cap="none" normalizeH="0" baseline="0" dirty="0" err="1">
-                <a:ln>
-                  <a:noFill/>
-                </a:ln>
-                <a:solidFill>
-                  <a:schemeClr val="tx1"/>
-                </a:solidFill>
-                <a:effectLst/>
-                <a:latin typeface="Space Grotesk Medium" panose="020B0604020202020204" charset="0"/>
-                <a:cs typeface="Space Grotesk Medium" panose="020B0604020202020204" charset="0"/>
-              </a:rPr>
-              <a:t>vraćenim</a:t>
-            </a:r>
-            <a:r>
-              <a:rPr kumimoji="0" lang="en-US" altLang="en-US" sz="1800" b="0" i="0" u="none" strike="noStrike" cap="none" normalizeH="0" baseline="0" dirty="0">
-                <a:ln>
-                  <a:noFill/>
-                </a:ln>
-                <a:solidFill>
-                  <a:schemeClr val="tx1"/>
-                </a:solidFill>
-                <a:effectLst/>
-                <a:latin typeface="Space Grotesk Medium" panose="020B0604020202020204" charset="0"/>
-                <a:cs typeface="Space Grotesk Medium" panose="020B0604020202020204" charset="0"/>
-              </a:rPr>
-              <a:t> </a:t>
-            </a:r>
-            <a:r>
-              <a:rPr kumimoji="0" lang="en-US" altLang="en-US" sz="1800" b="0" i="0" u="none" strike="noStrike" cap="none" normalizeH="0" baseline="0" dirty="0" err="1">
-                <a:ln>
-                  <a:noFill/>
-                </a:ln>
-                <a:solidFill>
-                  <a:schemeClr val="tx1"/>
-                </a:solidFill>
-                <a:effectLst/>
-                <a:latin typeface="Space Grotesk Medium" panose="020B0604020202020204" charset="0"/>
-                <a:cs typeface="Space Grotesk Medium" panose="020B0604020202020204" charset="0"/>
-              </a:rPr>
-              <a:t>fajlovima</a:t>
-            </a:r>
-            <a:r>
-              <a:rPr kumimoji="0" lang="en-US" altLang="en-US" sz="1800" b="0" i="0" u="none" strike="noStrike" cap="none" normalizeH="0" baseline="0" dirty="0">
-                <a:ln>
-                  <a:noFill/>
-                </a:ln>
-                <a:solidFill>
-                  <a:schemeClr val="tx1"/>
-                </a:solidFill>
-                <a:effectLst/>
-                <a:latin typeface="Space Grotesk Medium" panose="020B0604020202020204" charset="0"/>
-                <a:cs typeface="Space Grotesk Medium" panose="020B0604020202020204" charset="0"/>
-              </a:rPr>
-              <a:t> </a:t>
-            </a:r>
-            <a:endParaRPr kumimoji="0" lang="sr-Latn-RS" altLang="en-US" sz="1800" b="0" i="0" u="none" strike="noStrike" cap="none" normalizeH="0" baseline="0" dirty="0">
-              <a:ln>
-                <a:noFill/>
-              </a:ln>
-              <a:solidFill>
-                <a:schemeClr val="tx1"/>
-              </a:solidFill>
-              <a:effectLst/>
-              <a:latin typeface="Space Grotesk Medium" panose="020B0604020202020204" charset="0"/>
-              <a:cs typeface="Space Grotesk Medium" panose="020B0604020202020204" charset="0"/>
-            </a:endParaRPr>
-          </a:p>
-          <a:p>
-            <a:pPr marL="0" marR="0" lvl="0" indent="0" algn="l" defTabSz="914400" rtl="0" eaLnBrk="0" fontAlgn="base" latinLnBrk="0" hangingPunct="0">
-              <a:lnSpc>
-                <a:spcPct val="100000"/>
-              </a:lnSpc>
-              <a:spcBef>
-                <a:spcPct val="0"/>
-              </a:spcBef>
-              <a:spcAft>
-                <a:spcPct val="0"/>
-              </a:spcAft>
-              <a:buClrTx/>
-              <a:buSzTx/>
-              <a:buFontTx/>
-              <a:buChar char="•"/>
-              <a:tabLst/>
-            </a:pPr>
-            <a:r>
-              <a:rPr kumimoji="0" lang="en-US" altLang="en-US" sz="1800" b="1" i="0" u="none" strike="noStrike" cap="none" normalizeH="0" baseline="0" dirty="0" err="1">
-                <a:ln>
-                  <a:noFill/>
-                </a:ln>
-                <a:solidFill>
-                  <a:schemeClr val="tx1"/>
-                </a:solidFill>
-                <a:effectLst/>
-                <a:latin typeface="Space Grotesk Medium" panose="020B0604020202020204" charset="0"/>
-                <a:cs typeface="Space Grotesk Medium" panose="020B0604020202020204" charset="0"/>
-              </a:rPr>
-              <a:t>Pristup</a:t>
-            </a:r>
-            <a:r>
-              <a:rPr kumimoji="0" lang="en-US" altLang="en-US" sz="1800" b="1" i="0" u="none" strike="noStrike" cap="none" normalizeH="0" baseline="0" dirty="0">
-                <a:ln>
-                  <a:noFill/>
-                </a:ln>
-                <a:solidFill>
-                  <a:schemeClr val="tx1"/>
-                </a:solidFill>
-                <a:effectLst/>
-                <a:latin typeface="Space Grotesk Medium" panose="020B0604020202020204" charset="0"/>
-                <a:cs typeface="Space Grotesk Medium" panose="020B0604020202020204" charset="0"/>
-              </a:rPr>
-              <a:t> backup-u</a:t>
-            </a:r>
-            <a:r>
-              <a:rPr kumimoji="0" lang="en-US" altLang="en-US" sz="1800" b="0" i="0" u="none" strike="noStrike" cap="none" normalizeH="0" baseline="0" dirty="0">
-                <a:ln>
-                  <a:noFill/>
-                </a:ln>
-                <a:solidFill>
-                  <a:schemeClr val="tx1"/>
-                </a:solidFill>
-                <a:effectLst/>
-                <a:latin typeface="Space Grotesk Medium" panose="020B0604020202020204" charset="0"/>
-                <a:cs typeface="Space Grotesk Medium" panose="020B0604020202020204" charset="0"/>
-              </a:rPr>
-              <a:t> — </a:t>
-            </a:r>
-            <a:r>
-              <a:rPr kumimoji="0" lang="en-US" altLang="en-US" sz="1800" b="0" i="0" u="none" strike="noStrike" cap="none" normalizeH="0" baseline="0" dirty="0" err="1">
-                <a:ln>
-                  <a:noFill/>
-                </a:ln>
-                <a:solidFill>
-                  <a:schemeClr val="tx1"/>
-                </a:solidFill>
-                <a:effectLst/>
-                <a:latin typeface="Space Grotesk Medium" panose="020B0604020202020204" charset="0"/>
-                <a:cs typeface="Space Grotesk Medium" panose="020B0604020202020204" charset="0"/>
-              </a:rPr>
-              <a:t>montirati</a:t>
-            </a:r>
-            <a:r>
-              <a:rPr kumimoji="0" lang="en-US" altLang="en-US" sz="1800" b="0" i="0" u="none" strike="noStrike" cap="none" normalizeH="0" baseline="0" dirty="0">
-                <a:ln>
-                  <a:noFill/>
-                </a:ln>
-                <a:solidFill>
-                  <a:schemeClr val="tx1"/>
-                </a:solidFill>
-                <a:effectLst/>
-                <a:latin typeface="Space Grotesk Medium" panose="020B0604020202020204" charset="0"/>
-                <a:cs typeface="Space Grotesk Medium" panose="020B0604020202020204" charset="0"/>
-              </a:rPr>
-              <a:t> backup </a:t>
-            </a:r>
-            <a:r>
-              <a:rPr kumimoji="0" lang="en-US" altLang="en-US" sz="1800" b="0" i="0" u="none" strike="noStrike" cap="none" normalizeH="0" baseline="0" dirty="0" err="1">
-                <a:ln>
-                  <a:noFill/>
-                </a:ln>
-                <a:solidFill>
-                  <a:schemeClr val="tx1"/>
-                </a:solidFill>
-                <a:effectLst/>
-                <a:latin typeface="Space Grotesk Medium" panose="020B0604020202020204" charset="0"/>
-                <a:cs typeface="Space Grotesk Medium" panose="020B0604020202020204" charset="0"/>
-              </a:rPr>
-              <a:t>direktorijum</a:t>
-            </a:r>
-            <a:r>
-              <a:rPr kumimoji="0" lang="en-US" altLang="en-US" sz="1800" b="0" i="0" u="none" strike="noStrike" cap="none" normalizeH="0" baseline="0" dirty="0">
-                <a:ln>
-                  <a:noFill/>
-                </a:ln>
-                <a:solidFill>
-                  <a:schemeClr val="tx1"/>
-                </a:solidFill>
-                <a:effectLst/>
-                <a:latin typeface="Space Grotesk Medium" panose="020B0604020202020204" charset="0"/>
-                <a:cs typeface="Space Grotesk Medium" panose="020B0604020202020204" charset="0"/>
-              </a:rPr>
-              <a:t> </a:t>
-            </a:r>
-            <a:r>
-              <a:rPr kumimoji="0" lang="en-US" altLang="en-US" sz="1800" b="0" i="0" u="none" strike="noStrike" cap="none" normalizeH="0" baseline="0" dirty="0" err="1">
-                <a:ln>
-                  <a:noFill/>
-                </a:ln>
-                <a:solidFill>
-                  <a:schemeClr val="tx1"/>
-                </a:solidFill>
-                <a:effectLst/>
-                <a:latin typeface="Space Grotesk Medium" panose="020B0604020202020204" charset="0"/>
-                <a:cs typeface="Space Grotesk Medium" panose="020B0604020202020204" charset="0"/>
-              </a:rPr>
-              <a:t>kako</a:t>
-            </a:r>
-            <a:r>
-              <a:rPr kumimoji="0" lang="en-US" altLang="en-US" sz="1800" b="0" i="0" u="none" strike="noStrike" cap="none" normalizeH="0" baseline="0" dirty="0">
-                <a:ln>
-                  <a:noFill/>
-                </a:ln>
-                <a:solidFill>
-                  <a:schemeClr val="tx1"/>
-                </a:solidFill>
-                <a:effectLst/>
-                <a:latin typeface="Space Grotesk Medium" panose="020B0604020202020204" charset="0"/>
-                <a:cs typeface="Space Grotesk Medium" panose="020B0604020202020204" charset="0"/>
-              </a:rPr>
-              <a:t> bi se </a:t>
-            </a:r>
-            <a:r>
-              <a:rPr kumimoji="0" lang="en-US" altLang="en-US" sz="1800" b="0" i="0" u="none" strike="noStrike" cap="none" normalizeH="0" baseline="0" dirty="0" err="1">
-                <a:ln>
-                  <a:noFill/>
-                </a:ln>
-                <a:solidFill>
-                  <a:schemeClr val="tx1"/>
-                </a:solidFill>
-                <a:effectLst/>
-                <a:latin typeface="Space Grotesk Medium" panose="020B0604020202020204" charset="0"/>
-                <a:cs typeface="Space Grotesk Medium" panose="020B0604020202020204" charset="0"/>
-              </a:rPr>
-              <a:t>fajlovi</a:t>
-            </a:r>
-            <a:r>
-              <a:rPr kumimoji="0" lang="en-US" altLang="en-US" sz="1800" b="0" i="0" u="none" strike="noStrike" cap="none" normalizeH="0" baseline="0" dirty="0">
-                <a:ln>
-                  <a:noFill/>
-                </a:ln>
-                <a:solidFill>
-                  <a:schemeClr val="tx1"/>
-                </a:solidFill>
-                <a:effectLst/>
-                <a:latin typeface="Space Grotesk Medium" panose="020B0604020202020204" charset="0"/>
-                <a:cs typeface="Space Grotesk Medium" panose="020B0604020202020204" charset="0"/>
-              </a:rPr>
-              <a:t> </a:t>
-            </a:r>
-            <a:r>
-              <a:rPr kumimoji="0" lang="en-US" altLang="en-US" sz="1800" b="0" i="0" u="none" strike="noStrike" cap="none" normalizeH="0" baseline="0" dirty="0" err="1">
-                <a:ln>
-                  <a:noFill/>
-                </a:ln>
-                <a:solidFill>
-                  <a:schemeClr val="tx1"/>
-                </a:solidFill>
-                <a:effectLst/>
-                <a:latin typeface="Space Grotesk Medium" panose="020B0604020202020204" charset="0"/>
-                <a:cs typeface="Space Grotesk Medium" panose="020B0604020202020204" charset="0"/>
-              </a:rPr>
-              <a:t>mogli</a:t>
-            </a:r>
-            <a:r>
-              <a:rPr kumimoji="0" lang="en-US" altLang="en-US" sz="1800" b="0" i="0" u="none" strike="noStrike" cap="none" normalizeH="0" baseline="0" dirty="0">
-                <a:ln>
-                  <a:noFill/>
-                </a:ln>
-                <a:solidFill>
-                  <a:schemeClr val="tx1"/>
-                </a:solidFill>
-                <a:effectLst/>
-                <a:latin typeface="Space Grotesk Medium" panose="020B0604020202020204" charset="0"/>
-                <a:cs typeface="Space Grotesk Medium" panose="020B0604020202020204" charset="0"/>
-              </a:rPr>
-              <a:t> </a:t>
-            </a:r>
-            <a:r>
-              <a:rPr kumimoji="0" lang="en-US" altLang="en-US" sz="1800" b="0" i="0" u="none" strike="noStrike" cap="none" normalizeH="0" baseline="0" dirty="0" err="1">
-                <a:ln>
-                  <a:noFill/>
-                </a:ln>
-                <a:solidFill>
-                  <a:schemeClr val="tx1"/>
-                </a:solidFill>
-                <a:effectLst/>
-                <a:latin typeface="Space Grotesk Medium" panose="020B0604020202020204" charset="0"/>
-                <a:cs typeface="Space Grotesk Medium" panose="020B0604020202020204" charset="0"/>
-              </a:rPr>
-              <a:t>kopirati</a:t>
-            </a:r>
-            <a:r>
-              <a:rPr kumimoji="0" lang="en-US" altLang="en-US" sz="1800" b="0" i="0" u="none" strike="noStrike" cap="none" normalizeH="0" baseline="0" dirty="0">
-                <a:ln>
-                  <a:noFill/>
-                </a:ln>
-                <a:solidFill>
-                  <a:schemeClr val="tx1"/>
-                </a:solidFill>
-                <a:effectLst/>
-                <a:latin typeface="Space Grotesk Medium" panose="020B0604020202020204" charset="0"/>
-                <a:cs typeface="Space Grotesk Medium" panose="020B0604020202020204" charset="0"/>
-              </a:rPr>
-              <a:t> </a:t>
-            </a:r>
-            <a:r>
-              <a:rPr kumimoji="0" lang="en-US" altLang="en-US" sz="1800" b="0" i="0" u="none" strike="noStrike" cap="none" normalizeH="0" baseline="0" dirty="0" err="1">
-                <a:ln>
-                  <a:noFill/>
-                </a:ln>
-                <a:solidFill>
-                  <a:schemeClr val="tx1"/>
-                </a:solidFill>
-                <a:effectLst/>
-                <a:latin typeface="Space Grotesk Medium" panose="020B0604020202020204" charset="0"/>
-                <a:cs typeface="Space Grotesk Medium" panose="020B0604020202020204" charset="0"/>
-              </a:rPr>
-              <a:t>između</a:t>
-            </a:r>
-            <a:r>
-              <a:rPr kumimoji="0" lang="en-US" altLang="en-US" sz="1800" b="0" i="0" u="none" strike="noStrike" cap="none" normalizeH="0" baseline="0" dirty="0">
-                <a:ln>
-                  <a:noFill/>
-                </a:ln>
-                <a:solidFill>
-                  <a:schemeClr val="tx1"/>
-                </a:solidFill>
-                <a:effectLst/>
-                <a:latin typeface="Space Grotesk Medium" panose="020B0604020202020204" charset="0"/>
-                <a:cs typeface="Space Grotesk Medium" panose="020B0604020202020204" charset="0"/>
-              </a:rPr>
-              <a:t> </a:t>
-            </a:r>
-            <a:r>
-              <a:rPr kumimoji="0" lang="en-US" altLang="en-US" sz="1800" b="0" i="0" u="none" strike="noStrike" cap="none" normalizeH="0" baseline="0" dirty="0" err="1">
-                <a:ln>
-                  <a:noFill/>
-                </a:ln>
-                <a:solidFill>
-                  <a:schemeClr val="tx1"/>
-                </a:solidFill>
-                <a:effectLst/>
-                <a:latin typeface="Space Grotesk Medium" panose="020B0604020202020204" charset="0"/>
-                <a:cs typeface="Space Grotesk Medium" panose="020B0604020202020204" charset="0"/>
-              </a:rPr>
-              <a:t>kontejnera</a:t>
-            </a:r>
-            <a:r>
-              <a:rPr kumimoji="0" lang="en-US" altLang="en-US" sz="1800" b="0" i="0" u="none" strike="noStrike" cap="none" normalizeH="0" baseline="0" dirty="0">
-                <a:ln>
-                  <a:noFill/>
-                </a:ln>
-                <a:solidFill>
-                  <a:schemeClr val="tx1"/>
-                </a:solidFill>
-                <a:effectLst/>
-                <a:latin typeface="Space Grotesk Medium" panose="020B0604020202020204" charset="0"/>
-                <a:cs typeface="Space Grotesk Medium" panose="020B0604020202020204" charset="0"/>
-              </a:rPr>
-              <a:t> </a:t>
-            </a:r>
-            <a:r>
-              <a:rPr kumimoji="0" lang="en-US" altLang="en-US" sz="1800" b="0" i="0" u="none" strike="noStrike" cap="none" normalizeH="0" baseline="0" dirty="0" err="1">
-                <a:ln>
-                  <a:noFill/>
-                </a:ln>
-                <a:solidFill>
-                  <a:schemeClr val="tx1"/>
-                </a:solidFill>
-                <a:effectLst/>
-                <a:latin typeface="Space Grotesk Medium" panose="020B0604020202020204" charset="0"/>
-                <a:cs typeface="Space Grotesk Medium" panose="020B0604020202020204" charset="0"/>
-              </a:rPr>
-              <a:t>i</a:t>
-            </a:r>
-            <a:r>
-              <a:rPr kumimoji="0" lang="en-US" altLang="en-US" sz="1800" b="0" i="0" u="none" strike="noStrike" cap="none" normalizeH="0" baseline="0" dirty="0">
-                <a:ln>
-                  <a:noFill/>
-                </a:ln>
-                <a:solidFill>
-                  <a:schemeClr val="tx1"/>
-                </a:solidFill>
-                <a:effectLst/>
-                <a:latin typeface="Space Grotesk Medium" panose="020B0604020202020204" charset="0"/>
-                <a:cs typeface="Space Grotesk Medium" panose="020B0604020202020204" charset="0"/>
-              </a:rPr>
-              <a:t> </a:t>
-            </a:r>
-            <a:r>
-              <a:rPr kumimoji="0" lang="en-US" altLang="en-US" sz="1800" b="0" i="0" u="none" strike="noStrike" cap="none" normalizeH="0" baseline="0" dirty="0" err="1">
-                <a:ln>
-                  <a:noFill/>
-                </a:ln>
-                <a:solidFill>
-                  <a:schemeClr val="tx1"/>
-                </a:solidFill>
-                <a:effectLst/>
-                <a:latin typeface="Space Grotesk Medium" panose="020B0604020202020204" charset="0"/>
-                <a:cs typeface="Space Grotesk Medium" panose="020B0604020202020204" charset="0"/>
-              </a:rPr>
-              <a:t>hosta</a:t>
-            </a:r>
-            <a:r>
-              <a:rPr kumimoji="0" lang="en-US" altLang="en-US" sz="1800" b="0" i="0" u="none" strike="noStrike" cap="none" normalizeH="0" baseline="0" dirty="0">
-                <a:ln>
-                  <a:noFill/>
-                </a:ln>
-                <a:solidFill>
-                  <a:schemeClr val="tx1"/>
-                </a:solidFill>
-                <a:effectLst/>
-                <a:latin typeface="Space Grotesk Medium" panose="020B0604020202020204" charset="0"/>
-                <a:cs typeface="Space Grotesk Medium" panose="020B0604020202020204" charset="0"/>
-              </a:rPr>
-              <a:t> </a:t>
-            </a:r>
-            <a:endParaRPr kumimoji="0" lang="sr-Latn-RS" altLang="en-US" sz="1800" b="0" i="0" u="none" strike="noStrike" cap="none" normalizeH="0" baseline="0" dirty="0">
-              <a:ln>
-                <a:noFill/>
-              </a:ln>
-              <a:solidFill>
-                <a:schemeClr val="tx1"/>
-              </a:solidFill>
-              <a:effectLst/>
-              <a:latin typeface="Space Grotesk Medium" panose="020B0604020202020204" charset="0"/>
-              <a:cs typeface="Space Grotesk Medium" panose="020B0604020202020204" charset="0"/>
-            </a:endParaRPr>
-          </a:p>
-          <a:p>
-            <a:pPr marL="0" lvl="0" indent="0" eaLnBrk="0" fontAlgn="base" hangingPunct="0">
-              <a:spcBef>
-                <a:spcPct val="0"/>
-              </a:spcBef>
-              <a:spcAft>
-                <a:spcPct val="0"/>
-              </a:spcAft>
-              <a:buClrTx/>
-              <a:buSzTx/>
-              <a:buFontTx/>
-              <a:buChar char="•"/>
-            </a:pPr>
-            <a:r>
-              <a:rPr lang="en-US" b="1" dirty="0"/>
-              <a:t>UID </a:t>
-            </a:r>
-            <a:r>
-              <a:rPr lang="en-US" b="1" dirty="0" err="1"/>
-              <a:t>korisnika</a:t>
-            </a:r>
-            <a:r>
-              <a:rPr lang="en-US" dirty="0"/>
-              <a:t> — pre restore-a </a:t>
-            </a:r>
-            <a:r>
-              <a:rPr lang="en-US" dirty="0" err="1"/>
-              <a:t>utvrditi</a:t>
-            </a:r>
-            <a:r>
-              <a:rPr lang="en-US" dirty="0"/>
-              <a:t> </a:t>
-            </a:r>
-            <a:r>
-              <a:rPr lang="en-US" dirty="0" err="1"/>
-              <a:t>tačan</a:t>
-            </a:r>
-            <a:r>
-              <a:rPr lang="en-US" dirty="0"/>
-              <a:t> UID </a:t>
-            </a:r>
-            <a:r>
-              <a:rPr lang="en-US" dirty="0" err="1"/>
-              <a:t>korisnika</a:t>
-            </a:r>
-            <a:r>
-              <a:rPr lang="en-US" dirty="0"/>
-              <a:t> </a:t>
-            </a:r>
-            <a:r>
-              <a:rPr lang="en-US" dirty="0" err="1"/>
-              <a:t>unutar</a:t>
-            </a:r>
-            <a:r>
-              <a:rPr lang="en-US" dirty="0"/>
-              <a:t> </a:t>
-            </a:r>
-            <a:r>
-              <a:rPr lang="en-US" dirty="0" err="1"/>
-              <a:t>kontejnera</a:t>
-            </a:r>
-            <a:r>
-              <a:rPr lang="en-US" dirty="0"/>
-              <a:t> (docker exec &lt;</a:t>
-            </a:r>
-            <a:r>
-              <a:rPr lang="en-US" dirty="0" err="1"/>
-              <a:t>kontejner</a:t>
-            </a:r>
-            <a:r>
-              <a:rPr lang="en-US" dirty="0"/>
-              <a:t>&gt; id), </a:t>
-            </a:r>
-            <a:r>
-              <a:rPr lang="en-US" dirty="0" err="1"/>
-              <a:t>jer</a:t>
-            </a:r>
-            <a:r>
-              <a:rPr lang="en-US" dirty="0"/>
-              <a:t> se </a:t>
-            </a:r>
-            <a:r>
-              <a:rPr lang="en-US" dirty="0" err="1"/>
-              <a:t>razlikuje</a:t>
-            </a:r>
-            <a:r>
-              <a:rPr lang="en-US" dirty="0"/>
-              <a:t> od </a:t>
-            </a:r>
-            <a:r>
-              <a:rPr lang="en-US" dirty="0" err="1"/>
-              <a:t>podrazumevano</a:t>
-            </a:r>
-            <a:r>
-              <a:rPr lang="en-US" dirty="0"/>
-              <a:t> </a:t>
-            </a:r>
-            <a:r>
-              <a:rPr lang="en-US" dirty="0" err="1"/>
-              <a:t>očekivanog</a:t>
-            </a:r>
-            <a:endParaRPr kumimoji="0" lang="en-US" altLang="en-US" sz="1800" b="0" i="0" u="none" strike="noStrike" cap="none" normalizeH="0" baseline="0" dirty="0">
-              <a:ln>
-                <a:noFill/>
-              </a:ln>
-              <a:solidFill>
-                <a:schemeClr val="tx1"/>
-              </a:solidFill>
-              <a:effectLst/>
-              <a:latin typeface="Arial" panose="020B0604020202020204" pitchFamily="34" charset="0"/>
-            </a:endParaRPr>
-          </a:p>
-        </p:txBody>
-      </p:sp>
-    </p:spTree>
-    <p:extLst>
-      <p:ext uri="{BB962C8B-B14F-4D97-AF65-F5344CB8AC3E}">
-        <p14:creationId xmlns:p14="http://schemas.microsoft.com/office/powerpoint/2010/main" val="2416369854"/>
-      </p:ext>
-    </p:extLst>
-  </p:cSld>
-  <p:clrMapOvr>
-    <a:masterClrMapping/>
-  </p:clrMapOvr>
-</p:sld>
-</file>
-
-<file path=ppt/slides/slide13.xml><?xml version="1.0" encoding="utf-8"?>
-<p:sld xmlns:a="http://schemas.openxmlformats.org/drawingml/2006/main" xmlns:r="http://schemas.openxmlformats.org/officeDocument/2006/relationships" xmlns:p="http://schemas.openxmlformats.org/presentationml/2006/main">
-  <p:cSld>
-    <p:spTree>
-      <p:nvGrpSpPr>
-        <p:cNvPr id="1" name="Shape 301">
-          <a:extLst>
-            <a:ext uri="{FF2B5EF4-FFF2-40B4-BE49-F238E27FC236}">
               <a16:creationId xmlns:a16="http://schemas.microsoft.com/office/drawing/2014/main" id="{D7E11C44-FE7D-A480-3C84-B2E95F871DB8}"/>
             </a:ext>
           </a:extLst>
@@ -27333,8 +25991,8 @@
         </p:nvSpPr>
         <p:spPr bwMode="auto">
           <a:xfrm>
-            <a:off x="560715" y="1564799"/>
-            <a:ext cx="8160073" cy="3416320"/>
+            <a:off x="622592" y="1559154"/>
+            <a:ext cx="8160073" cy="3139321"/>
           </a:xfrm>
           <a:prstGeom prst="rect">
             <a:avLst/>
@@ -27411,10 +26069,7 @@
             </a:endParaRPr>
           </a:p>
           <a:p>
-            <a:pPr marL="0" marR="0" lvl="0" indent="0" algn="l" defTabSz="914400" rtl="0" eaLnBrk="0" fontAlgn="base" latinLnBrk="0" hangingPunct="0">
-              <a:lnSpc>
-                <a:spcPct val="100000"/>
-              </a:lnSpc>
+            <a:pPr marL="0" lvl="0" indent="0" eaLnBrk="0" fontAlgn="base" hangingPunct="0">
               <a:spcBef>
                 <a:spcPct val="0"/>
               </a:spcBef>
@@ -27425,252 +26080,176 @@
               <a:buSzTx/>
               <a:buFontTx/>
               <a:buChar char="•"/>
-              <a:tabLst/>
             </a:pPr>
             <a:r>
-              <a:rPr kumimoji="0" lang="en-US" altLang="en-US" sz="1800" b="0" i="0" u="none" strike="noStrike" cap="none" normalizeH="0" baseline="0" dirty="0">
-                <a:ln>
-                  <a:noFill/>
-                </a:ln>
+              <a:rPr lang="en-US" altLang="en-US" dirty="0">
                 <a:solidFill>
                   <a:schemeClr val="tx1"/>
                 </a:solidFill>
-                <a:effectLst/>
                 <a:latin typeface="Space Grotesk Medium" panose="020B0604020202020204" charset="0"/>
                 <a:cs typeface="Space Grotesk Medium" panose="020B0604020202020204" charset="0"/>
               </a:rPr>
-              <a:t>Backup </a:t>
+              <a:t> Backup </a:t>
             </a:r>
             <a:r>
-              <a:rPr kumimoji="0" lang="en-US" altLang="en-US" sz="1800" b="0" i="0" u="none" strike="noStrike" cap="none" normalizeH="0" baseline="0" dirty="0" err="1">
-                <a:ln>
-                  <a:noFill/>
-                </a:ln>
+              <a:rPr lang="en-US" altLang="en-US" dirty="0" err="1">
                 <a:solidFill>
                   <a:schemeClr val="tx1"/>
                 </a:solidFill>
-                <a:effectLst/>
                 <a:latin typeface="Space Grotesk Medium" panose="020B0604020202020204" charset="0"/>
                 <a:cs typeface="Space Grotesk Medium" panose="020B0604020202020204" charset="0"/>
               </a:rPr>
               <a:t>izvoditi</a:t>
             </a:r>
             <a:r>
-              <a:rPr kumimoji="0" lang="en-US" altLang="en-US" sz="1800" b="0" i="0" u="none" strike="noStrike" cap="none" normalizeH="0" baseline="0" dirty="0">
-                <a:ln>
-                  <a:noFill/>
-                </a:ln>
+              <a:rPr lang="en-US" altLang="en-US" dirty="0">
                 <a:solidFill>
                   <a:schemeClr val="tx1"/>
                 </a:solidFill>
-                <a:effectLst/>
                 <a:latin typeface="Space Grotesk Medium" panose="020B0604020202020204" charset="0"/>
                 <a:cs typeface="Space Grotesk Medium" panose="020B0604020202020204" charset="0"/>
               </a:rPr>
               <a:t> </a:t>
             </a:r>
             <a:r>
-              <a:rPr kumimoji="0" lang="en-US" altLang="en-US" sz="1800" b="0" i="0" u="none" strike="noStrike" cap="none" normalizeH="0" baseline="0" dirty="0" err="1">
-                <a:ln>
-                  <a:noFill/>
-                </a:ln>
+              <a:rPr lang="en-US" altLang="en-US" dirty="0" err="1">
                 <a:solidFill>
                   <a:schemeClr val="tx1"/>
                 </a:solidFill>
-                <a:effectLst/>
                 <a:latin typeface="Space Grotesk Medium" panose="020B0604020202020204" charset="0"/>
                 <a:cs typeface="Space Grotesk Medium" panose="020B0604020202020204" charset="0"/>
               </a:rPr>
               <a:t>tokom</a:t>
             </a:r>
             <a:r>
-              <a:rPr kumimoji="0" lang="en-US" altLang="en-US" sz="1800" b="0" i="0" u="none" strike="noStrike" cap="none" normalizeH="0" baseline="0" dirty="0">
-                <a:ln>
-                  <a:noFill/>
-                </a:ln>
+              <a:rPr lang="en-US" altLang="en-US" dirty="0">
                 <a:solidFill>
                   <a:schemeClr val="tx1"/>
                 </a:solidFill>
-                <a:effectLst/>
                 <a:latin typeface="Space Grotesk Medium" panose="020B0604020202020204" charset="0"/>
                 <a:cs typeface="Space Grotesk Medium" panose="020B0604020202020204" charset="0"/>
               </a:rPr>
               <a:t> </a:t>
             </a:r>
             <a:r>
-              <a:rPr kumimoji="0" lang="en-US" altLang="en-US" sz="1800" b="0" i="0" u="none" strike="noStrike" cap="none" normalizeH="0" baseline="0" dirty="0" err="1">
-                <a:ln>
-                  <a:noFill/>
-                </a:ln>
+              <a:rPr lang="en-US" altLang="en-US" dirty="0" err="1">
                 <a:solidFill>
                   <a:schemeClr val="tx1"/>
                 </a:solidFill>
-                <a:effectLst/>
                 <a:latin typeface="Space Grotesk Medium" panose="020B0604020202020204" charset="0"/>
                 <a:cs typeface="Space Grotesk Medium" panose="020B0604020202020204" charset="0"/>
               </a:rPr>
               <a:t>zastoja</a:t>
             </a:r>
             <a:r>
-              <a:rPr kumimoji="0" lang="en-US" altLang="en-US" sz="1800" b="0" i="0" u="none" strike="noStrike" cap="none" normalizeH="0" baseline="0" dirty="0">
-                <a:ln>
-                  <a:noFill/>
-                </a:ln>
+              <a:rPr lang="en-US" altLang="en-US" dirty="0">
                 <a:solidFill>
                   <a:schemeClr val="tx1"/>
                 </a:solidFill>
-                <a:effectLst/>
                 <a:latin typeface="Space Grotesk Medium" panose="020B0604020202020204" charset="0"/>
                 <a:cs typeface="Space Grotesk Medium" panose="020B0604020202020204" charset="0"/>
               </a:rPr>
               <a:t> </a:t>
             </a:r>
             <a:r>
-              <a:rPr kumimoji="0" lang="en-US" altLang="en-US" sz="1800" b="0" i="0" u="none" strike="noStrike" cap="none" normalizeH="0" baseline="0" dirty="0" err="1">
-                <a:ln>
-                  <a:noFill/>
-                </a:ln>
+              <a:rPr lang="en-US" altLang="en-US" dirty="0" err="1">
                 <a:solidFill>
                   <a:schemeClr val="tx1"/>
                 </a:solidFill>
-                <a:effectLst/>
                 <a:latin typeface="Space Grotesk Medium" panose="020B0604020202020204" charset="0"/>
                 <a:cs typeface="Space Grotesk Medium" panose="020B0604020202020204" charset="0"/>
               </a:rPr>
               <a:t>sistema</a:t>
             </a:r>
             <a:r>
-              <a:rPr kumimoji="0" lang="en-US" altLang="en-US" sz="1800" b="0" i="0" u="none" strike="noStrike" cap="none" normalizeH="0" baseline="0" dirty="0">
-                <a:ln>
-                  <a:noFill/>
-                </a:ln>
+              <a:rPr lang="en-US" altLang="en-US" dirty="0">
                 <a:solidFill>
                   <a:schemeClr val="tx1"/>
                 </a:solidFill>
-                <a:effectLst/>
                 <a:latin typeface="Space Grotesk Medium" panose="020B0604020202020204" charset="0"/>
                 <a:cs typeface="Space Grotesk Medium" panose="020B0604020202020204" charset="0"/>
               </a:rPr>
               <a:t> </a:t>
             </a:r>
             <a:r>
-              <a:rPr kumimoji="0" lang="en-US" altLang="en-US" sz="1800" b="0" i="0" u="none" strike="noStrike" cap="none" normalizeH="0" baseline="0" dirty="0" err="1">
-                <a:ln>
-                  <a:noFill/>
-                </a:ln>
+              <a:rPr lang="en-US" altLang="en-US" dirty="0" err="1">
                 <a:solidFill>
                   <a:schemeClr val="tx1"/>
                 </a:solidFill>
-                <a:effectLst/>
                 <a:latin typeface="Space Grotesk Medium" panose="020B0604020202020204" charset="0"/>
                 <a:cs typeface="Space Grotesk Medium" panose="020B0604020202020204" charset="0"/>
               </a:rPr>
               <a:t>ili</a:t>
             </a:r>
             <a:r>
-              <a:rPr kumimoji="0" lang="en-US" altLang="en-US" sz="1800" b="0" i="0" u="none" strike="noStrike" cap="none" normalizeH="0" baseline="0" dirty="0">
-                <a:ln>
-                  <a:noFill/>
-                </a:ln>
+              <a:rPr lang="en-US" altLang="en-US" dirty="0">
                 <a:solidFill>
                   <a:schemeClr val="tx1"/>
                 </a:solidFill>
-                <a:effectLst/>
                 <a:latin typeface="Space Grotesk Medium" panose="020B0604020202020204" charset="0"/>
                 <a:cs typeface="Space Grotesk Medium" panose="020B0604020202020204" charset="0"/>
               </a:rPr>
               <a:t> </a:t>
             </a:r>
             <a:r>
-              <a:rPr kumimoji="0" lang="en-US" altLang="en-US" sz="1800" b="0" i="0" u="none" strike="noStrike" cap="none" normalizeH="0" baseline="0" dirty="0" err="1">
-                <a:ln>
-                  <a:noFill/>
-                </a:ln>
+              <a:rPr lang="en-US" altLang="en-US" dirty="0" err="1">
                 <a:solidFill>
                   <a:schemeClr val="tx1"/>
                 </a:solidFill>
-                <a:effectLst/>
                 <a:latin typeface="Space Grotesk Medium" panose="020B0604020202020204" charset="0"/>
                 <a:cs typeface="Space Grotesk Medium" panose="020B0604020202020204" charset="0"/>
               </a:rPr>
-              <a:t>perioda</a:t>
+              <a:t>minimalnog</a:t>
             </a:r>
             <a:r>
-              <a:rPr kumimoji="0" lang="en-US" altLang="en-US" sz="1800" b="0" i="0" u="none" strike="noStrike" cap="none" normalizeH="0" baseline="0" dirty="0">
-                <a:ln>
-                  <a:noFill/>
-                </a:ln>
+              <a:rPr lang="en-US" altLang="en-US" dirty="0">
                 <a:solidFill>
                   <a:schemeClr val="tx1"/>
                 </a:solidFill>
-                <a:effectLst/>
                 <a:latin typeface="Space Grotesk Medium" panose="020B0604020202020204" charset="0"/>
                 <a:cs typeface="Space Grotesk Medium" panose="020B0604020202020204" charset="0"/>
               </a:rPr>
               <a:t> </a:t>
             </a:r>
             <a:r>
-              <a:rPr kumimoji="0" lang="en-US" altLang="en-US" sz="1800" b="0" i="0" u="none" strike="noStrike" cap="none" normalizeH="0" baseline="0" dirty="0" err="1">
-                <a:ln>
-                  <a:noFill/>
-                </a:ln>
+              <a:rPr lang="en-US" altLang="en-US" dirty="0" err="1">
                 <a:solidFill>
                   <a:schemeClr val="tx1"/>
                 </a:solidFill>
-                <a:effectLst/>
-                <a:latin typeface="Space Grotesk Medium" panose="020B0604020202020204" charset="0"/>
-                <a:cs typeface="Space Grotesk Medium" panose="020B0604020202020204" charset="0"/>
-              </a:rPr>
-              <a:t>minimalnog</a:t>
-            </a:r>
-            <a:r>
-              <a:rPr kumimoji="0" lang="en-US" altLang="en-US" sz="1800" b="0" i="0" u="none" strike="noStrike" cap="none" normalizeH="0" baseline="0" dirty="0">
-                <a:ln>
-                  <a:noFill/>
-                </a:ln>
-                <a:solidFill>
-                  <a:schemeClr val="tx1"/>
-                </a:solidFill>
-                <a:effectLst/>
-                <a:latin typeface="Space Grotesk Medium" panose="020B0604020202020204" charset="0"/>
-                <a:cs typeface="Space Grotesk Medium" panose="020B0604020202020204" charset="0"/>
-              </a:rPr>
-              <a:t> </a:t>
-            </a:r>
-            <a:r>
-              <a:rPr kumimoji="0" lang="en-US" altLang="en-US" sz="1800" b="0" i="0" u="none" strike="noStrike" cap="none" normalizeH="0" baseline="0" dirty="0" err="1">
-                <a:ln>
-                  <a:noFill/>
-                </a:ln>
-                <a:solidFill>
-                  <a:schemeClr val="tx1"/>
-                </a:solidFill>
-                <a:effectLst/>
                 <a:latin typeface="Space Grotesk Medium" panose="020B0604020202020204" charset="0"/>
                 <a:cs typeface="Space Grotesk Medium" panose="020B0604020202020204" charset="0"/>
               </a:rPr>
               <a:t>opterećenja</a:t>
             </a:r>
-            <a:r>
-              <a:rPr kumimoji="0" lang="en-US" altLang="en-US" sz="1800" b="0" i="0" u="none" strike="noStrike" cap="none" normalizeH="0" baseline="0" dirty="0">
-                <a:ln>
-                  <a:noFill/>
-                </a:ln>
-                <a:solidFill>
-                  <a:schemeClr val="tx1"/>
-                </a:solidFill>
-                <a:effectLst/>
-                <a:latin typeface="Space Grotesk Medium" panose="020B0604020202020204" charset="0"/>
-                <a:cs typeface="Space Grotesk Medium" panose="020B0604020202020204" charset="0"/>
-              </a:rPr>
-              <a:t> </a:t>
-            </a:r>
+            <a:endParaRPr lang="sr-Latn-RS" altLang="en-US" dirty="0">
+              <a:solidFill>
+                <a:schemeClr val="tx1"/>
+              </a:solidFill>
+              <a:latin typeface="Space Grotesk Medium" panose="020B0604020202020204" charset="0"/>
+              <a:cs typeface="Space Grotesk Medium" panose="020B0604020202020204" charset="0"/>
+            </a:endParaRPr>
           </a:p>
           <a:p>
-            <a:pPr marL="0" marR="0" lvl="0" indent="0" algn="l" defTabSz="914400" rtl="0" eaLnBrk="0" fontAlgn="base" latinLnBrk="0" hangingPunct="0">
-              <a:lnSpc>
-                <a:spcPct val="100000"/>
-              </a:lnSpc>
+            <a:pPr marL="0" lvl="0" indent="0" eaLnBrk="0" fontAlgn="base" hangingPunct="0">
+              <a:spcBef>
+                <a:spcPct val="0"/>
+              </a:spcBef>
+              <a:spcAft>
+                <a:spcPct val="0"/>
+              </a:spcAft>
+              <a:buClrTx/>
+              <a:buSzTx/>
+            </a:pPr>
+            <a:endParaRPr lang="en-US" altLang="en-US" dirty="0">
+              <a:solidFill>
+                <a:schemeClr val="tx1"/>
+              </a:solidFill>
+              <a:latin typeface="Space Grotesk Medium" panose="020B0604020202020204" charset="0"/>
+              <a:cs typeface="Space Grotesk Medium" panose="020B0604020202020204" charset="0"/>
+            </a:endParaRPr>
+          </a:p>
+          <a:p>
+            <a:pPr marL="0" lvl="0" indent="0" eaLnBrk="0" fontAlgn="base" hangingPunct="0">
               <a:spcBef>
                 <a:spcPct val="0"/>
               </a:spcBef>
@@ -27681,238 +26260,206 @@
               <a:buSzTx/>
               <a:buFontTx/>
               <a:buChar char="•"/>
-              <a:tabLst/>
             </a:pPr>
             <a:r>
-              <a:rPr kumimoji="0" lang="en-US" altLang="en-US" sz="1800" b="0" i="0" u="none" strike="noStrike" cap="none" normalizeH="0" baseline="0" dirty="0" err="1">
-                <a:ln>
-                  <a:noFill/>
-                </a:ln>
+              <a:rPr lang="en-US" altLang="en-US" dirty="0">
                 <a:solidFill>
                   <a:schemeClr val="tx1"/>
                 </a:solidFill>
-                <a:effectLst/>
+                <a:latin typeface="Space Grotesk Medium" panose="020B0604020202020204" charset="0"/>
+                <a:cs typeface="Space Grotesk Medium" panose="020B0604020202020204" charset="0"/>
+              </a:rPr>
+              <a:t> </a:t>
+            </a:r>
+            <a:r>
+              <a:rPr lang="en-US" altLang="en-US" dirty="0" err="1">
+                <a:solidFill>
+                  <a:schemeClr val="tx1"/>
+                </a:solidFill>
                 <a:latin typeface="Space Grotesk Medium" panose="020B0604020202020204" charset="0"/>
                 <a:cs typeface="Space Grotesk Medium" panose="020B0604020202020204" charset="0"/>
               </a:rPr>
               <a:t>Kopiranje</a:t>
             </a:r>
             <a:r>
-              <a:rPr kumimoji="0" lang="en-US" altLang="en-US" sz="1800" b="0" i="0" u="none" strike="noStrike" cap="none" normalizeH="0" baseline="0" dirty="0">
-                <a:ln>
-                  <a:noFill/>
-                </a:ln>
+              <a:rPr lang="en-US" altLang="en-US" dirty="0">
                 <a:solidFill>
                   <a:schemeClr val="tx1"/>
                 </a:solidFill>
-                <a:effectLst/>
                 <a:latin typeface="Space Grotesk Medium" panose="020B0604020202020204" charset="0"/>
                 <a:cs typeface="Space Grotesk Medium" panose="020B0604020202020204" charset="0"/>
               </a:rPr>
               <a:t> </a:t>
             </a:r>
             <a:r>
-              <a:rPr kumimoji="0" lang="en-US" altLang="en-US" sz="1800" b="0" i="0" u="none" strike="noStrike" cap="none" normalizeH="0" baseline="0" dirty="0" err="1">
-                <a:ln>
-                  <a:noFill/>
-                </a:ln>
+              <a:rPr lang="en-US" altLang="en-US" dirty="0" err="1">
                 <a:solidFill>
                   <a:schemeClr val="tx1"/>
                 </a:solidFill>
-                <a:effectLst/>
                 <a:latin typeface="Space Grotesk Medium" panose="020B0604020202020204" charset="0"/>
                 <a:cs typeface="Space Grotesk Medium" panose="020B0604020202020204" charset="0"/>
               </a:rPr>
               <a:t>fajlova</a:t>
             </a:r>
             <a:r>
-              <a:rPr kumimoji="0" lang="en-US" altLang="en-US" sz="1800" b="0" i="0" u="none" strike="noStrike" cap="none" normalizeH="0" baseline="0" dirty="0">
-                <a:ln>
-                  <a:noFill/>
-                </a:ln>
+              <a:rPr lang="en-US" altLang="en-US" dirty="0">
                 <a:solidFill>
                   <a:schemeClr val="tx1"/>
                 </a:solidFill>
-                <a:effectLst/>
                 <a:latin typeface="Space Grotesk Medium" panose="020B0604020202020204" charset="0"/>
                 <a:cs typeface="Space Grotesk Medium" panose="020B0604020202020204" charset="0"/>
               </a:rPr>
               <a:t> </a:t>
             </a:r>
             <a:r>
-              <a:rPr kumimoji="0" lang="en-US" altLang="en-US" sz="1800" b="0" i="0" u="none" strike="noStrike" cap="none" normalizeH="0" baseline="0" dirty="0" err="1">
-                <a:ln>
-                  <a:noFill/>
-                </a:ln>
+              <a:rPr lang="en-US" altLang="en-US" dirty="0" err="1">
                 <a:solidFill>
                   <a:schemeClr val="tx1"/>
                 </a:solidFill>
-                <a:effectLst/>
                 <a:latin typeface="Space Grotesk Medium" panose="020B0604020202020204" charset="0"/>
                 <a:cs typeface="Space Grotesk Medium" panose="020B0604020202020204" charset="0"/>
               </a:rPr>
               <a:t>dok</a:t>
             </a:r>
             <a:r>
-              <a:rPr kumimoji="0" lang="en-US" altLang="en-US" sz="1800" b="0" i="0" u="none" strike="noStrike" cap="none" normalizeH="0" baseline="0" dirty="0">
-                <a:ln>
-                  <a:noFill/>
-                </a:ln>
+              <a:rPr lang="en-US" altLang="en-US" dirty="0">
                 <a:solidFill>
                   <a:schemeClr val="tx1"/>
                 </a:solidFill>
-                <a:effectLst/>
                 <a:latin typeface="Space Grotesk Medium" panose="020B0604020202020204" charset="0"/>
                 <a:cs typeface="Space Grotesk Medium" panose="020B0604020202020204" charset="0"/>
               </a:rPr>
               <a:t> je </a:t>
             </a:r>
             <a:r>
-              <a:rPr kumimoji="0" lang="en-US" altLang="en-US" sz="1800" b="0" i="0" u="none" strike="noStrike" cap="none" normalizeH="0" baseline="0" dirty="0" err="1">
-                <a:ln>
-                  <a:noFill/>
-                </a:ln>
+              <a:rPr lang="en-US" altLang="en-US" dirty="0" err="1">
                 <a:solidFill>
                   <a:schemeClr val="tx1"/>
                 </a:solidFill>
-                <a:effectLst/>
                 <a:latin typeface="Space Grotesk Medium" panose="020B0604020202020204" charset="0"/>
                 <a:cs typeface="Space Grotesk Medium" panose="020B0604020202020204" charset="0"/>
               </a:rPr>
               <a:t>baza</a:t>
             </a:r>
             <a:r>
-              <a:rPr kumimoji="0" lang="en-US" altLang="en-US" sz="1800" b="0" i="0" u="none" strike="noStrike" cap="none" normalizeH="0" baseline="0" dirty="0">
-                <a:ln>
-                  <a:noFill/>
-                </a:ln>
+              <a:rPr lang="en-US" altLang="en-US" dirty="0">
                 <a:solidFill>
                   <a:schemeClr val="tx1"/>
                 </a:solidFill>
-                <a:effectLst/>
                 <a:latin typeface="Space Grotesk Medium" panose="020B0604020202020204" charset="0"/>
                 <a:cs typeface="Space Grotesk Medium" panose="020B0604020202020204" charset="0"/>
               </a:rPr>
               <a:t> </a:t>
             </a:r>
             <a:r>
-              <a:rPr kumimoji="0" lang="en-US" altLang="en-US" sz="1800" b="0" i="0" u="none" strike="noStrike" cap="none" normalizeH="0" baseline="0" dirty="0" err="1">
-                <a:ln>
-                  <a:noFill/>
-                </a:ln>
+              <a:rPr lang="en-US" altLang="en-US" dirty="0" err="1">
                 <a:solidFill>
                   <a:schemeClr val="tx1"/>
                 </a:solidFill>
-                <a:effectLst/>
                 <a:latin typeface="Space Grotesk Medium" panose="020B0604020202020204" charset="0"/>
                 <a:cs typeface="Space Grotesk Medium" panose="020B0604020202020204" charset="0"/>
               </a:rPr>
               <a:t>aktivna</a:t>
             </a:r>
             <a:r>
-              <a:rPr kumimoji="0" lang="en-US" altLang="en-US" sz="1800" b="0" i="0" u="none" strike="noStrike" cap="none" normalizeH="0" baseline="0" dirty="0">
-                <a:ln>
-                  <a:noFill/>
-                </a:ln>
+              <a:rPr lang="en-US" altLang="en-US" dirty="0">
                 <a:solidFill>
                   <a:schemeClr val="tx1"/>
                 </a:solidFill>
-                <a:effectLst/>
                 <a:latin typeface="Space Grotesk Medium" panose="020B0604020202020204" charset="0"/>
                 <a:cs typeface="Space Grotesk Medium" panose="020B0604020202020204" charset="0"/>
               </a:rPr>
               <a:t> </a:t>
             </a:r>
             <a:r>
-              <a:rPr kumimoji="0" lang="en-US" altLang="en-US" sz="1800" b="0" i="0" u="none" strike="noStrike" cap="none" normalizeH="0" baseline="0" dirty="0" err="1">
-                <a:ln>
-                  <a:noFill/>
-                </a:ln>
+              <a:rPr lang="en-US" altLang="en-US" dirty="0" err="1">
                 <a:solidFill>
                   <a:schemeClr val="tx1"/>
                 </a:solidFill>
-                <a:effectLst/>
                 <a:latin typeface="Space Grotesk Medium" panose="020B0604020202020204" charset="0"/>
                 <a:cs typeface="Space Grotesk Medium" panose="020B0604020202020204" charset="0"/>
               </a:rPr>
               <a:t>može</a:t>
             </a:r>
             <a:r>
-              <a:rPr kumimoji="0" lang="en-US" altLang="en-US" sz="1800" b="0" i="0" u="none" strike="noStrike" cap="none" normalizeH="0" baseline="0" dirty="0">
-                <a:ln>
-                  <a:noFill/>
-                </a:ln>
+              <a:rPr lang="en-US" altLang="en-US" dirty="0">
                 <a:solidFill>
                   <a:schemeClr val="tx1"/>
                 </a:solidFill>
-                <a:effectLst/>
                 <a:latin typeface="Space Grotesk Medium" panose="020B0604020202020204" charset="0"/>
                 <a:cs typeface="Space Grotesk Medium" panose="020B0604020202020204" charset="0"/>
               </a:rPr>
               <a:t> </a:t>
             </a:r>
             <a:r>
-              <a:rPr kumimoji="0" lang="en-US" altLang="en-US" sz="1800" b="0" i="0" u="none" strike="noStrike" cap="none" normalizeH="0" baseline="0" dirty="0" err="1">
-                <a:ln>
-                  <a:noFill/>
-                </a:ln>
+              <a:rPr lang="en-US" altLang="en-US" dirty="0" err="1">
                 <a:solidFill>
                   <a:schemeClr val="tx1"/>
                 </a:solidFill>
-                <a:effectLst/>
                 <a:latin typeface="Space Grotesk Medium" panose="020B0604020202020204" charset="0"/>
                 <a:cs typeface="Space Grotesk Medium" panose="020B0604020202020204" charset="0"/>
               </a:rPr>
-              <a:t>rezultovati</a:t>
+              <a:t>dovesti</a:t>
             </a:r>
             <a:r>
-              <a:rPr kumimoji="0" lang="en-US" altLang="en-US" sz="1800" b="0" i="0" u="none" strike="noStrike" cap="none" normalizeH="0" baseline="0" dirty="0">
-                <a:ln>
-                  <a:noFill/>
-                </a:ln>
+              <a:rPr lang="en-US" altLang="en-US" dirty="0">
                 <a:solidFill>
                   <a:schemeClr val="tx1"/>
                 </a:solidFill>
-                <a:effectLst/>
                 <a:latin typeface="Space Grotesk Medium" panose="020B0604020202020204" charset="0"/>
                 <a:cs typeface="Space Grotesk Medium" panose="020B0604020202020204" charset="0"/>
               </a:rPr>
-              <a:t> </a:t>
+              <a:t> do </a:t>
             </a:r>
             <a:r>
-              <a:rPr kumimoji="0" lang="en-US" altLang="en-US" sz="1800" b="0" i="0" u="none" strike="noStrike" cap="none" normalizeH="0" baseline="0" dirty="0" err="1">
-                <a:ln>
-                  <a:noFill/>
-                </a:ln>
+              <a:rPr lang="en-US" altLang="en-US" dirty="0" err="1">
                 <a:solidFill>
                   <a:schemeClr val="tx1"/>
                 </a:solidFill>
-                <a:effectLst/>
                 <a:latin typeface="Space Grotesk Medium" panose="020B0604020202020204" charset="0"/>
                 <a:cs typeface="Space Grotesk Medium" panose="020B0604020202020204" charset="0"/>
               </a:rPr>
-              <a:t>nekonzistentnim</a:t>
+              <a:t>nekonzistentnog</a:t>
             </a:r>
             <a:r>
-              <a:rPr kumimoji="0" lang="en-US" altLang="en-US" sz="1800" b="0" i="0" u="none" strike="noStrike" cap="none" normalizeH="0" baseline="0" dirty="0">
-                <a:ln>
-                  <a:noFill/>
-                </a:ln>
+              <a:rPr lang="en-US" altLang="en-US" dirty="0">
                 <a:solidFill>
                   <a:schemeClr val="tx1"/>
                 </a:solidFill>
-                <a:effectLst/>
                 <a:latin typeface="Space Grotesk Medium" panose="020B0604020202020204" charset="0"/>
                 <a:cs typeface="Space Grotesk Medium" panose="020B0604020202020204" charset="0"/>
               </a:rPr>
-              <a:t> backup-om </a:t>
+              <a:t> backup-a</a:t>
             </a:r>
+            <a:endParaRPr lang="sr-Latn-RS" altLang="en-US" dirty="0">
+              <a:solidFill>
+                <a:schemeClr val="tx1"/>
+              </a:solidFill>
+              <a:latin typeface="Space Grotesk Medium" panose="020B0604020202020204" charset="0"/>
+              <a:cs typeface="Space Grotesk Medium" panose="020B0604020202020204" charset="0"/>
+            </a:endParaRPr>
           </a:p>
           <a:p>
-            <a:pPr marL="0" marR="0" lvl="0" indent="0" algn="l" defTabSz="914400" rtl="0" eaLnBrk="0" fontAlgn="base" latinLnBrk="0" hangingPunct="0">
-              <a:lnSpc>
-                <a:spcPct val="100000"/>
-              </a:lnSpc>
+            <a:pPr marL="0" lvl="0" indent="0" eaLnBrk="0" fontAlgn="base" hangingPunct="0">
+              <a:spcBef>
+                <a:spcPct val="0"/>
+              </a:spcBef>
+              <a:spcAft>
+                <a:spcPct val="0"/>
+              </a:spcAft>
+              <a:buClrTx/>
+              <a:buSzTx/>
+            </a:pPr>
+            <a:endParaRPr lang="en-US" altLang="en-US" dirty="0">
+              <a:solidFill>
+                <a:schemeClr val="tx1"/>
+              </a:solidFill>
+              <a:latin typeface="Space Grotesk Medium" panose="020B0604020202020204" charset="0"/>
+              <a:cs typeface="Space Grotesk Medium" panose="020B0604020202020204" charset="0"/>
+            </a:endParaRPr>
+          </a:p>
+          <a:p>
+            <a:pPr marL="0" lvl="0" indent="0" eaLnBrk="0" fontAlgn="base" hangingPunct="0">
               <a:spcBef>
                 <a:spcPct val="0"/>
               </a:spcBef>
@@ -27923,210 +26470,136 @@
               <a:buSzTx/>
               <a:buFontTx/>
               <a:buChar char="•"/>
-              <a:tabLst/>
             </a:pPr>
             <a:r>
-              <a:rPr kumimoji="0" lang="en-US" altLang="en-US" sz="1800" b="0" i="0" u="none" strike="noStrike" cap="none" normalizeH="0" baseline="0" dirty="0" err="1">
-                <a:ln>
-                  <a:noFill/>
-                </a:ln>
+              <a:rPr lang="en-US" altLang="en-US" dirty="0">
                 <a:solidFill>
                   <a:schemeClr val="tx1"/>
                 </a:solidFill>
-                <a:effectLst/>
+                <a:latin typeface="Space Grotesk Medium" panose="020B0604020202020204" charset="0"/>
+                <a:cs typeface="Space Grotesk Medium" panose="020B0604020202020204" charset="0"/>
+              </a:rPr>
+              <a:t> </a:t>
+            </a:r>
+            <a:r>
+              <a:rPr lang="en-US" altLang="en-US" dirty="0" err="1">
+                <a:solidFill>
+                  <a:schemeClr val="tx1"/>
+                </a:solidFill>
                 <a:latin typeface="Space Grotesk Medium" panose="020B0604020202020204" charset="0"/>
                 <a:cs typeface="Space Grotesk Medium" panose="020B0604020202020204" charset="0"/>
               </a:rPr>
               <a:t>Razmotriti</a:t>
             </a:r>
             <a:r>
-              <a:rPr kumimoji="0" lang="en-US" altLang="en-US" sz="1800" b="0" i="0" u="none" strike="noStrike" cap="none" normalizeH="0" baseline="0" dirty="0">
-                <a:ln>
-                  <a:noFill/>
-                </a:ln>
+              <a:rPr lang="en-US" altLang="en-US" dirty="0">
                 <a:solidFill>
                   <a:schemeClr val="tx1"/>
                 </a:solidFill>
-                <a:effectLst/>
+                <a:latin typeface="Space Grotesk Medium" panose="020B0604020202020204" charset="0"/>
+                <a:cs typeface="Space Grotesk Medium" panose="020B0604020202020204" charset="0"/>
+              </a:rPr>
+              <a:t> filesystem/storage snapshot </a:t>
+            </a:r>
+            <a:r>
+              <a:rPr lang="en-US" altLang="en-US" dirty="0" err="1">
+                <a:solidFill>
+                  <a:schemeClr val="tx1"/>
+                </a:solidFill>
+                <a:latin typeface="Space Grotesk Medium" panose="020B0604020202020204" charset="0"/>
+                <a:cs typeface="Space Grotesk Medium" panose="020B0604020202020204" charset="0"/>
+              </a:rPr>
+              <a:t>mehanizme</a:t>
+            </a:r>
+            <a:r>
+              <a:rPr lang="en-US" altLang="en-US" dirty="0">
+                <a:solidFill>
+                  <a:schemeClr val="tx1"/>
+                </a:solidFill>
                 <a:latin typeface="Space Grotesk Medium" panose="020B0604020202020204" charset="0"/>
                 <a:cs typeface="Space Grotesk Medium" panose="020B0604020202020204" charset="0"/>
               </a:rPr>
               <a:t> </a:t>
             </a:r>
             <a:r>
-              <a:rPr kumimoji="0" lang="en-US" altLang="en-US" sz="1800" b="0" i="0" u="none" strike="noStrike" cap="none" normalizeH="0" baseline="0" dirty="0" err="1">
-                <a:ln>
-                  <a:noFill/>
-                </a:ln>
+              <a:rPr lang="en-US" altLang="en-US" dirty="0" err="1">
                 <a:solidFill>
                   <a:schemeClr val="tx1"/>
                 </a:solidFill>
-                <a:effectLst/>
                 <a:latin typeface="Space Grotesk Medium" panose="020B0604020202020204" charset="0"/>
                 <a:cs typeface="Space Grotesk Medium" panose="020B0604020202020204" charset="0"/>
               </a:rPr>
-              <a:t>korišćenje</a:t>
+              <a:t>ako</a:t>
             </a:r>
             <a:r>
-              <a:rPr kumimoji="0" lang="en-US" altLang="en-US" sz="1800" b="0" i="0" u="none" strike="noStrike" cap="none" normalizeH="0" baseline="0" dirty="0">
-                <a:ln>
-                  <a:noFill/>
-                </a:ln>
+              <a:rPr lang="en-US" altLang="en-US" dirty="0">
                 <a:solidFill>
                   <a:schemeClr val="tx1"/>
                 </a:solidFill>
-                <a:effectLst/>
-                <a:latin typeface="Space Grotesk Medium" panose="020B0604020202020204" charset="0"/>
-                <a:cs typeface="Space Grotesk Medium" panose="020B0604020202020204" charset="0"/>
-              </a:rPr>
-              <a:t> filesystem </a:t>
-            </a:r>
-            <a:r>
-              <a:rPr kumimoji="0" lang="en-US" altLang="en-US" sz="1800" b="0" i="0" u="none" strike="noStrike" cap="none" normalizeH="0" baseline="0" dirty="0" err="1">
-                <a:ln>
-                  <a:noFill/>
-                </a:ln>
-                <a:solidFill>
-                  <a:schemeClr val="tx1"/>
-                </a:solidFill>
-                <a:effectLst/>
-                <a:latin typeface="Space Grotesk Medium" panose="020B0604020202020204" charset="0"/>
-                <a:cs typeface="Space Grotesk Medium" panose="020B0604020202020204" charset="0"/>
-              </a:rPr>
-              <a:t>ili</a:t>
-            </a:r>
-            <a:r>
-              <a:rPr kumimoji="0" lang="en-US" altLang="en-US" sz="1800" b="0" i="0" u="none" strike="noStrike" cap="none" normalizeH="0" baseline="0" dirty="0">
-                <a:ln>
-                  <a:noFill/>
-                </a:ln>
-                <a:solidFill>
-                  <a:schemeClr val="tx1"/>
-                </a:solidFill>
-                <a:effectLst/>
-                <a:latin typeface="Space Grotesk Medium" panose="020B0604020202020204" charset="0"/>
-                <a:cs typeface="Space Grotesk Medium" panose="020B0604020202020204" charset="0"/>
-              </a:rPr>
-              <a:t> storage snapshot </a:t>
-            </a:r>
-            <a:r>
-              <a:rPr kumimoji="0" lang="en-US" altLang="en-US" sz="1800" b="0" i="0" u="none" strike="noStrike" cap="none" normalizeH="0" baseline="0" dirty="0" err="1">
-                <a:ln>
-                  <a:noFill/>
-                </a:ln>
-                <a:solidFill>
-                  <a:schemeClr val="tx1"/>
-                </a:solidFill>
-                <a:effectLst/>
-                <a:latin typeface="Space Grotesk Medium" panose="020B0604020202020204" charset="0"/>
-                <a:cs typeface="Space Grotesk Medium" panose="020B0604020202020204" charset="0"/>
-              </a:rPr>
-              <a:t>mehanizama</a:t>
-            </a:r>
-            <a:r>
-              <a:rPr kumimoji="0" lang="en-US" altLang="en-US" sz="1800" b="0" i="0" u="none" strike="noStrike" cap="none" normalizeH="0" baseline="0" dirty="0">
-                <a:ln>
-                  <a:noFill/>
-                </a:ln>
-                <a:solidFill>
-                  <a:schemeClr val="tx1"/>
-                </a:solidFill>
-                <a:effectLst/>
                 <a:latin typeface="Space Grotesk Medium" panose="020B0604020202020204" charset="0"/>
                 <a:cs typeface="Space Grotesk Medium" panose="020B0604020202020204" charset="0"/>
               </a:rPr>
               <a:t> </a:t>
             </a:r>
             <a:r>
-              <a:rPr kumimoji="0" lang="en-US" altLang="en-US" sz="1800" b="0" i="0" u="none" strike="noStrike" cap="none" normalizeH="0" baseline="0" dirty="0" err="1">
-                <a:ln>
-                  <a:noFill/>
-                </a:ln>
+              <a:rPr lang="en-US" altLang="en-US" dirty="0" err="1">
                 <a:solidFill>
                   <a:schemeClr val="tx1"/>
                 </a:solidFill>
-                <a:effectLst/>
                 <a:latin typeface="Space Grotesk Medium" panose="020B0604020202020204" charset="0"/>
                 <a:cs typeface="Space Grotesk Medium" panose="020B0604020202020204" charset="0"/>
               </a:rPr>
-              <a:t>ako</a:t>
+              <a:t>su</a:t>
             </a:r>
             <a:r>
-              <a:rPr kumimoji="0" lang="en-US" altLang="en-US" sz="1800" b="0" i="0" u="none" strike="noStrike" cap="none" normalizeH="0" baseline="0" dirty="0">
-                <a:ln>
-                  <a:noFill/>
-                </a:ln>
+              <a:rPr lang="en-US" altLang="en-US" dirty="0">
                 <a:solidFill>
                   <a:schemeClr val="tx1"/>
                 </a:solidFill>
-                <a:effectLst/>
                 <a:latin typeface="Space Grotesk Medium" panose="020B0604020202020204" charset="0"/>
                 <a:cs typeface="Space Grotesk Medium" panose="020B0604020202020204" charset="0"/>
               </a:rPr>
               <a:t> </a:t>
             </a:r>
             <a:r>
-              <a:rPr kumimoji="0" lang="en-US" altLang="en-US" sz="1800" b="0" i="0" u="none" strike="noStrike" cap="none" normalizeH="0" baseline="0" dirty="0" err="1">
-                <a:ln>
-                  <a:noFill/>
-                </a:ln>
+              <a:rPr lang="en-US" altLang="en-US" dirty="0" err="1">
                 <a:solidFill>
                   <a:schemeClr val="tx1"/>
                 </a:solidFill>
-                <a:effectLst/>
-                <a:latin typeface="Space Grotesk Medium" panose="020B0604020202020204" charset="0"/>
-                <a:cs typeface="Space Grotesk Medium" panose="020B0604020202020204" charset="0"/>
-              </a:rPr>
-              <a:t>su</a:t>
-            </a:r>
-            <a:r>
-              <a:rPr kumimoji="0" lang="en-US" altLang="en-US" sz="1800" b="0" i="0" u="none" strike="noStrike" cap="none" normalizeH="0" baseline="0" dirty="0">
-                <a:ln>
-                  <a:noFill/>
-                </a:ln>
-                <a:solidFill>
-                  <a:schemeClr val="tx1"/>
-                </a:solidFill>
-                <a:effectLst/>
-                <a:latin typeface="Space Grotesk Medium" panose="020B0604020202020204" charset="0"/>
-                <a:cs typeface="Space Grotesk Medium" panose="020B0604020202020204" charset="0"/>
-              </a:rPr>
-              <a:t> </a:t>
-            </a:r>
-            <a:r>
-              <a:rPr kumimoji="0" lang="en-US" altLang="en-US" sz="1800" b="0" i="0" u="none" strike="noStrike" cap="none" normalizeH="0" baseline="0" dirty="0" err="1">
-                <a:ln>
-                  <a:noFill/>
-                </a:ln>
-                <a:solidFill>
-                  <a:schemeClr val="tx1"/>
-                </a:solidFill>
-                <a:effectLst/>
                 <a:latin typeface="Space Grotesk Medium" panose="020B0604020202020204" charset="0"/>
                 <a:cs typeface="Space Grotesk Medium" panose="020B0604020202020204" charset="0"/>
               </a:rPr>
               <a:t>dostupni</a:t>
             </a:r>
-            <a:r>
-              <a:rPr kumimoji="0" lang="en-US" altLang="en-US" sz="1800" b="0" i="0" u="none" strike="noStrike" cap="none" normalizeH="0" baseline="0" dirty="0">
-                <a:ln>
-                  <a:noFill/>
-                </a:ln>
-                <a:solidFill>
-                  <a:schemeClr val="tx1"/>
-                </a:solidFill>
-                <a:effectLst/>
-                <a:latin typeface="Space Grotesk Medium" panose="020B0604020202020204" charset="0"/>
-                <a:cs typeface="Space Grotesk Medium" panose="020B0604020202020204" charset="0"/>
-              </a:rPr>
-              <a:t> </a:t>
-            </a:r>
+            <a:endParaRPr lang="sr-Latn-RS" altLang="en-US" dirty="0">
+              <a:solidFill>
+                <a:schemeClr val="tx1"/>
+              </a:solidFill>
+              <a:latin typeface="Space Grotesk Medium" panose="020B0604020202020204" charset="0"/>
+              <a:cs typeface="Space Grotesk Medium" panose="020B0604020202020204" charset="0"/>
+            </a:endParaRPr>
           </a:p>
           <a:p>
-            <a:pPr marL="0" marR="0" lvl="0" indent="0" algn="l" defTabSz="914400" rtl="0" eaLnBrk="0" fontAlgn="base" latinLnBrk="0" hangingPunct="0">
-              <a:lnSpc>
-                <a:spcPct val="100000"/>
-              </a:lnSpc>
+            <a:pPr marL="0" lvl="0" indent="0" eaLnBrk="0" fontAlgn="base" hangingPunct="0">
+              <a:spcBef>
+                <a:spcPct val="0"/>
+              </a:spcBef>
+              <a:spcAft>
+                <a:spcPct val="0"/>
+              </a:spcAft>
+              <a:buClrTx/>
+              <a:buSzTx/>
+            </a:pPr>
+            <a:endParaRPr lang="en-US" altLang="en-US" dirty="0">
+              <a:solidFill>
+                <a:schemeClr val="tx1"/>
+              </a:solidFill>
+              <a:latin typeface="Space Grotesk Medium" panose="020B0604020202020204" charset="0"/>
+              <a:cs typeface="Space Grotesk Medium" panose="020B0604020202020204" charset="0"/>
+            </a:endParaRPr>
+          </a:p>
+          <a:p>
+            <a:pPr marL="0" lvl="0" indent="0" eaLnBrk="0" fontAlgn="base" hangingPunct="0">
               <a:spcBef>
                 <a:spcPct val="0"/>
               </a:spcBef>
@@ -28137,238 +26610,176 @@
               <a:buSzTx/>
               <a:buFontTx/>
               <a:buChar char="•"/>
-              <a:tabLst/>
             </a:pPr>
             <a:r>
-              <a:rPr kumimoji="0" lang="en-US" altLang="en-US" sz="1800" b="0" i="0" u="none" strike="noStrike" cap="none" normalizeH="0" baseline="0" dirty="0" err="1">
-                <a:ln>
-                  <a:noFill/>
-                </a:ln>
+              <a:rPr lang="en-US" altLang="en-US" dirty="0">
                 <a:solidFill>
                   <a:schemeClr val="tx1"/>
                 </a:solidFill>
-                <a:effectLst/>
+                <a:latin typeface="Space Grotesk Medium" panose="020B0604020202020204" charset="0"/>
+                <a:cs typeface="Space Grotesk Medium" panose="020B0604020202020204" charset="0"/>
+              </a:rPr>
+              <a:t> </a:t>
+            </a:r>
+            <a:r>
+              <a:rPr lang="en-US" altLang="en-US" dirty="0" err="1">
+                <a:solidFill>
+                  <a:schemeClr val="tx1"/>
+                </a:solidFill>
                 <a:latin typeface="Space Grotesk Medium" panose="020B0604020202020204" charset="0"/>
                 <a:cs typeface="Space Grotesk Medium" panose="020B0604020202020204" charset="0"/>
               </a:rPr>
               <a:t>Kompresija</a:t>
             </a:r>
             <a:r>
-              <a:rPr kumimoji="0" lang="en-US" altLang="en-US" sz="1800" b="0" i="0" u="none" strike="noStrike" cap="none" normalizeH="0" baseline="0" dirty="0">
-                <a:ln>
-                  <a:noFill/>
-                </a:ln>
+              <a:rPr lang="en-US" altLang="en-US" dirty="0">
                 <a:solidFill>
                   <a:schemeClr val="tx1"/>
                 </a:solidFill>
-                <a:effectLst/>
                 <a:latin typeface="Space Grotesk Medium" panose="020B0604020202020204" charset="0"/>
                 <a:cs typeface="Space Grotesk Medium" panose="020B0604020202020204" charset="0"/>
               </a:rPr>
               <a:t> backup </a:t>
             </a:r>
             <a:r>
-              <a:rPr kumimoji="0" lang="en-US" altLang="en-US" sz="1800" b="0" i="0" u="none" strike="noStrike" cap="none" normalizeH="0" baseline="0" dirty="0" err="1">
-                <a:ln>
-                  <a:noFill/>
-                </a:ln>
+              <a:rPr lang="en-US" altLang="en-US" dirty="0" err="1">
                 <a:solidFill>
                   <a:schemeClr val="tx1"/>
                 </a:solidFill>
-                <a:effectLst/>
                 <a:latin typeface="Space Grotesk Medium" panose="020B0604020202020204" charset="0"/>
                 <a:cs typeface="Space Grotesk Medium" panose="020B0604020202020204" charset="0"/>
               </a:rPr>
               <a:t>arhive</a:t>
             </a:r>
             <a:r>
-              <a:rPr kumimoji="0" lang="en-US" altLang="en-US" sz="1800" b="0" i="0" u="none" strike="noStrike" cap="none" normalizeH="0" baseline="0" dirty="0">
-                <a:ln>
-                  <a:noFill/>
-                </a:ln>
+              <a:rPr lang="en-US" altLang="en-US" dirty="0">
                 <a:solidFill>
                   <a:schemeClr val="tx1"/>
                 </a:solidFill>
-                <a:effectLst/>
+                <a:latin typeface="Space Grotesk Medium" panose="020B0604020202020204" charset="0"/>
+                <a:cs typeface="Space Grotesk Medium" panose="020B0604020202020204" charset="0"/>
+              </a:rPr>
+              <a:t> je </a:t>
+            </a:r>
+            <a:r>
+              <a:rPr lang="en-US" altLang="en-US" dirty="0" err="1">
+                <a:solidFill>
+                  <a:schemeClr val="tx1"/>
+                </a:solidFill>
+                <a:latin typeface="Space Grotesk Medium" panose="020B0604020202020204" charset="0"/>
+                <a:cs typeface="Space Grotesk Medium" panose="020B0604020202020204" charset="0"/>
+              </a:rPr>
+              <a:t>opciona</a:t>
+            </a:r>
+            <a:r>
+              <a:rPr lang="en-US" altLang="en-US" dirty="0">
+                <a:solidFill>
+                  <a:schemeClr val="tx1"/>
+                </a:solidFill>
+                <a:latin typeface="Space Grotesk Medium" panose="020B0604020202020204" charset="0"/>
+                <a:cs typeface="Space Grotesk Medium" panose="020B0604020202020204" charset="0"/>
+              </a:rPr>
+              <a:t>, </a:t>
+            </a:r>
+            <a:r>
+              <a:rPr lang="en-US" altLang="en-US" dirty="0" err="1">
+                <a:solidFill>
+                  <a:schemeClr val="tx1"/>
+                </a:solidFill>
+                <a:latin typeface="Space Grotesk Medium" panose="020B0604020202020204" charset="0"/>
+                <a:cs typeface="Space Grotesk Medium" panose="020B0604020202020204" charset="0"/>
+              </a:rPr>
+              <a:t>ali</a:t>
+            </a:r>
+            <a:r>
+              <a:rPr lang="en-US" altLang="en-US" dirty="0">
+                <a:solidFill>
+                  <a:schemeClr val="tx1"/>
+                </a:solidFill>
                 <a:latin typeface="Space Grotesk Medium" panose="020B0604020202020204" charset="0"/>
                 <a:cs typeface="Space Grotesk Medium" panose="020B0604020202020204" charset="0"/>
               </a:rPr>
               <a:t> </a:t>
             </a:r>
             <a:r>
-              <a:rPr kumimoji="0" lang="en-US" altLang="en-US" sz="1800" b="0" i="0" u="none" strike="noStrike" cap="none" normalizeH="0" baseline="0" dirty="0" err="1">
-                <a:ln>
-                  <a:noFill/>
-                </a:ln>
+              <a:rPr lang="en-US" altLang="en-US" dirty="0" err="1">
                 <a:solidFill>
                   <a:schemeClr val="tx1"/>
                 </a:solidFill>
-                <a:effectLst/>
                 <a:latin typeface="Space Grotesk Medium" panose="020B0604020202020204" charset="0"/>
                 <a:cs typeface="Space Grotesk Medium" panose="020B0604020202020204" charset="0"/>
               </a:rPr>
-              <a:t>nije</a:t>
+              <a:t>korisna</a:t>
             </a:r>
             <a:r>
-              <a:rPr kumimoji="0" lang="en-US" altLang="en-US" sz="1800" b="0" i="0" u="none" strike="noStrike" cap="none" normalizeH="0" baseline="0" dirty="0">
-                <a:ln>
-                  <a:noFill/>
-                </a:ln>
+              <a:rPr lang="en-US" altLang="en-US" dirty="0">
                 <a:solidFill>
                   <a:schemeClr val="tx1"/>
                 </a:solidFill>
-                <a:effectLst/>
+                <a:latin typeface="Space Grotesk Medium" panose="020B0604020202020204" charset="0"/>
+                <a:cs typeface="Space Grotesk Medium" panose="020B0604020202020204" charset="0"/>
+              </a:rPr>
+              <a:t> za </a:t>
+            </a:r>
+            <a:r>
+              <a:rPr lang="en-US" altLang="en-US" dirty="0" err="1">
+                <a:solidFill>
+                  <a:schemeClr val="tx1"/>
+                </a:solidFill>
+                <a:latin typeface="Space Grotesk Medium" panose="020B0604020202020204" charset="0"/>
+                <a:cs typeface="Space Grotesk Medium" panose="020B0604020202020204" charset="0"/>
+              </a:rPr>
+              <a:t>dugoročno</a:t>
+            </a:r>
+            <a:r>
+              <a:rPr lang="en-US" altLang="en-US" dirty="0">
+                <a:solidFill>
+                  <a:schemeClr val="tx1"/>
+                </a:solidFill>
                 <a:latin typeface="Space Grotesk Medium" panose="020B0604020202020204" charset="0"/>
                 <a:cs typeface="Space Grotesk Medium" panose="020B0604020202020204" charset="0"/>
               </a:rPr>
               <a:t> </a:t>
             </a:r>
             <a:r>
-              <a:rPr kumimoji="0" lang="en-US" altLang="en-US" sz="1800" b="0" i="0" u="none" strike="noStrike" cap="none" normalizeH="0" baseline="0" dirty="0" err="1">
-                <a:ln>
-                  <a:noFill/>
-                </a:ln>
+              <a:rPr lang="en-US" altLang="en-US" dirty="0" err="1">
                 <a:solidFill>
                   <a:schemeClr val="tx1"/>
                 </a:solidFill>
-                <a:effectLst/>
-                <a:latin typeface="Space Grotesk Medium" panose="020B0604020202020204" charset="0"/>
-                <a:cs typeface="Space Grotesk Medium" panose="020B0604020202020204" charset="0"/>
-              </a:rPr>
-              <a:t>obavezna</a:t>
-            </a:r>
-            <a:r>
-              <a:rPr kumimoji="0" lang="en-US" altLang="en-US" sz="1800" b="0" i="0" u="none" strike="noStrike" cap="none" normalizeH="0" baseline="0" dirty="0">
-                <a:ln>
-                  <a:noFill/>
-                </a:ln>
-                <a:solidFill>
-                  <a:schemeClr val="tx1"/>
-                </a:solidFill>
-                <a:effectLst/>
-                <a:latin typeface="Space Grotesk Medium" panose="020B0604020202020204" charset="0"/>
-                <a:cs typeface="Space Grotesk Medium" panose="020B0604020202020204" charset="0"/>
-              </a:rPr>
-              <a:t>, </a:t>
-            </a:r>
-            <a:r>
-              <a:rPr kumimoji="0" lang="en-US" altLang="en-US" sz="1800" b="0" i="0" u="none" strike="noStrike" cap="none" normalizeH="0" baseline="0" dirty="0" err="1">
-                <a:ln>
-                  <a:noFill/>
-                </a:ln>
-                <a:solidFill>
-                  <a:schemeClr val="tx1"/>
-                </a:solidFill>
-                <a:effectLst/>
-                <a:latin typeface="Space Grotesk Medium" panose="020B0604020202020204" charset="0"/>
-                <a:cs typeface="Space Grotesk Medium" panose="020B0604020202020204" charset="0"/>
-              </a:rPr>
-              <a:t>ali</a:t>
-            </a:r>
-            <a:r>
-              <a:rPr kumimoji="0" lang="en-US" altLang="en-US" sz="1800" b="0" i="0" u="none" strike="noStrike" cap="none" normalizeH="0" baseline="0" dirty="0">
-                <a:ln>
-                  <a:noFill/>
-                </a:ln>
-                <a:solidFill>
-                  <a:schemeClr val="tx1"/>
-                </a:solidFill>
-                <a:effectLst/>
-                <a:latin typeface="Space Grotesk Medium" panose="020B0604020202020204" charset="0"/>
-                <a:cs typeface="Space Grotesk Medium" panose="020B0604020202020204" charset="0"/>
-              </a:rPr>
-              <a:t> se </a:t>
-            </a:r>
-            <a:r>
-              <a:rPr kumimoji="0" lang="en-US" altLang="en-US" sz="1800" b="0" i="0" u="none" strike="noStrike" cap="none" normalizeH="0" baseline="0" dirty="0" err="1">
-                <a:ln>
-                  <a:noFill/>
-                </a:ln>
-                <a:solidFill>
-                  <a:schemeClr val="tx1"/>
-                </a:solidFill>
-                <a:effectLst/>
-                <a:latin typeface="Space Grotesk Medium" panose="020B0604020202020204" charset="0"/>
-                <a:cs typeface="Space Grotesk Medium" panose="020B0604020202020204" charset="0"/>
-              </a:rPr>
-              <a:t>preporučuje</a:t>
-            </a:r>
-            <a:r>
-              <a:rPr kumimoji="0" lang="en-US" altLang="en-US" sz="1800" b="0" i="0" u="none" strike="noStrike" cap="none" normalizeH="0" baseline="0" dirty="0">
-                <a:ln>
-                  <a:noFill/>
-                </a:ln>
-                <a:solidFill>
-                  <a:schemeClr val="tx1"/>
-                </a:solidFill>
-                <a:effectLst/>
-                <a:latin typeface="Space Grotesk Medium" panose="020B0604020202020204" charset="0"/>
-                <a:cs typeface="Space Grotesk Medium" panose="020B0604020202020204" charset="0"/>
-              </a:rPr>
-              <a:t> za </a:t>
-            </a:r>
-            <a:r>
-              <a:rPr kumimoji="0" lang="en-US" altLang="en-US" sz="1800" b="0" i="0" u="none" strike="noStrike" cap="none" normalizeH="0" baseline="0" dirty="0" err="1">
-                <a:ln>
-                  <a:noFill/>
-                </a:ln>
-                <a:solidFill>
-                  <a:schemeClr val="tx1"/>
-                </a:solidFill>
-                <a:effectLst/>
-                <a:latin typeface="Space Grotesk Medium" panose="020B0604020202020204" charset="0"/>
-                <a:cs typeface="Space Grotesk Medium" panose="020B0604020202020204" charset="0"/>
-              </a:rPr>
-              <a:t>dugoročno</a:t>
-            </a:r>
-            <a:r>
-              <a:rPr kumimoji="0" lang="en-US" altLang="en-US" sz="1800" b="0" i="0" u="none" strike="noStrike" cap="none" normalizeH="0" baseline="0" dirty="0">
-                <a:ln>
-                  <a:noFill/>
-                </a:ln>
-                <a:solidFill>
-                  <a:schemeClr val="tx1"/>
-                </a:solidFill>
-                <a:effectLst/>
-                <a:latin typeface="Space Grotesk Medium" panose="020B0604020202020204" charset="0"/>
-                <a:cs typeface="Space Grotesk Medium" panose="020B0604020202020204" charset="0"/>
-              </a:rPr>
-              <a:t> </a:t>
-            </a:r>
-            <a:r>
-              <a:rPr kumimoji="0" lang="en-US" altLang="en-US" sz="1800" b="0" i="0" u="none" strike="noStrike" cap="none" normalizeH="0" baseline="0" dirty="0" err="1">
-                <a:ln>
-                  <a:noFill/>
-                </a:ln>
-                <a:solidFill>
-                  <a:schemeClr val="tx1"/>
-                </a:solidFill>
-                <a:effectLst/>
                 <a:latin typeface="Space Grotesk Medium" panose="020B0604020202020204" charset="0"/>
                 <a:cs typeface="Space Grotesk Medium" panose="020B0604020202020204" charset="0"/>
               </a:rPr>
               <a:t>čuvanje</a:t>
             </a:r>
-            <a:r>
-              <a:rPr kumimoji="0" lang="en-US" altLang="en-US" sz="1800" b="0" i="0" u="none" strike="noStrike" cap="none" normalizeH="0" baseline="0" dirty="0">
-                <a:ln>
-                  <a:noFill/>
-                </a:ln>
-                <a:solidFill>
-                  <a:schemeClr val="tx1"/>
-                </a:solidFill>
-                <a:effectLst/>
-                <a:latin typeface="Space Grotesk Medium" panose="020B0604020202020204" charset="0"/>
-                <a:cs typeface="Space Grotesk Medium" panose="020B0604020202020204" charset="0"/>
-              </a:rPr>
-              <a:t> </a:t>
-            </a:r>
+            <a:endParaRPr lang="sr-Latn-RS" altLang="en-US" dirty="0">
+              <a:solidFill>
+                <a:schemeClr val="tx1"/>
+              </a:solidFill>
+              <a:latin typeface="Space Grotesk Medium" panose="020B0604020202020204" charset="0"/>
+              <a:cs typeface="Space Grotesk Medium" panose="020B0604020202020204" charset="0"/>
+            </a:endParaRPr>
           </a:p>
           <a:p>
-            <a:pPr marL="0" marR="0" lvl="0" indent="0" algn="l" defTabSz="914400" rtl="0" eaLnBrk="0" fontAlgn="base" latinLnBrk="0" hangingPunct="0">
-              <a:lnSpc>
-                <a:spcPct val="100000"/>
-              </a:lnSpc>
+            <a:pPr marL="0" lvl="0" indent="0" eaLnBrk="0" fontAlgn="base" hangingPunct="0">
+              <a:spcBef>
+                <a:spcPct val="0"/>
+              </a:spcBef>
+              <a:spcAft>
+                <a:spcPct val="0"/>
+              </a:spcAft>
+              <a:buClrTx/>
+              <a:buSzTx/>
+            </a:pPr>
+            <a:endParaRPr lang="en-US" altLang="en-US" dirty="0">
+              <a:solidFill>
+                <a:schemeClr val="tx1"/>
+              </a:solidFill>
+              <a:latin typeface="Space Grotesk Medium" panose="020B0604020202020204" charset="0"/>
+              <a:cs typeface="Space Grotesk Medium" panose="020B0604020202020204" charset="0"/>
+            </a:endParaRPr>
+          </a:p>
+          <a:p>
+            <a:pPr marL="0" lvl="0" indent="0" eaLnBrk="0" fontAlgn="base" hangingPunct="0">
               <a:spcBef>
                 <a:spcPct val="0"/>
               </a:spcBef>
@@ -28379,442 +26790,118 @@
               <a:buSzTx/>
               <a:buFontTx/>
               <a:buChar char="•"/>
-              <a:tabLst/>
             </a:pPr>
             <a:r>
-              <a:rPr kumimoji="0" lang="en-US" altLang="en-US" sz="1800" b="0" i="0" u="none" strike="noStrike" cap="none" normalizeH="0" baseline="0" dirty="0">
-                <a:ln>
-                  <a:noFill/>
-                </a:ln>
+              <a:rPr lang="en-US" altLang="en-US" dirty="0">
                 <a:solidFill>
                   <a:schemeClr val="tx1"/>
                 </a:solidFill>
-                <a:effectLst/>
                 <a:latin typeface="Space Grotesk Medium" panose="020B0604020202020204" charset="0"/>
                 <a:cs typeface="Space Grotesk Medium" panose="020B0604020202020204" charset="0"/>
               </a:rPr>
-              <a:t>Restore </a:t>
+              <a:t> Restore </a:t>
             </a:r>
             <a:r>
-              <a:rPr kumimoji="0" lang="en-US" altLang="en-US" sz="1800" b="0" i="0" u="none" strike="noStrike" cap="none" normalizeH="0" baseline="0" dirty="0" err="1">
-                <a:ln>
-                  <a:noFill/>
-                </a:ln>
+              <a:rPr lang="en-US" altLang="en-US" dirty="0" err="1">
                 <a:solidFill>
                   <a:schemeClr val="tx1"/>
                 </a:solidFill>
-                <a:effectLst/>
                 <a:latin typeface="Space Grotesk Medium" panose="020B0604020202020204" charset="0"/>
                 <a:cs typeface="Space Grotesk Medium" panose="020B0604020202020204" charset="0"/>
               </a:rPr>
               <a:t>izvoditi</a:t>
             </a:r>
             <a:r>
-              <a:rPr kumimoji="0" lang="en-US" altLang="en-US" sz="1800" b="0" i="0" u="none" strike="noStrike" cap="none" normalizeH="0" baseline="0" dirty="0">
-                <a:ln>
-                  <a:noFill/>
-                </a:ln>
+              <a:rPr lang="en-US" altLang="en-US" dirty="0">
                 <a:solidFill>
                   <a:schemeClr val="tx1"/>
                 </a:solidFill>
-                <a:effectLst/>
                 <a:latin typeface="Space Grotesk Medium" panose="020B0604020202020204" charset="0"/>
                 <a:cs typeface="Space Grotesk Medium" panose="020B0604020202020204" charset="0"/>
               </a:rPr>
               <a:t> </a:t>
             </a:r>
             <a:r>
-              <a:rPr kumimoji="0" lang="en-US" altLang="en-US" sz="1800" b="0" i="0" u="none" strike="noStrike" cap="none" normalizeH="0" baseline="0" dirty="0" err="1">
-                <a:ln>
-                  <a:noFill/>
-                </a:ln>
+              <a:rPr lang="en-US" altLang="en-US" dirty="0" err="1">
                 <a:solidFill>
                   <a:schemeClr val="tx1"/>
                 </a:solidFill>
-                <a:effectLst/>
                 <a:latin typeface="Space Grotesk Medium" panose="020B0604020202020204" charset="0"/>
                 <a:cs typeface="Space Grotesk Medium" panose="020B0604020202020204" charset="0"/>
               </a:rPr>
               <a:t>isključivo</a:t>
             </a:r>
             <a:r>
-              <a:rPr kumimoji="0" lang="en-US" altLang="en-US" sz="1800" b="0" i="0" u="none" strike="noStrike" cap="none" normalizeH="0" baseline="0" dirty="0">
-                <a:ln>
-                  <a:noFill/>
-                </a:ln>
+              <a:rPr lang="en-US" altLang="en-US" dirty="0">
                 <a:solidFill>
                   <a:schemeClr val="tx1"/>
                 </a:solidFill>
-                <a:effectLst/>
                 <a:latin typeface="Space Grotesk Medium" panose="020B0604020202020204" charset="0"/>
                 <a:cs typeface="Space Grotesk Medium" panose="020B0604020202020204" charset="0"/>
               </a:rPr>
               <a:t> </a:t>
             </a:r>
             <a:r>
-              <a:rPr kumimoji="0" lang="en-US" altLang="en-US" sz="1800" b="0" i="0" u="none" strike="noStrike" cap="none" normalizeH="0" baseline="0" dirty="0" err="1">
-                <a:ln>
-                  <a:noFill/>
-                </a:ln>
+              <a:rPr lang="en-US" altLang="en-US" dirty="0" err="1">
                 <a:solidFill>
                   <a:schemeClr val="tx1"/>
                 </a:solidFill>
-                <a:effectLst/>
                 <a:latin typeface="Space Grotesk Medium" panose="020B0604020202020204" charset="0"/>
                 <a:cs typeface="Space Grotesk Medium" panose="020B0604020202020204" charset="0"/>
               </a:rPr>
               <a:t>nad</a:t>
             </a:r>
             <a:r>
-              <a:rPr kumimoji="0" lang="en-US" altLang="en-US" sz="1800" b="0" i="0" u="none" strike="noStrike" cap="none" normalizeH="0" baseline="0" dirty="0">
-                <a:ln>
-                  <a:noFill/>
-                </a:ln>
+              <a:rPr lang="en-US" altLang="en-US" dirty="0">
                 <a:solidFill>
                   <a:schemeClr val="tx1"/>
                 </a:solidFill>
-                <a:effectLst/>
                 <a:latin typeface="Space Grotesk Medium" panose="020B0604020202020204" charset="0"/>
                 <a:cs typeface="Space Grotesk Medium" panose="020B0604020202020204" charset="0"/>
               </a:rPr>
               <a:t> </a:t>
             </a:r>
             <a:r>
-              <a:rPr kumimoji="0" lang="en-US" altLang="en-US" sz="1800" b="0" i="0" u="none" strike="noStrike" cap="none" normalizeH="0" baseline="0" dirty="0" err="1">
-                <a:ln>
-                  <a:noFill/>
-                </a:ln>
+              <a:rPr lang="en-US" altLang="en-US" dirty="0" err="1">
                 <a:solidFill>
                   <a:schemeClr val="tx1"/>
                 </a:solidFill>
-                <a:effectLst/>
                 <a:latin typeface="Space Grotesk Medium" panose="020B0604020202020204" charset="0"/>
                 <a:cs typeface="Space Grotesk Medium" panose="020B0604020202020204" charset="0"/>
               </a:rPr>
-              <a:t>zaustavljenim</a:t>
+              <a:t>zaustavljenom</a:t>
             </a:r>
             <a:r>
-              <a:rPr kumimoji="0" lang="en-US" altLang="en-US" sz="1800" b="0" i="0" u="none" strike="noStrike" cap="none" normalizeH="0" baseline="0" dirty="0">
-                <a:ln>
-                  <a:noFill/>
-                </a:ln>
+              <a:rPr lang="en-US" altLang="en-US" dirty="0">
                 <a:solidFill>
                   <a:schemeClr val="tx1"/>
                 </a:solidFill>
-                <a:effectLst/>
                 <a:latin typeface="Space Grotesk Medium" panose="020B0604020202020204" charset="0"/>
                 <a:cs typeface="Space Grotesk Medium" panose="020B0604020202020204" charset="0"/>
               </a:rPr>
               <a:t> </a:t>
             </a:r>
             <a:r>
-              <a:rPr kumimoji="0" lang="en-US" altLang="en-US" sz="1800" b="0" i="0" u="none" strike="noStrike" cap="none" normalizeH="0" baseline="0" dirty="0" err="1">
-                <a:ln>
-                  <a:noFill/>
-                </a:ln>
+              <a:rPr lang="en-US" altLang="en-US" dirty="0" err="1">
                 <a:solidFill>
                   <a:schemeClr val="tx1"/>
                 </a:solidFill>
-                <a:effectLst/>
-                <a:latin typeface="Space Grotesk Medium" panose="020B0604020202020204" charset="0"/>
-                <a:cs typeface="Space Grotesk Medium" panose="020B0604020202020204" charset="0"/>
-              </a:rPr>
-              <a:t>sistemom</a:t>
-            </a:r>
-            <a:r>
-              <a:rPr kumimoji="0" lang="en-US" altLang="en-US" sz="1800" b="0" i="0" u="none" strike="noStrike" cap="none" normalizeH="0" baseline="0" dirty="0">
-                <a:ln>
-                  <a:noFill/>
-                </a:ln>
-                <a:solidFill>
-                  <a:schemeClr val="tx1"/>
-                </a:solidFill>
-                <a:effectLst/>
-                <a:latin typeface="Space Grotesk Medium" panose="020B0604020202020204" charset="0"/>
-                <a:cs typeface="Space Grotesk Medium" panose="020B0604020202020204" charset="0"/>
-              </a:rPr>
-              <a:t> — restore </a:t>
-            </a:r>
-            <a:r>
-              <a:rPr kumimoji="0" lang="en-US" altLang="en-US" sz="1800" b="0" i="0" u="none" strike="noStrike" cap="none" normalizeH="0" baseline="0" dirty="0" err="1">
-                <a:ln>
-                  <a:noFill/>
-                </a:ln>
-                <a:solidFill>
-                  <a:schemeClr val="tx1"/>
-                </a:solidFill>
-                <a:effectLst/>
-                <a:latin typeface="Space Grotesk Medium" panose="020B0604020202020204" charset="0"/>
-                <a:cs typeface="Space Grotesk Medium" panose="020B0604020202020204" charset="0"/>
-              </a:rPr>
-              <a:t>nad</a:t>
-            </a:r>
-            <a:r>
-              <a:rPr kumimoji="0" lang="en-US" altLang="en-US" sz="1800" b="0" i="0" u="none" strike="noStrike" cap="none" normalizeH="0" baseline="0" dirty="0">
-                <a:ln>
-                  <a:noFill/>
-                </a:ln>
-                <a:solidFill>
-                  <a:schemeClr val="tx1"/>
-                </a:solidFill>
-                <a:effectLst/>
-                <a:latin typeface="Space Grotesk Medium" panose="020B0604020202020204" charset="0"/>
-                <a:cs typeface="Space Grotesk Medium" panose="020B0604020202020204" charset="0"/>
-              </a:rPr>
-              <a:t> </a:t>
-            </a:r>
-            <a:r>
-              <a:rPr kumimoji="0" lang="en-US" altLang="en-US" sz="1800" b="0" i="0" u="none" strike="noStrike" cap="none" normalizeH="0" baseline="0" dirty="0" err="1">
-                <a:ln>
-                  <a:noFill/>
-                </a:ln>
-                <a:solidFill>
-                  <a:schemeClr val="tx1"/>
-                </a:solidFill>
-                <a:effectLst/>
-                <a:latin typeface="Space Grotesk Medium" panose="020B0604020202020204" charset="0"/>
-                <a:cs typeface="Space Grotesk Medium" panose="020B0604020202020204" charset="0"/>
-              </a:rPr>
-              <a:t>aktivnom</a:t>
-            </a:r>
-            <a:r>
-              <a:rPr kumimoji="0" lang="en-US" altLang="en-US" sz="1800" b="0" i="0" u="none" strike="noStrike" cap="none" normalizeH="0" baseline="0" dirty="0">
-                <a:ln>
-                  <a:noFill/>
-                </a:ln>
-                <a:solidFill>
-                  <a:schemeClr val="tx1"/>
-                </a:solidFill>
-                <a:effectLst/>
-                <a:latin typeface="Space Grotesk Medium" panose="020B0604020202020204" charset="0"/>
-                <a:cs typeface="Space Grotesk Medium" panose="020B0604020202020204" charset="0"/>
-              </a:rPr>
-              <a:t> </a:t>
-            </a:r>
-            <a:r>
-              <a:rPr kumimoji="0" lang="en-US" altLang="en-US" sz="1800" b="0" i="0" u="none" strike="noStrike" cap="none" normalizeH="0" baseline="0" dirty="0" err="1">
-                <a:ln>
-                  <a:noFill/>
-                </a:ln>
-                <a:solidFill>
-                  <a:schemeClr val="tx1"/>
-                </a:solidFill>
-                <a:effectLst/>
                 <a:latin typeface="Space Grotesk Medium" panose="020B0604020202020204" charset="0"/>
                 <a:cs typeface="Space Grotesk Medium" panose="020B0604020202020204" charset="0"/>
               </a:rPr>
               <a:t>instancom</a:t>
             </a:r>
-            <a:r>
-              <a:rPr kumimoji="0" lang="en-US" altLang="en-US" sz="1800" b="0" i="0" u="none" strike="noStrike" cap="none" normalizeH="0" baseline="0" dirty="0">
-                <a:ln>
-                  <a:noFill/>
-                </a:ln>
-                <a:solidFill>
-                  <a:schemeClr val="tx1"/>
-                </a:solidFill>
-                <a:effectLst/>
-                <a:latin typeface="Space Grotesk Medium" panose="020B0604020202020204" charset="0"/>
-                <a:cs typeface="Space Grotesk Medium" panose="020B0604020202020204" charset="0"/>
-              </a:rPr>
-              <a:t> </a:t>
-            </a:r>
-            <a:r>
-              <a:rPr kumimoji="0" lang="en-US" altLang="en-US" sz="1800" b="0" i="0" u="none" strike="noStrike" cap="none" normalizeH="0" baseline="0" dirty="0" err="1">
-                <a:ln>
-                  <a:noFill/>
-                </a:ln>
-                <a:solidFill>
-                  <a:schemeClr val="tx1"/>
-                </a:solidFill>
-                <a:effectLst/>
-                <a:latin typeface="Space Grotesk Medium" panose="020B0604020202020204" charset="0"/>
-                <a:cs typeface="Space Grotesk Medium" panose="020B0604020202020204" charset="0"/>
-              </a:rPr>
-              <a:t>nije</a:t>
-            </a:r>
-            <a:r>
-              <a:rPr kumimoji="0" lang="en-US" altLang="en-US" sz="1800" b="0" i="0" u="none" strike="noStrike" cap="none" normalizeH="0" baseline="0" dirty="0">
-                <a:ln>
-                  <a:noFill/>
-                </a:ln>
-                <a:solidFill>
-                  <a:schemeClr val="tx1"/>
-                </a:solidFill>
-                <a:effectLst/>
-                <a:latin typeface="Space Grotesk Medium" panose="020B0604020202020204" charset="0"/>
-                <a:cs typeface="Space Grotesk Medium" panose="020B0604020202020204" charset="0"/>
-              </a:rPr>
-              <a:t> </a:t>
-            </a:r>
-            <a:r>
-              <a:rPr kumimoji="0" lang="en-US" altLang="en-US" sz="1800" b="0" i="0" u="none" strike="noStrike" cap="none" normalizeH="0" baseline="0" dirty="0" err="1">
-                <a:ln>
-                  <a:noFill/>
-                </a:ln>
-                <a:solidFill>
-                  <a:schemeClr val="tx1"/>
-                </a:solidFill>
-                <a:effectLst/>
-                <a:latin typeface="Space Grotesk Medium" panose="020B0604020202020204" charset="0"/>
-                <a:cs typeface="Space Grotesk Medium" panose="020B0604020202020204" charset="0"/>
-              </a:rPr>
-              <a:t>podržan</a:t>
-            </a:r>
-            <a:r>
-              <a:rPr kumimoji="0" lang="en-US" altLang="en-US" sz="1800" b="0" i="0" u="none" strike="noStrike" cap="none" normalizeH="0" baseline="0" dirty="0">
-                <a:ln>
-                  <a:noFill/>
-                </a:ln>
-                <a:solidFill>
-                  <a:schemeClr val="tx1"/>
-                </a:solidFill>
-                <a:effectLst/>
-                <a:latin typeface="Space Grotesk Medium" panose="020B0604020202020204" charset="0"/>
-                <a:cs typeface="Space Grotesk Medium" panose="020B0604020202020204" charset="0"/>
-              </a:rPr>
-              <a:t> </a:t>
-            </a:r>
-            <a:r>
-              <a:rPr kumimoji="0" lang="en-US" altLang="en-US" sz="1800" b="0" i="0" u="none" strike="noStrike" cap="none" normalizeH="0" baseline="0" dirty="0" err="1">
-                <a:ln>
-                  <a:noFill/>
-                </a:ln>
-                <a:solidFill>
-                  <a:schemeClr val="tx1"/>
-                </a:solidFill>
-                <a:effectLst/>
-                <a:latin typeface="Space Grotesk Medium" panose="020B0604020202020204" charset="0"/>
-                <a:cs typeface="Space Grotesk Medium" panose="020B0604020202020204" charset="0"/>
-              </a:rPr>
-              <a:t>i</a:t>
-            </a:r>
-            <a:r>
-              <a:rPr kumimoji="0" lang="en-US" altLang="en-US" sz="1800" b="0" i="0" u="none" strike="noStrike" cap="none" normalizeH="0" baseline="0" dirty="0">
-                <a:ln>
-                  <a:noFill/>
-                </a:ln>
-                <a:solidFill>
-                  <a:schemeClr val="tx1"/>
-                </a:solidFill>
-                <a:effectLst/>
-                <a:latin typeface="Space Grotesk Medium" panose="020B0604020202020204" charset="0"/>
-                <a:cs typeface="Space Grotesk Medium" panose="020B0604020202020204" charset="0"/>
-              </a:rPr>
-              <a:t> </a:t>
-            </a:r>
-            <a:r>
-              <a:rPr kumimoji="0" lang="en-US" altLang="en-US" sz="1800" b="0" i="0" u="none" strike="noStrike" cap="none" normalizeH="0" baseline="0" dirty="0" err="1">
-                <a:ln>
-                  <a:noFill/>
-                </a:ln>
-                <a:solidFill>
-                  <a:schemeClr val="tx1"/>
-                </a:solidFill>
-                <a:effectLst/>
-                <a:latin typeface="Space Grotesk Medium" panose="020B0604020202020204" charset="0"/>
-                <a:cs typeface="Space Grotesk Medium" panose="020B0604020202020204" charset="0"/>
-              </a:rPr>
-              <a:t>može</a:t>
-            </a:r>
-            <a:r>
-              <a:rPr kumimoji="0" lang="en-US" altLang="en-US" sz="1800" b="0" i="0" u="none" strike="noStrike" cap="none" normalizeH="0" baseline="0" dirty="0">
-                <a:ln>
-                  <a:noFill/>
-                </a:ln>
-                <a:solidFill>
-                  <a:schemeClr val="tx1"/>
-                </a:solidFill>
-                <a:effectLst/>
-                <a:latin typeface="Space Grotesk Medium" panose="020B0604020202020204" charset="0"/>
-                <a:cs typeface="Space Grotesk Medium" panose="020B0604020202020204" charset="0"/>
-              </a:rPr>
-              <a:t> </a:t>
-            </a:r>
-            <a:r>
-              <a:rPr kumimoji="0" lang="en-US" altLang="en-US" sz="1800" b="0" i="0" u="none" strike="noStrike" cap="none" normalizeH="0" baseline="0" dirty="0" err="1">
-                <a:ln>
-                  <a:noFill/>
-                </a:ln>
-                <a:solidFill>
-                  <a:schemeClr val="tx1"/>
-                </a:solidFill>
-                <a:effectLst/>
-                <a:latin typeface="Space Grotesk Medium" panose="020B0604020202020204" charset="0"/>
-                <a:cs typeface="Space Grotesk Medium" panose="020B0604020202020204" charset="0"/>
-              </a:rPr>
-              <a:t>dovesti</a:t>
-            </a:r>
-            <a:r>
-              <a:rPr kumimoji="0" lang="en-US" altLang="en-US" sz="1800" b="0" i="0" u="none" strike="noStrike" cap="none" normalizeH="0" baseline="0" dirty="0">
-                <a:ln>
-                  <a:noFill/>
-                </a:ln>
-                <a:solidFill>
-                  <a:schemeClr val="tx1"/>
-                </a:solidFill>
-                <a:effectLst/>
-                <a:latin typeface="Space Grotesk Medium" panose="020B0604020202020204" charset="0"/>
-                <a:cs typeface="Space Grotesk Medium" panose="020B0604020202020204" charset="0"/>
-              </a:rPr>
-              <a:t> do </a:t>
-            </a:r>
-            <a:r>
-              <a:rPr kumimoji="0" lang="en-US" altLang="en-US" sz="1800" b="0" i="0" u="none" strike="noStrike" cap="none" normalizeH="0" baseline="0" dirty="0" err="1">
-                <a:ln>
-                  <a:noFill/>
-                </a:ln>
-                <a:solidFill>
-                  <a:schemeClr val="tx1"/>
-                </a:solidFill>
-                <a:effectLst/>
-                <a:latin typeface="Space Grotesk Medium" panose="020B0604020202020204" charset="0"/>
-                <a:cs typeface="Space Grotesk Medium" panose="020B0604020202020204" charset="0"/>
-              </a:rPr>
-              <a:t>nepredvidivog</a:t>
-            </a:r>
-            <a:r>
-              <a:rPr kumimoji="0" lang="en-US" altLang="en-US" sz="1800" b="0" i="0" u="none" strike="noStrike" cap="none" normalizeH="0" baseline="0" dirty="0">
-                <a:ln>
-                  <a:noFill/>
-                </a:ln>
-                <a:solidFill>
-                  <a:schemeClr val="tx1"/>
-                </a:solidFill>
-                <a:effectLst/>
-                <a:latin typeface="Space Grotesk Medium" panose="020B0604020202020204" charset="0"/>
-                <a:cs typeface="Space Grotesk Medium" panose="020B0604020202020204" charset="0"/>
-              </a:rPr>
-              <a:t> </a:t>
-            </a:r>
-            <a:r>
-              <a:rPr kumimoji="0" lang="en-US" altLang="en-US" sz="1800" b="0" i="0" u="none" strike="noStrike" cap="none" normalizeH="0" baseline="0" dirty="0" err="1">
-                <a:ln>
-                  <a:noFill/>
-                </a:ln>
-                <a:solidFill>
-                  <a:schemeClr val="tx1"/>
-                </a:solidFill>
-                <a:effectLst/>
-                <a:latin typeface="Space Grotesk Medium" panose="020B0604020202020204" charset="0"/>
-                <a:cs typeface="Space Grotesk Medium" panose="020B0604020202020204" charset="0"/>
-              </a:rPr>
-              <a:t>ponašanja</a:t>
-            </a:r>
-            <a:r>
-              <a:rPr kumimoji="0" lang="en-US" altLang="en-US" sz="1800" b="0" i="0" u="none" strike="noStrike" cap="none" normalizeH="0" baseline="0" dirty="0">
-                <a:ln>
-                  <a:noFill/>
-                </a:ln>
-                <a:solidFill>
-                  <a:schemeClr val="tx1"/>
-                </a:solidFill>
-                <a:effectLst/>
-                <a:latin typeface="Space Grotesk Medium" panose="020B0604020202020204" charset="0"/>
-                <a:cs typeface="Space Grotesk Medium" panose="020B0604020202020204" charset="0"/>
-              </a:rPr>
-              <a:t> </a:t>
-            </a:r>
+            <a:endParaRPr kumimoji="0" lang="en-US" altLang="en-US" sz="1800" b="0" i="0" u="none" strike="noStrike" cap="none" normalizeH="0" baseline="0" dirty="0">
+              <a:ln>
+                <a:noFill/>
+              </a:ln>
+              <a:solidFill>
+                <a:schemeClr val="tx1"/>
+              </a:solidFill>
+              <a:effectLst/>
+              <a:latin typeface="Space Grotesk Medium" panose="020B0604020202020204" charset="0"/>
+              <a:cs typeface="Space Grotesk Medium" panose="020B0604020202020204" charset="0"/>
+            </a:endParaRPr>
           </a:p>
         </p:txBody>
       </p:sp>
@@ -28831,7 +26918,7 @@
 </p:sld>
 </file>
 
-<file path=ppt/slides/slide14.xml><?xml version="1.0" encoding="utf-8"?>
+<file path=ppt/slides/slide13.xml><?xml version="1.0" encoding="utf-8"?>
 <p:sld xmlns:a="http://schemas.openxmlformats.org/drawingml/2006/main" xmlns:r="http://schemas.openxmlformats.org/officeDocument/2006/relationships" xmlns:p="http://schemas.openxmlformats.org/presentationml/2006/main">
   <p:cSld>
     <p:spTree>
@@ -31105,6 +29192,200 @@
             </a:pPr>
             <a:r>
               <a:rPr lang="sr-Latn-RS" dirty="0"/>
+              <a:t>InfluxDB 3 Core</a:t>
+            </a:r>
+            <a:endParaRPr dirty="0"/>
+          </a:p>
+        </p:txBody>
+      </p:sp>
+      <p:sp>
+        <p:nvSpPr>
+          <p:cNvPr id="306" name="Google Shape;306;p34"/>
+          <p:cNvSpPr txBox="1">
+            <a:spLocks noGrp="1"/>
+          </p:cNvSpPr>
+          <p:nvPr>
+            <p:ph type="subTitle" idx="3"/>
+          </p:nvPr>
+        </p:nvSpPr>
+        <p:spPr>
+          <a:xfrm>
+            <a:off x="786493" y="1399074"/>
+            <a:ext cx="6843032" cy="2265670"/>
+          </a:xfrm>
+          <a:prstGeom prst="rect">
+            <a:avLst/>
+          </a:prstGeom>
+        </p:spPr>
+        <p:txBody>
+          <a:bodyPr spcFirstLastPara="1" wrap="square" lIns="91425" tIns="91425" rIns="91425" bIns="91425" anchor="t" anchorCtr="0">
+            <a:noAutofit/>
+          </a:bodyPr>
+          <a:lstStyle/>
+          <a:p>
+            <a:pPr marL="0" lvl="0" indent="0" algn="l" rtl="0">
+              <a:spcBef>
+                <a:spcPts val="0"/>
+              </a:spcBef>
+              <a:spcAft>
+                <a:spcPts val="0"/>
+              </a:spcAft>
+            </a:pPr>
+            <a:r>
+              <a:rPr lang="sr-Latn-RS" sz="2000" dirty="0"/>
+              <a:t>Čuva:</a:t>
+            </a:r>
+          </a:p>
+          <a:p>
+            <a:pPr marL="342900" lvl="0" indent="-342900" algn="l" rtl="0">
+              <a:spcBef>
+                <a:spcPts val="0"/>
+              </a:spcBef>
+              <a:spcAft>
+                <a:spcPts val="0"/>
+              </a:spcAft>
+              <a:buFont typeface="Arial" panose="020B0604020202020204" pitchFamily="34" charset="0"/>
+              <a:buChar char="•"/>
+            </a:pPr>
+            <a:r>
+              <a:rPr lang="sr-Latn-RS" sz="2000" dirty="0"/>
+              <a:t>Podatke – Parquet fajlovi, </a:t>
+            </a:r>
+          </a:p>
+          <a:p>
+            <a:pPr marL="342900" lvl="0" indent="-342900" algn="l" rtl="0">
+              <a:spcBef>
+                <a:spcPts val="0"/>
+              </a:spcBef>
+              <a:spcAft>
+                <a:spcPts val="0"/>
+              </a:spcAft>
+              <a:buFont typeface="Arial" panose="020B0604020202020204" pitchFamily="34" charset="0"/>
+              <a:buChar char="•"/>
+            </a:pPr>
+            <a:r>
+              <a:rPr lang="sr-Latn-RS" sz="2000" dirty="0"/>
+              <a:t>Metapodatke – baze, tabele, šema, stanje sistema</a:t>
+            </a:r>
+          </a:p>
+          <a:p>
+            <a:pPr marL="0" lvl="0" indent="0" algn="l" rtl="0">
+              <a:spcBef>
+                <a:spcPts val="0"/>
+              </a:spcBef>
+              <a:spcAft>
+                <a:spcPts val="0"/>
+              </a:spcAft>
+            </a:pPr>
+            <a:endParaRPr lang="sr-Latn-RS" sz="2000" dirty="0"/>
+          </a:p>
+          <a:p>
+            <a:pPr marL="0" lvl="0" indent="0"/>
+            <a:r>
+              <a:rPr lang="pl-PL" sz="2000" dirty="0"/>
+              <a:t>Backup/restore mora obuhvatiti i podatke i metapodatke</a:t>
+            </a:r>
+            <a:endParaRPr lang="sr-Latn-RS" sz="2000" dirty="0"/>
+          </a:p>
+          <a:p>
+            <a:pPr marL="285750" lvl="0" indent="-285750" algn="l" rtl="0">
+              <a:spcBef>
+                <a:spcPts val="0"/>
+              </a:spcBef>
+              <a:spcAft>
+                <a:spcPts val="0"/>
+              </a:spcAft>
+              <a:buFont typeface="Arial" panose="020B0604020202020204" pitchFamily="34" charset="0"/>
+              <a:buChar char="•"/>
+            </a:pPr>
+            <a:endParaRPr lang="en-US" sz="2000" dirty="0"/>
+          </a:p>
+          <a:p>
+            <a:pPr marL="0" lvl="0" indent="0" algn="l" rtl="0">
+              <a:spcBef>
+                <a:spcPts val="0"/>
+              </a:spcBef>
+              <a:spcAft>
+                <a:spcPts val="0"/>
+              </a:spcAft>
+            </a:pPr>
+            <a:endParaRPr dirty="0"/>
+          </a:p>
+        </p:txBody>
+      </p:sp>
+    </p:spTree>
+  </p:cSld>
+  <p:clrMapOvr>
+    <a:masterClrMapping/>
+  </p:clrMapOvr>
+</p:sld>
+</file>
+
+<file path=ppt/slides/slide3.xml><?xml version="1.0" encoding="utf-8"?>
+<p:sld xmlns:a="http://schemas.openxmlformats.org/drawingml/2006/main" xmlns:r="http://schemas.openxmlformats.org/officeDocument/2006/relationships" xmlns:p="http://schemas.openxmlformats.org/presentationml/2006/main">
+  <p:cSld>
+    <p:spTree>
+      <p:nvGrpSpPr>
+        <p:cNvPr id="1" name="Shape 301">
+          <a:extLst>
+            <a:ext uri="{FF2B5EF4-FFF2-40B4-BE49-F238E27FC236}">
+              <a16:creationId xmlns:a16="http://schemas.microsoft.com/office/drawing/2014/main" id="{A72E1E7E-4926-A11E-D0B8-CB320031D4A3}"/>
+            </a:ext>
+          </a:extLst>
+        </p:cNvPr>
+        <p:cNvGrpSpPr/>
+        <p:nvPr/>
+      </p:nvGrpSpPr>
+      <p:grpSpPr>
+        <a:xfrm>
+          <a:off x="0" y="0"/>
+          <a:ext cx="0" cy="0"/>
+          <a:chOff x="0" y="0"/>
+          <a:chExt cx="0" cy="0"/>
+        </a:xfrm>
+      </p:grpSpPr>
+      <p:sp>
+        <p:nvSpPr>
+          <p:cNvPr id="303" name="Google Shape;303;p34">
+            <a:extLst>
+              <a:ext uri="{FF2B5EF4-FFF2-40B4-BE49-F238E27FC236}">
+                <a16:creationId xmlns:a16="http://schemas.microsoft.com/office/drawing/2014/main" id="{456082CF-9B16-B92A-1CAF-52E616E9F133}"/>
+              </a:ext>
+            </a:extLst>
+          </p:cNvPr>
+          <p:cNvSpPr txBox="1">
+            <a:spLocks noGrp="1"/>
+          </p:cNvSpPr>
+          <p:nvPr>
+            <p:ph type="title"/>
+          </p:nvPr>
+        </p:nvSpPr>
+        <p:spPr>
+          <a:xfrm>
+            <a:off x="720000" y="445025"/>
+            <a:ext cx="7704000" cy="572700"/>
+          </a:xfrm>
+          <a:prstGeom prst="rect">
+            <a:avLst/>
+          </a:prstGeom>
+        </p:spPr>
+        <p:txBody>
+          <a:bodyPr spcFirstLastPara="1" wrap="square" lIns="91425" tIns="91425" rIns="91425" bIns="91425" anchor="t" anchorCtr="0">
+            <a:noAutofit/>
+          </a:bodyPr>
+          <a:lstStyle/>
+          <a:p>
+            <a:pPr marL="0" lvl="0" indent="0" algn="l" rtl="0">
+              <a:spcBef>
+                <a:spcPts val="0"/>
+              </a:spcBef>
+              <a:spcAft>
+                <a:spcPts val="0"/>
+              </a:spcAft>
+              <a:buNone/>
+            </a:pPr>
+            <a:r>
+              <a:rPr lang="sr-Latn-RS" dirty="0"/>
               <a:t>Object storage</a:t>
             </a:r>
             <a:endParaRPr dirty="0"/>
@@ -31113,7 +29394,13 @@
       </p:sp>
       <p:sp>
         <p:nvSpPr>
-          <p:cNvPr id="306" name="Google Shape;306;p34"/>
+          <p:cNvPr id="306" name="Google Shape;306;p34">
+            <a:extLst>
+              <a:ext uri="{FF2B5EF4-FFF2-40B4-BE49-F238E27FC236}">
+                <a16:creationId xmlns:a16="http://schemas.microsoft.com/office/drawing/2014/main" id="{8DE9A945-F865-14BD-5309-8E81F05727A9}"/>
+              </a:ext>
+            </a:extLst>
+          </p:cNvPr>
           <p:cNvSpPr txBox="1">
             <a:spLocks noGrp="1"/>
           </p:cNvSpPr>
@@ -31232,6 +29519,55 @@
               <a:rPr lang="en-US" sz="2000" dirty="0"/>
               <a:t>Google Cloud Storage.</a:t>
             </a:r>
+            <a:endParaRPr lang="sr-Latn-RS" sz="2000" dirty="0"/>
+          </a:p>
+          <a:p>
+            <a:pPr marL="285750" lvl="0" indent="-285750" algn="l" rtl="0">
+              <a:spcBef>
+                <a:spcPts val="0"/>
+              </a:spcBef>
+              <a:spcAft>
+                <a:spcPts val="0"/>
+              </a:spcAft>
+              <a:buFont typeface="Arial" panose="020B0604020202020204" pitchFamily="34" charset="0"/>
+              <a:buChar char="•"/>
+            </a:pPr>
+            <a:endParaRPr lang="sr-Latn-RS" sz="2000" dirty="0"/>
+          </a:p>
+          <a:p>
+            <a:pPr marL="0" lvl="0" indent="0"/>
+            <a:r>
+              <a:rPr lang="sr-Latn-RS" sz="2000" dirty="0"/>
+              <a:t>** </a:t>
+            </a:r>
+            <a:r>
+              <a:rPr lang="en-US" sz="2000" dirty="0"/>
+              <a:t>Memory-based object store </a:t>
+            </a:r>
+            <a:r>
+              <a:rPr lang="en-US" sz="2000" dirty="0" err="1"/>
+              <a:t>nije</a:t>
+            </a:r>
+            <a:r>
+              <a:rPr lang="en-US" sz="2000" dirty="0"/>
+              <a:t> </a:t>
+            </a:r>
+            <a:r>
+              <a:rPr lang="en-US" sz="2000" dirty="0" err="1"/>
+              <a:t>podržan</a:t>
+            </a:r>
+            <a:r>
+              <a:rPr lang="en-US" sz="2000" dirty="0"/>
+              <a:t> za backup </a:t>
+            </a:r>
+            <a:r>
+              <a:rPr lang="en-US" sz="2000" dirty="0" err="1"/>
+              <a:t>i</a:t>
+            </a:r>
+            <a:r>
+              <a:rPr lang="en-US" sz="2000" dirty="0"/>
+              <a:t> restore.</a:t>
+            </a:r>
           </a:p>
           <a:p>
             <a:pPr marL="0" lvl="0" indent="0" algn="l" rtl="0">
@@ -31247,6 +29583,11 @@
         </p:txBody>
       </p:sp>
     </p:spTree>
+    <p:extLst>
+      <p:ext uri="{BB962C8B-B14F-4D97-AF65-F5344CB8AC3E}">
+        <p14:creationId xmlns:p14="http://schemas.microsoft.com/office/powerpoint/2010/main" val="3734222929"/>
+      </p:ext>
+    </p:extLst>
   </p:cSld>
   <p:clrMapOvr>
     <a:masterClrMapping/>
@@ -31254,7 +29595,7 @@
 </p:sld>
 </file>
 
-<file path=ppt/slides/slide3.xml><?xml version="1.0" encoding="utf-8"?>
+<file path=ppt/slides/slide4.xml><?xml version="1.0" encoding="utf-8"?>
 <p:sld xmlns:a="http://schemas.openxmlformats.org/drawingml/2006/main" xmlns:r="http://schemas.openxmlformats.org/officeDocument/2006/relationships" xmlns:p="http://schemas.openxmlformats.org/presentationml/2006/main">
   <p:cSld>
     <p:spTree>
@@ -31387,7 +29728,7 @@
               <a:buChar char="•"/>
             </a:pPr>
             <a:r>
-              <a:rPr lang="sr-Latn-RS" dirty="0"/>
+              <a:rPr lang="sr-Latn-RS" b="1" dirty="0"/>
               <a:t>&lt;node_id&gt; </a:t>
             </a:r>
           </a:p>
@@ -31574,7 +29915,7 @@
 </p:sld>
 </file>
 
-<file path=ppt/slides/slide4.xml><?xml version="1.0" encoding="utf-8"?>
+<file path=ppt/slides/slide5.xml><?xml version="1.0" encoding="utf-8"?>
 <p:sld xmlns:a="http://schemas.openxmlformats.org/drawingml/2006/main" xmlns:r="http://schemas.openxmlformats.org/officeDocument/2006/relationships" xmlns:p="http://schemas.openxmlformats.org/presentationml/2006/main">
   <p:cSld>
     <p:spTree>
@@ -31680,7 +30021,7 @@
             </a:pPr>
             <a:r>
               <a:rPr lang="sr-Latn-RS" dirty="0"/>
-              <a:t>Ručno kopiranje fajlova</a:t>
+              <a:t>Ne postoji ugrađena komanda za backup/restore</a:t>
             </a:r>
           </a:p>
           <a:p>
@@ -31697,183 +30038,23 @@
             <a:endParaRPr lang="sr-Latn-RS" dirty="0"/>
           </a:p>
           <a:p>
-            <a:pPr marL="0" lvl="0" indent="0" algn="l" rtl="0">
+            <a:pPr marL="285750" lvl="0" indent="-285750" algn="l" rtl="0">
               <a:spcBef>
                 <a:spcPts val="0"/>
               </a:spcBef>
               <a:spcAft>
                 <a:spcPts val="0"/>
               </a:spcAft>
-            </a:pPr>
-            <a:endParaRPr lang="sr-Latn-RS" dirty="0"/>
-          </a:p>
-          <a:p>
-            <a:pPr marL="285750" lvl="0" indent="-285750">
               <a:buFont typeface="Arial" panose="020B0604020202020204" pitchFamily="34" charset="0"/>
               <a:buChar char="•"/>
             </a:pPr>
             <a:r>
               <a:rPr lang="sr-Latn-RS" dirty="0"/>
-              <a:t>K</a:t>
-            </a:r>
-            <a:r>
-              <a:rPr lang="en-US" dirty="0" err="1"/>
-              <a:t>opiranje</a:t>
-            </a:r>
-            <a:r>
-              <a:rPr lang="en-US" dirty="0"/>
-              <a:t> </a:t>
-            </a:r>
-            <a:r>
-              <a:rPr lang="en-US" dirty="0" err="1"/>
-              <a:t>svih</a:t>
-            </a:r>
-            <a:r>
-              <a:rPr lang="en-US" dirty="0"/>
-              <a:t> </a:t>
-            </a:r>
-            <a:r>
-              <a:rPr lang="en-US" dirty="0" err="1"/>
-              <a:t>fajlova</a:t>
-            </a:r>
-            <a:r>
-              <a:rPr lang="en-US" dirty="0"/>
-              <a:t> u </a:t>
-            </a:r>
-            <a:r>
-              <a:rPr lang="en-US" dirty="0" err="1"/>
-              <a:t>proizvoljnom</a:t>
-            </a:r>
-            <a:r>
-              <a:rPr lang="en-US" dirty="0"/>
-              <a:t> </a:t>
-            </a:r>
-            <a:r>
-              <a:rPr lang="en-US" dirty="0" err="1"/>
-              <a:t>trenutku</a:t>
-            </a:r>
-            <a:r>
-              <a:rPr lang="en-US" dirty="0"/>
-              <a:t> </a:t>
-            </a:r>
-            <a:r>
-              <a:rPr lang="en-US" dirty="0" err="1"/>
-              <a:t>i</a:t>
-            </a:r>
-            <a:r>
-              <a:rPr lang="en-US" dirty="0"/>
-              <a:t> </a:t>
-            </a:r>
-            <a:r>
-              <a:rPr lang="en-US" dirty="0" err="1"/>
-              <a:t>redosledu</a:t>
-            </a:r>
-            <a:r>
-              <a:rPr lang="en-US" dirty="0"/>
-              <a:t> </a:t>
-            </a:r>
-            <a:r>
-              <a:rPr lang="en-US" dirty="0" err="1"/>
-              <a:t>može</a:t>
-            </a:r>
-            <a:r>
-              <a:rPr lang="en-US" dirty="0"/>
-              <a:t> </a:t>
-            </a:r>
-            <a:r>
-              <a:rPr lang="en-US" dirty="0" err="1"/>
-              <a:t>rezultovati</a:t>
-            </a:r>
-            <a:r>
-              <a:rPr lang="en-US" dirty="0"/>
-              <a:t> </a:t>
-            </a:r>
-            <a:r>
-              <a:rPr lang="en-US" dirty="0" err="1"/>
-              <a:t>neusaglašenim</a:t>
-            </a:r>
-            <a:r>
-              <a:rPr lang="en-US" dirty="0"/>
-              <a:t> </a:t>
-            </a:r>
-            <a:r>
-              <a:rPr lang="en-US" dirty="0" err="1"/>
-              <a:t>snimkom</a:t>
-            </a:r>
-            <a:r>
-              <a:rPr lang="en-US" dirty="0"/>
-              <a:t>, </a:t>
-            </a:r>
-            <a:r>
-              <a:rPr lang="en-US" dirty="0" err="1"/>
-              <a:t>odnosno</a:t>
-            </a:r>
-            <a:r>
-              <a:rPr lang="en-US" dirty="0"/>
-              <a:t> </a:t>
-            </a:r>
-            <a:r>
-              <a:rPr lang="en-US" dirty="0" err="1"/>
-              <a:t>stanjem</a:t>
-            </a:r>
-            <a:r>
-              <a:rPr lang="en-US" dirty="0"/>
-              <a:t> u </a:t>
-            </a:r>
-            <a:r>
-              <a:rPr lang="en-US" dirty="0" err="1"/>
-              <a:t>kome</a:t>
-            </a:r>
-            <a:r>
-              <a:rPr lang="en-US" dirty="0"/>
-              <a:t> </a:t>
-            </a:r>
-            <a:r>
-              <a:rPr lang="en-US" dirty="0" err="1"/>
-              <a:t>su</a:t>
-            </a:r>
-            <a:r>
-              <a:rPr lang="en-US" dirty="0"/>
-              <a:t> </a:t>
-            </a:r>
-            <a:r>
-              <a:rPr lang="en-US" dirty="0" err="1"/>
-              <a:t>određene</a:t>
-            </a:r>
-            <a:r>
-              <a:rPr lang="en-US" dirty="0"/>
-              <a:t> </a:t>
-            </a:r>
-            <a:r>
-              <a:rPr lang="en-US" dirty="0" err="1"/>
-              <a:t>komponente</a:t>
-            </a:r>
-            <a:r>
-              <a:rPr lang="en-US" dirty="0"/>
-              <a:t> </a:t>
-            </a:r>
-            <a:r>
-              <a:rPr lang="en-US" dirty="0" err="1"/>
-              <a:t>novije</a:t>
-            </a:r>
-            <a:r>
-              <a:rPr lang="en-US" dirty="0"/>
-              <a:t> od </a:t>
-            </a:r>
-            <a:r>
-              <a:rPr lang="en-US" dirty="0" err="1"/>
-              <a:t>drugih</a:t>
-            </a:r>
-            <a:r>
-              <a:rPr lang="sr-Latn-RS" dirty="0"/>
-              <a:t>!</a:t>
+              <a:t>Administrator sprovodi proceduru nad fajlovima iz object storage-a</a:t>
             </a:r>
           </a:p>
           <a:p>
-            <a:pPr marL="285750" lvl="0" indent="-285750">
-              <a:buFont typeface="Arial" panose="020B0604020202020204" pitchFamily="34" charset="0"/>
-              <a:buChar char="•"/>
-            </a:pPr>
+            <a:pPr marL="0" lvl="0" indent="0"/>
             <a:endParaRPr lang="sr-Latn-RS" dirty="0"/>
           </a:p>
           <a:p>
@@ -31902,7 +30083,7 @@
 </p:sld>
 </file>
 
-<file path=ppt/slides/slide5.xml><?xml version="1.0" encoding="utf-8"?>
+<file path=ppt/slides/slide6.xml><?xml version="1.0" encoding="utf-8"?>
 <p:sld xmlns:a="http://schemas.openxmlformats.org/drawingml/2006/main" xmlns:r="http://schemas.openxmlformats.org/officeDocument/2006/relationships" xmlns:p="http://schemas.openxmlformats.org/presentationml/2006/main">
   <p:cSld>
     <p:spTree>
@@ -32014,46 +30195,6 @@
             </a:r>
             <a:r>
               <a:rPr lang="en-US" dirty="0"/>
-              <a:t> - snapshot </a:t>
-            </a:r>
-            <a:r>
-              <a:rPr lang="en-US" dirty="0" err="1"/>
-              <a:t>fajlovi</a:t>
-            </a:r>
-            <a:r>
-              <a:rPr lang="en-US" dirty="0"/>
-              <a:t> koji </a:t>
-            </a:r>
-            <a:r>
-              <a:rPr lang="en-US" dirty="0" err="1"/>
-              <a:t>definišu</a:t>
-            </a:r>
-            <a:r>
-              <a:rPr lang="en-US" dirty="0"/>
-              <a:t> </a:t>
-            </a:r>
-            <a:r>
-              <a:rPr lang="en-US" dirty="0" err="1"/>
-              <a:t>konzistentno</a:t>
-            </a:r>
-            <a:r>
-              <a:rPr lang="en-US" dirty="0"/>
-              <a:t> </a:t>
-            </a:r>
-            <a:r>
-              <a:rPr lang="en-US" dirty="0" err="1"/>
-              <a:t>stanje</a:t>
-            </a:r>
-            <a:r>
-              <a:rPr lang="en-US" dirty="0"/>
-              <a:t> Parquet </a:t>
-            </a:r>
-            <a:r>
-              <a:rPr lang="en-US" dirty="0" err="1"/>
-              <a:t>fajlova</a:t>
-            </a:r>
-            <a:r>
-              <a:rPr lang="en-US" dirty="0"/>
               <a:t>,</a:t>
             </a:r>
           </a:p>
@@ -32081,46 +30222,6 @@
             <a:r>
               <a:rPr lang="en-US" b="1" dirty="0"/>
               <a:t>/</a:t>
-            </a:r>
-            <a:r>
-              <a:rPr lang="en-US" dirty="0"/>
-              <a:t> - Parquet </a:t>
-            </a:r>
-            <a:r>
-              <a:rPr lang="en-US" dirty="0" err="1"/>
-              <a:t>fajlovi</a:t>
-            </a:r>
-            <a:r>
-              <a:rPr lang="en-US" dirty="0"/>
-              <a:t> </a:t>
-            </a:r>
-            <a:r>
-              <a:rPr lang="en-US" dirty="0" err="1"/>
-              <a:t>sa</a:t>
-            </a:r>
-            <a:r>
-              <a:rPr lang="en-US" dirty="0"/>
-              <a:t> </a:t>
-            </a:r>
-            <a:r>
-              <a:rPr lang="en-US" dirty="0" err="1"/>
-              <a:t>persistovanim</a:t>
-            </a:r>
-            <a:r>
-              <a:rPr lang="en-US" dirty="0"/>
-              <a:t> </a:t>
-            </a:r>
-            <a:r>
-              <a:rPr lang="en-US" dirty="0" err="1"/>
-              <a:t>vremensko-serijskim</a:t>
-            </a:r>
-            <a:r>
-              <a:rPr lang="en-US" dirty="0"/>
-              <a:t> </a:t>
-            </a:r>
-            <a:r>
-              <a:rPr lang="en-US" dirty="0" err="1"/>
-              <a:t>podacima</a:t>
             </a:r>
             <a:r>
               <a:rPr lang="en-US" dirty="0"/>
@@ -32154,62 +30255,6 @@
             </a:r>
             <a:r>
               <a:rPr lang="en-US" dirty="0"/>
-              <a:t> - WAL </a:t>
-            </a:r>
-            <a:r>
-              <a:rPr lang="en-US" dirty="0" err="1"/>
-              <a:t>fajlovi</a:t>
-            </a:r>
-            <a:r>
-              <a:rPr lang="en-US" dirty="0"/>
-              <a:t> </a:t>
-            </a:r>
-            <a:r>
-              <a:rPr lang="en-US" dirty="0" err="1"/>
-              <a:t>sa</a:t>
-            </a:r>
-            <a:r>
-              <a:rPr lang="en-US" dirty="0"/>
-              <a:t> </a:t>
-            </a:r>
-            <a:r>
-              <a:rPr lang="en-US" dirty="0" err="1"/>
-              <a:t>podacima</a:t>
-            </a:r>
-            <a:r>
-              <a:rPr lang="en-US" dirty="0"/>
-              <a:t> </a:t>
-            </a:r>
-            <a:r>
-              <a:rPr lang="en-US" dirty="0" err="1"/>
-              <a:t>još</a:t>
-            </a:r>
-            <a:r>
-              <a:rPr lang="en-US" dirty="0"/>
-              <a:t> </a:t>
-            </a:r>
-            <a:r>
-              <a:rPr lang="en-US" dirty="0" err="1"/>
-              <a:t>uvek</a:t>
-            </a:r>
-            <a:r>
-              <a:rPr lang="en-US" dirty="0"/>
-              <a:t> </a:t>
-            </a:r>
-            <a:r>
-              <a:rPr lang="en-US" dirty="0" err="1"/>
-              <a:t>nepersistovanim</a:t>
-            </a:r>
-            <a:r>
-              <a:rPr lang="en-US" dirty="0"/>
-              <a:t> u Parquet </a:t>
-            </a:r>
-            <a:r>
-              <a:rPr lang="en-US" dirty="0" err="1"/>
-              <a:t>formatu</a:t>
-            </a:r>
-            <a:r>
-              <a:rPr lang="en-US" dirty="0"/>
               <a:t>,</a:t>
             </a:r>
           </a:p>
@@ -32228,44 +30273,9 @@
             </a:r>
             <a:r>
               <a:rPr lang="en-US" b="1" dirty="0"/>
-              <a:t>&gt;/catalog/</a:t>
+              <a:t>&gt;/catalog/,</a:t>
             </a:r>
-            <a:r>
-              <a:rPr lang="en-US" dirty="0"/>
-              <a:t> - log </a:t>
-            </a:r>
-            <a:r>
-              <a:rPr lang="en-US" dirty="0" err="1"/>
-              <a:t>fajlovi</a:t>
-            </a:r>
-            <a:r>
-              <a:rPr lang="en-US" dirty="0"/>
-              <a:t> koji prate </a:t>
-            </a:r>
-            <a:r>
-              <a:rPr lang="en-US" dirty="0" err="1"/>
-              <a:t>promene</a:t>
-            </a:r>
-            <a:r>
-              <a:rPr lang="en-US" dirty="0"/>
-              <a:t> </a:t>
-            </a:r>
-            <a:r>
-              <a:rPr lang="en-US" dirty="0" err="1"/>
-              <a:t>kataloškog</a:t>
-            </a:r>
-            <a:r>
-              <a:rPr lang="en-US" dirty="0"/>
-              <a:t> </a:t>
-            </a:r>
-            <a:r>
-              <a:rPr lang="en-US" dirty="0" err="1"/>
-              <a:t>stanja</a:t>
-            </a:r>
-            <a:r>
-              <a:rPr lang="en-US" dirty="0"/>
-              <a:t>,</a:t>
-            </a:r>
+            <a:endParaRPr lang="en-US" dirty="0"/>
           </a:p>
           <a:p>
             <a:pPr marL="495300" lvl="0" indent="-342900">
@@ -32290,56 +30300,54 @@
             </a:r>
             <a:r>
               <a:rPr lang="en-US" dirty="0"/>
-              <a:t> - checkpoint </a:t>
+              <a:t>.</a:t>
+            </a:r>
+          </a:p>
+          <a:p>
+            <a:pPr marL="495300" lvl="0" indent="-342900">
+              <a:buFont typeface="+mj-lt"/>
+              <a:buAutoNum type="arabicPeriod"/>
+            </a:pPr>
+            <a:endParaRPr lang="en-US" dirty="0"/>
+          </a:p>
+          <a:p>
+            <a:pPr marL="152400" lvl="0" indent="0"/>
+            <a:r>
+              <a:rPr lang="en-US" dirty="0"/>
+              <a:t>Ne </a:t>
             </a:r>
             <a:r>
               <a:rPr lang="en-US" dirty="0" err="1"/>
-              <a:t>fajl</a:t>
+              <a:t>kopira</a:t>
             </a:r>
             <a:r>
               <a:rPr lang="en-US" dirty="0"/>
-              <a:t> koji </a:t>
+              <a:t> se</a:t>
+            </a:r>
+            <a:r>
+              <a:rPr lang="sr-Latn-RS" dirty="0"/>
+              <a:t>:</a:t>
+            </a:r>
+          </a:p>
+          <a:p>
+            <a:pPr marL="152400" lvl="0" indent="0"/>
+            <a:r>
+              <a:rPr lang="sr-Latn-RS" dirty="0"/>
+              <a:t>/</a:t>
+            </a:r>
+            <a:r>
+              <a:rPr lang="en-US" dirty="0"/>
+              <a:t>table-snapshots/ - </a:t>
             </a:r>
             <a:r>
               <a:rPr lang="en-US" dirty="0" err="1"/>
-              <a:t>predstavlja</a:t>
+              <a:t>regeneri</a:t>
             </a:r>
             <a:r>
-              <a:rPr lang="en-US" dirty="0"/>
-              <a:t> </a:t>
+              <a:rPr lang="sr-Latn-RS" dirty="0"/>
+              <a:t>še se pri restartu</a:t>
             </a:r>
-            <a:r>
-              <a:rPr lang="en-US" dirty="0" err="1"/>
-              <a:t>sažeto</a:t>
-            </a:r>
-            <a:r>
-              <a:rPr lang="en-US" dirty="0"/>
-              <a:t> </a:t>
-            </a:r>
-            <a:r>
-              <a:rPr lang="en-US" dirty="0" err="1"/>
-              <a:t>trenutno</a:t>
-            </a:r>
-            <a:r>
-              <a:rPr lang="en-US" dirty="0"/>
-              <a:t> </a:t>
-            </a:r>
-            <a:r>
-              <a:rPr lang="en-US" dirty="0" err="1"/>
-              <a:t>stanje</a:t>
-            </a:r>
-            <a:r>
-              <a:rPr lang="en-US" dirty="0"/>
-              <a:t> </a:t>
-            </a:r>
-            <a:r>
-              <a:rPr lang="en-US" dirty="0" err="1"/>
-              <a:t>kataloga</a:t>
-            </a:r>
-            <a:r>
-              <a:rPr lang="en-US" dirty="0"/>
-              <a:t>.</a:t>
-            </a:r>
+            <a:endParaRPr lang="en-US" dirty="0"/>
           </a:p>
         </p:txBody>
       </p:sp>
@@ -32356,7 +30364,7 @@
 </p:sld>
 </file>
 
-<file path=ppt/slides/slide6.xml><?xml version="1.0" encoding="utf-8"?>
+<file path=ppt/slides/slide7.xml><?xml version="1.0" encoding="utf-8"?>
 <p:sld xmlns:a="http://schemas.openxmlformats.org/drawingml/2006/main" xmlns:r="http://schemas.openxmlformats.org/officeDocument/2006/relationships" xmlns:p="http://schemas.openxmlformats.org/presentationml/2006/main">
   <p:cSld>
     <p:spTree>
@@ -32469,7 +30477,7 @@
 </p:sld>
 </file>
 
-<file path=ppt/slides/slide7.xml><?xml version="1.0" encoding="utf-8"?>
+<file path=ppt/slides/slide8.xml><?xml version="1.0" encoding="utf-8"?>
 <p:sld xmlns:a="http://schemas.openxmlformats.org/drawingml/2006/main" xmlns:r="http://schemas.openxmlformats.org/officeDocument/2006/relationships" xmlns:p="http://schemas.openxmlformats.org/presentationml/2006/main">
   <p:cSld>
     <p:spTree>
@@ -32585,367 +30593,6 @@
     <p:extLst>
       <p:ext uri="{BB962C8B-B14F-4D97-AF65-F5344CB8AC3E}">
         <p14:creationId xmlns:p14="http://schemas.microsoft.com/office/powerpoint/2010/main" val="1739962798"/>
-      </p:ext>
-    </p:extLst>
-  </p:cSld>
-  <p:clrMapOvr>
-    <a:masterClrMapping/>
-  </p:clrMapOvr>
-</p:sld>
-</file>
-
-<file path=ppt/slides/slide8.xml><?xml version="1.0" encoding="utf-8"?>
-<p:sld xmlns:a="http://schemas.openxmlformats.org/drawingml/2006/main" xmlns:r="http://schemas.openxmlformats.org/officeDocument/2006/relationships" xmlns:p="http://schemas.openxmlformats.org/presentationml/2006/main">
-  <p:cSld>
-    <p:spTree>
-      <p:nvGrpSpPr>
-        <p:cNvPr id="1" name="Shape 301">
-          <a:extLst>
-            <a:ext uri="{FF2B5EF4-FFF2-40B4-BE49-F238E27FC236}">
-              <a16:creationId xmlns:a16="http://schemas.microsoft.com/office/drawing/2014/main" id="{BD59B73F-85AF-1961-1959-C07BD40A91F9}"/>
-            </a:ext>
-          </a:extLst>
-        </p:cNvPr>
-        <p:cNvGrpSpPr/>
-        <p:nvPr/>
-      </p:nvGrpSpPr>
-      <p:grpSpPr>
-        <a:xfrm>
-          <a:off x="0" y="0"/>
-          <a:ext cx="0" cy="0"/>
-          <a:chOff x="0" y="0"/>
-          <a:chExt cx="0" cy="0"/>
-        </a:xfrm>
-      </p:grpSpPr>
-      <p:sp>
-        <p:nvSpPr>
-          <p:cNvPr id="303" name="Google Shape;303;p34">
-            <a:extLst>
-              <a:ext uri="{FF2B5EF4-FFF2-40B4-BE49-F238E27FC236}">
-                <a16:creationId xmlns:a16="http://schemas.microsoft.com/office/drawing/2014/main" id="{D73E0423-B49E-21B8-4821-DC5558D2732B}"/>
-              </a:ext>
-            </a:extLst>
-          </p:cNvPr>
-          <p:cNvSpPr txBox="1">
-            <a:spLocks noGrp="1"/>
-          </p:cNvSpPr>
-          <p:nvPr>
-            <p:ph type="title"/>
-          </p:nvPr>
-        </p:nvSpPr>
-        <p:spPr>
-          <a:xfrm>
-            <a:off x="720000" y="445025"/>
-            <a:ext cx="7704000" cy="572700"/>
-          </a:xfrm>
-          <a:prstGeom prst="rect">
-            <a:avLst/>
-          </a:prstGeom>
-        </p:spPr>
-        <p:txBody>
-          <a:bodyPr spcFirstLastPara="1" wrap="square" lIns="91425" tIns="91425" rIns="91425" bIns="91425" anchor="t" anchorCtr="0">
-            <a:noAutofit/>
-          </a:bodyPr>
-          <a:lstStyle/>
-          <a:p>
-            <a:pPr lvl="1"/>
-            <a:r>
-              <a:rPr lang="sr-Latn-RS" sz="3200" dirty="0"/>
-              <a:t>Restore</a:t>
-            </a:r>
-            <a:endParaRPr lang="en-US" sz="3200" dirty="0"/>
-          </a:p>
-        </p:txBody>
-      </p:sp>
-      <p:sp>
-        <p:nvSpPr>
-          <p:cNvPr id="306" name="Google Shape;306;p34">
-            <a:extLst>
-              <a:ext uri="{FF2B5EF4-FFF2-40B4-BE49-F238E27FC236}">
-                <a16:creationId xmlns:a16="http://schemas.microsoft.com/office/drawing/2014/main" id="{7E27D7C3-042F-5654-C1A9-03CB9B588323}"/>
-              </a:ext>
-            </a:extLst>
-          </p:cNvPr>
-          <p:cNvSpPr txBox="1">
-            <a:spLocks noGrp="1"/>
-          </p:cNvSpPr>
-          <p:nvPr>
-            <p:ph type="subTitle" idx="3"/>
-          </p:nvPr>
-        </p:nvSpPr>
-        <p:spPr>
-          <a:xfrm>
-            <a:off x="786492" y="1399073"/>
-            <a:ext cx="7703999" cy="2987189"/>
-          </a:xfrm>
-          <a:prstGeom prst="rect">
-            <a:avLst/>
-          </a:prstGeom>
-        </p:spPr>
-        <p:txBody>
-          <a:bodyPr spcFirstLastPara="1" wrap="square" lIns="91425" tIns="91425" rIns="91425" bIns="91425" anchor="t" anchorCtr="0">
-            <a:noAutofit/>
-          </a:bodyPr>
-          <a:lstStyle/>
-          <a:p>
-            <a:pPr marL="438150" indent="-285750">
-              <a:buFont typeface="Arial" panose="020B0604020202020204" pitchFamily="34" charset="0"/>
-              <a:buChar char="•"/>
-            </a:pPr>
-            <a:r>
-              <a:rPr lang="sr-Latn-RS" dirty="0"/>
-              <a:t>V</a:t>
-            </a:r>
-            <a:r>
-              <a:rPr lang="en-US" dirty="0" err="1"/>
-              <a:t>raćanje</a:t>
-            </a:r>
-            <a:r>
-              <a:rPr lang="en-US" dirty="0"/>
-              <a:t> </a:t>
-            </a:r>
-            <a:r>
-              <a:rPr lang="en-US" dirty="0" err="1"/>
-              <a:t>međusobno</a:t>
-            </a:r>
-            <a:r>
-              <a:rPr lang="en-US" dirty="0"/>
-              <a:t> </a:t>
-            </a:r>
-            <a:r>
-              <a:rPr lang="en-US" dirty="0" err="1"/>
-              <a:t>zavisnih</a:t>
-            </a:r>
-            <a:r>
-              <a:rPr lang="en-US" dirty="0"/>
-              <a:t> </a:t>
-            </a:r>
-            <a:r>
-              <a:rPr lang="en-US" dirty="0" err="1"/>
-              <a:t>komponenti</a:t>
-            </a:r>
-            <a:r>
-              <a:rPr lang="en-US" dirty="0"/>
-              <a:t> u </a:t>
-            </a:r>
-            <a:r>
-              <a:rPr lang="en-US" dirty="0" err="1"/>
-              <a:t>precizno</a:t>
-            </a:r>
-            <a:r>
-              <a:rPr lang="en-US" dirty="0"/>
-              <a:t> </a:t>
-            </a:r>
-            <a:r>
-              <a:rPr lang="en-US" dirty="0" err="1"/>
-              <a:t>određenom</a:t>
-            </a:r>
-            <a:r>
-              <a:rPr lang="en-US" dirty="0"/>
-              <a:t> </a:t>
-            </a:r>
-            <a:r>
-              <a:rPr lang="en-US" dirty="0" err="1"/>
-              <a:t>redosledu</a:t>
-            </a:r>
-            <a:r>
-              <a:rPr lang="en-US" dirty="0"/>
-              <a:t>, </a:t>
-            </a:r>
-            <a:r>
-              <a:rPr lang="en-US" dirty="0" err="1"/>
-              <a:t>pri</a:t>
-            </a:r>
-            <a:r>
-              <a:rPr lang="en-US" dirty="0"/>
-              <a:t> </a:t>
-            </a:r>
-            <a:r>
-              <a:rPr lang="en-US" dirty="0" err="1"/>
-              <a:t>čemu</a:t>
-            </a:r>
-            <a:r>
-              <a:rPr lang="en-US" dirty="0"/>
-              <a:t> </a:t>
-            </a:r>
-            <a:r>
-              <a:rPr lang="en-US" dirty="0" err="1"/>
-              <a:t>pogrešan</a:t>
-            </a:r>
-            <a:r>
-              <a:rPr lang="en-US" dirty="0"/>
-              <a:t> </a:t>
-            </a:r>
-            <a:r>
-              <a:rPr lang="en-US" dirty="0" err="1"/>
-              <a:t>redosled</a:t>
-            </a:r>
-            <a:r>
-              <a:rPr lang="en-US" dirty="0"/>
-              <a:t> </a:t>
-            </a:r>
-            <a:r>
-              <a:rPr lang="en-US" dirty="0" err="1"/>
-              <a:t>može</a:t>
-            </a:r>
-            <a:r>
-              <a:rPr lang="en-US" dirty="0"/>
-              <a:t> </a:t>
-            </a:r>
-            <a:r>
-              <a:rPr lang="en-US" dirty="0" err="1"/>
-              <a:t>rezultovati</a:t>
-            </a:r>
-            <a:r>
-              <a:rPr lang="en-US" dirty="0"/>
-              <a:t> </a:t>
-            </a:r>
-            <a:r>
-              <a:rPr lang="en-US" dirty="0" err="1"/>
-              <a:t>stanjem</a:t>
-            </a:r>
-            <a:r>
-              <a:rPr lang="en-US" dirty="0"/>
-              <a:t> u </a:t>
-            </a:r>
-            <a:r>
-              <a:rPr lang="en-US" dirty="0" err="1"/>
-              <a:t>kome</a:t>
-            </a:r>
-            <a:r>
-              <a:rPr lang="en-US" dirty="0"/>
-              <a:t> </a:t>
-            </a:r>
-            <a:r>
-              <a:rPr lang="en-US" dirty="0" err="1"/>
-              <a:t>sistem</a:t>
-            </a:r>
-            <a:r>
-              <a:rPr lang="en-US" dirty="0"/>
-              <a:t> </a:t>
-            </a:r>
-            <a:r>
-              <a:rPr lang="en-US" dirty="0" err="1"/>
-              <a:t>startuje</a:t>
-            </a:r>
-            <a:r>
-              <a:rPr lang="en-US" dirty="0"/>
-              <a:t>, </a:t>
-            </a:r>
-            <a:r>
-              <a:rPr lang="en-US" dirty="0" err="1"/>
-              <a:t>ali</a:t>
-            </a:r>
-            <a:r>
-              <a:rPr lang="en-US" dirty="0"/>
-              <a:t> </a:t>
-            </a:r>
-            <a:r>
-              <a:rPr lang="en-US" dirty="0" err="1"/>
-              <a:t>podaci</a:t>
-            </a:r>
-            <a:r>
-              <a:rPr lang="en-US" dirty="0"/>
-              <a:t> </a:t>
-            </a:r>
-            <a:r>
-              <a:rPr lang="en-US" dirty="0" err="1"/>
-              <a:t>nisu</a:t>
-            </a:r>
-            <a:r>
-              <a:rPr lang="en-US" dirty="0"/>
-              <a:t> </a:t>
-            </a:r>
-            <a:r>
-              <a:rPr lang="en-US" dirty="0" err="1"/>
-              <a:t>potpuni</a:t>
-            </a:r>
-            <a:r>
-              <a:rPr lang="en-US" dirty="0"/>
-              <a:t> </a:t>
-            </a:r>
-            <a:r>
-              <a:rPr lang="en-US" dirty="0" err="1"/>
-              <a:t>ili</a:t>
-            </a:r>
-            <a:r>
-              <a:rPr lang="en-US" dirty="0"/>
-              <a:t> Catalog </a:t>
-            </a:r>
-            <a:r>
-              <a:rPr lang="en-US" dirty="0" err="1"/>
-              <a:t>nije</a:t>
-            </a:r>
-            <a:r>
-              <a:rPr lang="en-US" dirty="0"/>
-              <a:t> </a:t>
-            </a:r>
-            <a:r>
-              <a:rPr lang="en-US" dirty="0" err="1"/>
-              <a:t>usaglašen</a:t>
-            </a:r>
-            <a:r>
-              <a:rPr lang="en-US" dirty="0"/>
-              <a:t> </a:t>
-            </a:r>
-            <a:r>
-              <a:rPr lang="en-US" dirty="0" err="1"/>
-              <a:t>sa</a:t>
-            </a:r>
-            <a:r>
-              <a:rPr lang="en-US" dirty="0"/>
-              <a:t> Parquet </a:t>
-            </a:r>
-            <a:r>
-              <a:rPr lang="en-US" dirty="0" err="1"/>
-              <a:t>fajlovima</a:t>
-            </a:r>
-            <a:r>
-              <a:rPr lang="en-US" dirty="0"/>
-              <a:t>.</a:t>
-            </a:r>
-          </a:p>
-          <a:p>
-            <a:pPr marL="438150" lvl="0" indent="-285750">
-              <a:buFont typeface="Arial" panose="020B0604020202020204" pitchFamily="34" charset="0"/>
-              <a:buChar char="•"/>
-            </a:pPr>
-            <a:endParaRPr lang="sr-Latn-RS" dirty="0"/>
-          </a:p>
-          <a:p>
-            <a:pPr marL="152400" lvl="0" indent="0"/>
-            <a:r>
-              <a:rPr lang="sr-Latn-RS" dirty="0"/>
-              <a:t>Uslovi: </a:t>
-            </a:r>
-          </a:p>
-          <a:p>
-            <a:pPr marL="438150" lvl="0" indent="-285750">
-              <a:buFont typeface="Arial" panose="020B0604020202020204" pitchFamily="34" charset="0"/>
-              <a:buChar char="•"/>
-            </a:pPr>
-            <a:r>
-              <a:rPr lang="sr-Latn-RS" dirty="0"/>
-              <a:t>Zaustaviti instancu </a:t>
-            </a:r>
-          </a:p>
-          <a:p>
-            <a:pPr marL="438150" lvl="0" indent="-285750">
-              <a:buFont typeface="Arial" panose="020B0604020202020204" pitchFamily="34" charset="0"/>
-              <a:buChar char="•"/>
-            </a:pPr>
-            <a:r>
-              <a:rPr lang="sr-Latn-RS" dirty="0"/>
-              <a:t>Brisanje postojećih podataka (opciono)</a:t>
-            </a:r>
-            <a:endParaRPr lang="en-US" dirty="0"/>
-          </a:p>
-        </p:txBody>
-      </p:sp>
-    </p:spTree>
-    <p:extLst>
-      <p:ext uri="{BB962C8B-B14F-4D97-AF65-F5344CB8AC3E}">
-        <p14:creationId xmlns:p14="http://schemas.microsoft.com/office/powerpoint/2010/main" val="4128999714"/>
       </p:ext>
     </p:extLst>
   </p:cSld>
@@ -33074,39 +30721,7 @@
               <a:t>catalog_checkpoint</a:t>
             </a:r>
             <a:r>
-              <a:rPr lang="sr-Cyrl-RS" sz="2000" dirty="0"/>
-              <a:t> </a:t>
-            </a:r>
-            <a:r>
-              <a:rPr lang="sr-Latn-RS" sz="2000" dirty="0"/>
-              <a:t>-</a:t>
-            </a:r>
-            <a:r>
-              <a:rPr lang="sr-Cyrl-RS" sz="2000" dirty="0"/>
-              <a:t> </a:t>
-            </a:r>
-            <a:r>
-              <a:rPr lang="sr-Cyrl-RS" sz="2000" dirty="0" err="1"/>
-              <a:t>checkpoint</a:t>
-            </a:r>
-            <a:r>
-              <a:rPr lang="sr-Cyrl-RS" sz="2000" dirty="0"/>
-              <a:t> </a:t>
-            </a:r>
-            <a:r>
-              <a:rPr lang="sr-Cyrl-RS" sz="2000" dirty="0" err="1"/>
-              <a:t>fajl</a:t>
-            </a:r>
-            <a:r>
-              <a:rPr lang="sr-Cyrl-RS" sz="2000" dirty="0"/>
-              <a:t> </a:t>
-            </a:r>
-            <a:r>
-              <a:rPr lang="sr-Cyrl-RS" sz="2000" dirty="0" err="1"/>
-              <a:t>kataloga</a:t>
-            </a:r>
-            <a:r>
-              <a:rPr lang="sr-Latn-RS" sz="2000" dirty="0"/>
+              <a:rPr lang="sr-Latn-RS" sz="2000" b="1" dirty="0"/>
               <a:t>,</a:t>
             </a:r>
             <a:endParaRPr lang="en-US" sz="2000" dirty="0"/>
@@ -33135,38 +30750,6 @@
             <a:r>
               <a:rPr lang="sr-Cyrl-RS" sz="2000" b="1" dirty="0"/>
               <a:t>/</a:t>
-            </a:r>
-            <a:r>
-              <a:rPr lang="sr-Cyrl-RS" sz="2000" dirty="0"/>
-              <a:t> </a:t>
-            </a:r>
-            <a:r>
-              <a:rPr lang="sr-Latn-RS" sz="2000" dirty="0"/>
-              <a:t>-</a:t>
-            </a:r>
-            <a:r>
-              <a:rPr lang="sr-Cyrl-RS" sz="2000" dirty="0"/>
-              <a:t> </a:t>
-            </a:r>
-            <a:r>
-              <a:rPr lang="sr-Cyrl-RS" sz="2000" dirty="0" err="1"/>
-              <a:t>log</a:t>
-            </a:r>
-            <a:r>
-              <a:rPr lang="sr-Cyrl-RS" sz="2000" dirty="0"/>
-              <a:t> </a:t>
-            </a:r>
-            <a:r>
-              <a:rPr lang="sr-Cyrl-RS" sz="2000" dirty="0" err="1"/>
-              <a:t>fajlovi</a:t>
-            </a:r>
-            <a:r>
-              <a:rPr lang="sr-Cyrl-RS" sz="2000" dirty="0"/>
-              <a:t> </a:t>
-            </a:r>
-            <a:r>
-              <a:rPr lang="sr-Cyrl-RS" sz="2000" dirty="0" err="1"/>
-              <a:t>kataloga</a:t>
             </a:r>
             <a:r>
               <a:rPr lang="sr-Latn-RS" sz="2000" dirty="0"/>
@@ -33200,22 +30783,6 @@
               <a:t>/</a:t>
             </a:r>
             <a:r>
-              <a:rPr lang="sr-Cyrl-RS" sz="2000" dirty="0"/>
-              <a:t> </a:t>
-            </a:r>
-            <a:r>
-              <a:rPr lang="sr-Latn-RS" sz="2000" dirty="0"/>
-              <a:t>- WAL</a:t>
-            </a:r>
-            <a:r>
-              <a:rPr lang="sr-Cyrl-RS" sz="2000" dirty="0"/>
-              <a:t> </a:t>
-            </a:r>
-            <a:r>
-              <a:rPr lang="sr-Cyrl-RS" sz="2000" dirty="0" err="1"/>
-              <a:t>fajlovi</a:t>
-            </a:r>
-            <a:r>
               <a:rPr lang="sr-Latn-RS" sz="2000" dirty="0"/>
               <a:t>,</a:t>
             </a:r>
@@ -33247,54 +30814,6 @@
               <a:t>/</a:t>
             </a:r>
             <a:r>
-              <a:rPr lang="sr-Cyrl-RS" sz="2000" dirty="0"/>
-              <a:t> </a:t>
-            </a:r>
-            <a:r>
-              <a:rPr lang="sr-Latn-RS" sz="2000" dirty="0"/>
-              <a:t>-</a:t>
-            </a:r>
-            <a:r>
-              <a:rPr lang="sr-Cyrl-RS" sz="2000" dirty="0"/>
-              <a:t> </a:t>
-            </a:r>
-            <a:r>
-              <a:rPr lang="sr-Cyrl-RS" sz="2000" dirty="0" err="1"/>
-              <a:t>Parquet</a:t>
-            </a:r>
-            <a:r>
-              <a:rPr lang="sr-Cyrl-RS" sz="2000" dirty="0"/>
-              <a:t> </a:t>
-            </a:r>
-            <a:r>
-              <a:rPr lang="sr-Cyrl-RS" sz="2000" dirty="0" err="1"/>
-              <a:t>fajlovi</a:t>
-            </a:r>
-            <a:r>
-              <a:rPr lang="sr-Cyrl-RS" sz="2000" dirty="0"/>
-              <a:t> </a:t>
-            </a:r>
-            <a:r>
-              <a:rPr lang="sr-Cyrl-RS" sz="2000" dirty="0" err="1"/>
-              <a:t>sa</a:t>
-            </a:r>
-            <a:r>
-              <a:rPr lang="sr-Cyrl-RS" sz="2000" dirty="0"/>
-              <a:t> </a:t>
-            </a:r>
-            <a:r>
-              <a:rPr lang="sr-Cyrl-RS" sz="2000" dirty="0" err="1"/>
-              <a:t>persistovanim</a:t>
-            </a:r>
-            <a:r>
-              <a:rPr lang="sr-Cyrl-RS" sz="2000" dirty="0"/>
-              <a:t> </a:t>
-            </a:r>
-            <a:r>
-              <a:rPr lang="sr-Cyrl-RS" sz="2000" dirty="0" err="1"/>
-              <a:t>podacima</a:t>
-            </a:r>
-            <a:r>
               <a:rPr lang="sr-Latn-RS" sz="2000" dirty="0"/>
               <a:t>,</a:t>
             </a:r>
@@ -33324,30 +30843,6 @@
             <a:r>
               <a:rPr lang="sr-Cyrl-RS" sz="2000" b="1" dirty="0"/>
               <a:t>/</a:t>
-            </a:r>
-            <a:r>
-              <a:rPr lang="sr-Cyrl-RS" sz="2000" dirty="0"/>
-              <a:t> </a:t>
-            </a:r>
-            <a:r>
-              <a:rPr lang="sr-Latn-RS" sz="2000" dirty="0"/>
-              <a:t>-</a:t>
-            </a:r>
-            <a:r>
-              <a:rPr lang="sr-Cyrl-RS" sz="2000" dirty="0"/>
-              <a:t> </a:t>
-            </a:r>
-            <a:r>
-              <a:rPr lang="sr-Cyrl-RS" sz="2000" dirty="0" err="1"/>
-              <a:t>snapshot</a:t>
-            </a:r>
-            <a:r>
-              <a:rPr lang="sr-Cyrl-RS" sz="2000" dirty="0"/>
-              <a:t> </a:t>
-            </a:r>
-            <a:r>
-              <a:rPr lang="sr-Cyrl-RS" sz="2000" dirty="0" err="1"/>
-              <a:t>fajlovi</a:t>
             </a:r>
             <a:r>
               <a:rPr lang="sr-Latn-RS" sz="2000" dirty="0"/>
